--- a/baaad-strategy.pptx
+++ b/baaad-strategy.pptx
@@ -3410,7 +3410,7 @@
                   <a:srgbClr val="88AA88"/>
                 </a:solidFill>
               </a:rPr>
-              <a:t>github.com/amyou/baaad-strategy</a:t>
+              <a:t>github.com/ayoung31/baaad-strategy</a:t>
             </a:r>
           </a:p>
         </p:txBody>
@@ -4988,7 +4988,7 @@
                   <a:srgbClr val="2E7D32"/>
                 </a:solidFill>
               </a:rPr>
-              <a:t>github.com/amyou/baaad-strategy</a:t>
+              <a:t>github.com/ayoung31/baaad-strategy</a:t>
             </a:r>
           </a:p>
         </p:txBody>

--- a/baaad-strategy.pptx
+++ b/baaad-strategy.pptx
@@ -20,6 +20,7 @@
     <p:sldId id="268" r:id="rId19"/>
     <p:sldId id="269" r:id="rId20"/>
     <p:sldId id="270" r:id="rId21"/>
+    <p:sldId id="271" r:id="rId22"/>
   </p:sldIdLst>
   <p:sldSz cx="12188952" cy="6858000" type="screen4x3"/>
   <p:notesSz cx="6858000" cy="9144000"/>
@@ -3537,550 +3538,514 @@
                   <a:srgbClr val="FFFBF0"/>
                 </a:solidFill>
               </a:rPr>
-              <a:t>How to Run the Simulation</a:t>
-            </a:r>
-          </a:p>
-        </p:txBody>
-      </p:sp>
-      <p:sp>
-        <p:nvSpPr>
-          <p:cNvPr id="4" name="Rectangle 3"/>
-          <p:cNvSpPr/>
+              <a:t>Simplifications vs. Full Catan Rules</a:t>
+            </a:r>
+          </a:p>
+        </p:txBody>
+      </p:sp>
+      <p:graphicFrame>
+        <p:nvGraphicFramePr>
+          <p:cNvPr id="4" name="Table 3"/>
+          <p:cNvGraphicFramePr>
+            <a:graphicFrameLocks noGrp="1"/>
+          </p:cNvGraphicFramePr>
           <p:nvPr/>
-        </p:nvSpPr>
-        <p:spPr>
-          <a:xfrm>
-            <a:off x="365760" y="1188720"/>
-            <a:ext cx="7772400" cy="2926080"/>
-          </a:xfrm>
-          <a:prstGeom prst="rect">
-            <a:avLst/>
-          </a:prstGeom>
-          <a:solidFill>
-            <a:srgbClr val="1A3D1A"/>
-          </a:solidFill>
-          <a:ln w="19050">
-            <a:solidFill>
-              <a:srgbClr val="8ECF3A"/>
-            </a:solidFill>
-          </a:ln>
-        </p:spPr>
-        <p:style>
-          <a:lnRef idx="1">
-            <a:schemeClr val="accent1"/>
-          </a:lnRef>
-          <a:fillRef idx="3">
-            <a:schemeClr val="accent1"/>
-          </a:fillRef>
-          <a:effectRef idx="2">
-            <a:schemeClr val="accent1"/>
-          </a:effectRef>
-          <a:fontRef idx="minor">
-            <a:schemeClr val="lt1"/>
-          </a:fontRef>
-        </p:style>
-        <p:txBody>
-          <a:bodyPr rtlCol="0" anchor="ctr"/>
-          <a:lstStyle/>
-          <a:p>
-            <a:pPr algn="ctr"/>
-          </a:p>
-        </p:txBody>
-      </p:sp>
-      <p:sp>
-        <p:nvSpPr>
-          <p:cNvPr id="5" name="TextBox 4"/>
-          <p:cNvSpPr txBox="1"/>
-          <p:nvPr/>
-        </p:nvSpPr>
-        <p:spPr>
-          <a:xfrm>
-            <a:off x="640080" y="1325880"/>
-            <a:ext cx="7315200" cy="2651760"/>
-          </a:xfrm>
-          <a:prstGeom prst="rect">
-            <a:avLst/>
-          </a:prstGeom>
-          <a:noFill/>
-        </p:spPr>
-        <p:txBody>
-          <a:bodyPr wrap="square">
-            <a:spAutoFit/>
-          </a:bodyPr>
-          <a:lstStyle/>
-          <a:p>
-            <a:pPr algn="l"/>
-            <a:r>
-              <a:rPr sz="1700" b="0" i="0">
-                <a:solidFill>
-                  <a:srgbClr val="8ECF3A"/>
-                </a:solidFill>
-              </a:rPr>
-              <a:t>source("R/simulation.R")
-results &lt;- run_simulation(
-    n_games = 1000,
-    seed    = 42
-)
-source("R/analysis.R")
-plot_win_rates(results)</a:t>
-            </a:r>
-          </a:p>
-        </p:txBody>
-      </p:sp>
-      <p:sp>
-        <p:nvSpPr>
-          <p:cNvPr id="6" name="Rectangle 5"/>
-          <p:cNvSpPr/>
-          <p:nvPr/>
-        </p:nvSpPr>
-        <p:spPr>
-          <a:xfrm>
-            <a:off x="8412480" y="1234440"/>
-            <a:ext cx="3383280" cy="1143000"/>
-          </a:xfrm>
-          <a:prstGeom prst="rect">
-            <a:avLst/>
-          </a:prstGeom>
-          <a:solidFill>
-            <a:srgbClr val="FFFBF0"/>
-          </a:solidFill>
-          <a:ln w="9525">
-            <a:solidFill>
-              <a:srgbClr val="CCCCBB"/>
-            </a:solidFill>
-          </a:ln>
-        </p:spPr>
-        <p:style>
-          <a:lnRef idx="1">
-            <a:schemeClr val="accent1"/>
-          </a:lnRef>
-          <a:fillRef idx="3">
-            <a:schemeClr val="accent1"/>
-          </a:fillRef>
-          <a:effectRef idx="2">
-            <a:schemeClr val="accent1"/>
-          </a:effectRef>
-          <a:fontRef idx="minor">
-            <a:schemeClr val="lt1"/>
-          </a:fontRef>
-        </p:style>
-        <p:txBody>
-          <a:bodyPr rtlCol="0" anchor="ctr"/>
-          <a:lstStyle/>
-          <a:p>
-            <a:pPr algn="ctr"/>
-          </a:p>
-        </p:txBody>
-      </p:sp>
-      <p:sp>
-        <p:nvSpPr>
-          <p:cNvPr id="7" name="TextBox 6"/>
-          <p:cNvSpPr txBox="1"/>
-          <p:nvPr/>
-        </p:nvSpPr>
-        <p:spPr>
-          <a:xfrm>
-            <a:off x="8549640" y="1307592"/>
-            <a:ext cx="3108960" cy="365760"/>
-          </a:xfrm>
-          <a:prstGeom prst="rect">
-            <a:avLst/>
-          </a:prstGeom>
-          <a:noFill/>
-        </p:spPr>
-        <p:txBody>
-          <a:bodyPr wrap="square">
-            <a:spAutoFit/>
-          </a:bodyPr>
-          <a:lstStyle/>
-          <a:p>
-            <a:pPr algn="l"/>
-            <a:r>
-              <a:rPr sz="1400" b="1" i="0">
-                <a:solidFill>
-                  <a:srgbClr val="1A3D1A"/>
-                </a:solidFill>
-              </a:rPr>
-              <a:t>Output</a:t>
-            </a:r>
-          </a:p>
-        </p:txBody>
-      </p:sp>
-      <p:sp>
-        <p:nvSpPr>
-          <p:cNvPr id="8" name="TextBox 7"/>
-          <p:cNvSpPr txBox="1"/>
-          <p:nvPr/>
-        </p:nvSpPr>
-        <p:spPr>
-          <a:xfrm>
-            <a:off x="8549640" y="1645920"/>
-            <a:ext cx="3108960" cy="640080"/>
-          </a:xfrm>
-          <a:prstGeom prst="rect">
-            <a:avLst/>
-          </a:prstGeom>
-          <a:noFill/>
-        </p:spPr>
-        <p:txBody>
-          <a:bodyPr wrap="square">
-            <a:spAutoFit/>
-          </a:bodyPr>
-          <a:lstStyle/>
-          <a:p>
-            <a:pPr algn="l"/>
-            <a:r>
-              <a:rPr sz="1300" b="0" i="0">
-                <a:solidFill>
-                  <a:srgbClr val="1A1A1A"/>
-                </a:solidFill>
-              </a:rPr>
-              <a:t>results/simulation_results.csv</a:t>
-            </a:r>
-          </a:p>
-        </p:txBody>
-      </p:sp>
-      <p:sp>
-        <p:nvSpPr>
-          <p:cNvPr id="9" name="Rectangle 8"/>
-          <p:cNvSpPr/>
-          <p:nvPr/>
-        </p:nvSpPr>
-        <p:spPr>
-          <a:xfrm>
-            <a:off x="8412480" y="2560320"/>
-            <a:ext cx="3383280" cy="1143000"/>
-          </a:xfrm>
-          <a:prstGeom prst="rect">
-            <a:avLst/>
-          </a:prstGeom>
-          <a:solidFill>
-            <a:srgbClr val="FFFBF0"/>
-          </a:solidFill>
-          <a:ln w="9525">
-            <a:solidFill>
-              <a:srgbClr val="CCCCBB"/>
-            </a:solidFill>
-          </a:ln>
-        </p:spPr>
-        <p:style>
-          <a:lnRef idx="1">
-            <a:schemeClr val="accent1"/>
-          </a:lnRef>
-          <a:fillRef idx="3">
-            <a:schemeClr val="accent1"/>
-          </a:fillRef>
-          <a:effectRef idx="2">
-            <a:schemeClr val="accent1"/>
-          </a:effectRef>
-          <a:fontRef idx="minor">
-            <a:schemeClr val="lt1"/>
-          </a:fontRef>
-        </p:style>
-        <p:txBody>
-          <a:bodyPr rtlCol="0" anchor="ctr"/>
-          <a:lstStyle/>
-          <a:p>
-            <a:pPr algn="ctr"/>
-          </a:p>
-        </p:txBody>
-      </p:sp>
-      <p:sp>
-        <p:nvSpPr>
-          <p:cNvPr id="10" name="TextBox 9"/>
-          <p:cNvSpPr txBox="1"/>
-          <p:nvPr/>
-        </p:nvSpPr>
-        <p:spPr>
-          <a:xfrm>
-            <a:off x="8549640" y="2633472"/>
-            <a:ext cx="3108960" cy="365760"/>
-          </a:xfrm>
-          <a:prstGeom prst="rect">
-            <a:avLst/>
-          </a:prstGeom>
-          <a:noFill/>
-        </p:spPr>
-        <p:txBody>
-          <a:bodyPr wrap="square">
-            <a:spAutoFit/>
-          </a:bodyPr>
-          <a:lstStyle/>
-          <a:p>
-            <a:pPr algn="l"/>
-            <a:r>
-              <a:rPr sz="1400" b="1" i="0">
-                <a:solidFill>
-                  <a:srgbClr val="1A3D1A"/>
-                </a:solidFill>
-              </a:rPr>
-              <a:t>Charts</a:t>
-            </a:r>
-          </a:p>
-        </p:txBody>
-      </p:sp>
-      <p:sp>
-        <p:nvSpPr>
-          <p:cNvPr id="11" name="TextBox 10"/>
-          <p:cNvSpPr txBox="1"/>
-          <p:nvPr/>
-        </p:nvSpPr>
-        <p:spPr>
-          <a:xfrm>
-            <a:off x="8549640" y="2971800"/>
-            <a:ext cx="3108960" cy="640080"/>
-          </a:xfrm>
-          <a:prstGeom prst="rect">
-            <a:avLst/>
-          </a:prstGeom>
-          <a:noFill/>
-        </p:spPr>
-        <p:txBody>
-          <a:bodyPr wrap="square">
-            <a:spAutoFit/>
-          </a:bodyPr>
-          <a:lstStyle/>
-          <a:p>
-            <a:pPr algn="l"/>
-            <a:r>
-              <a:rPr sz="1300" b="0" i="0">
-                <a:solidFill>
-                  <a:srgbClr val="1A1A1A"/>
-                </a:solidFill>
-              </a:rPr>
-              <a:t>Win rate bar chart with 95% CIs
-VP distribution violin/boxplot</a:t>
-            </a:r>
-          </a:p>
-        </p:txBody>
-      </p:sp>
-      <p:sp>
-        <p:nvSpPr>
-          <p:cNvPr id="12" name="Rectangle 11"/>
-          <p:cNvSpPr/>
-          <p:nvPr/>
-        </p:nvSpPr>
-        <p:spPr>
-          <a:xfrm>
-            <a:off x="8412480" y="3886200"/>
-            <a:ext cx="3383280" cy="1143000"/>
-          </a:xfrm>
-          <a:prstGeom prst="rect">
-            <a:avLst/>
-          </a:prstGeom>
-          <a:solidFill>
-            <a:srgbClr val="FFFBF0"/>
-          </a:solidFill>
-          <a:ln w="9525">
-            <a:solidFill>
-              <a:srgbClr val="CCCCBB"/>
-            </a:solidFill>
-          </a:ln>
-        </p:spPr>
-        <p:style>
-          <a:lnRef idx="1">
-            <a:schemeClr val="accent1"/>
-          </a:lnRef>
-          <a:fillRef idx="3">
-            <a:schemeClr val="accent1"/>
-          </a:fillRef>
-          <a:effectRef idx="2">
-            <a:schemeClr val="accent1"/>
-          </a:effectRef>
-          <a:fontRef idx="minor">
-            <a:schemeClr val="lt1"/>
-          </a:fontRef>
-        </p:style>
-        <p:txBody>
-          <a:bodyPr rtlCol="0" anchor="ctr"/>
-          <a:lstStyle/>
-          <a:p>
-            <a:pPr algn="ctr"/>
-          </a:p>
-        </p:txBody>
-      </p:sp>
-      <p:sp>
-        <p:nvSpPr>
-          <p:cNvPr id="13" name="TextBox 12"/>
-          <p:cNvSpPr txBox="1"/>
-          <p:nvPr/>
-        </p:nvSpPr>
-        <p:spPr>
-          <a:xfrm>
-            <a:off x="8549640" y="3959352"/>
-            <a:ext cx="3108960" cy="365760"/>
-          </a:xfrm>
-          <a:prstGeom prst="rect">
-            <a:avLst/>
-          </a:prstGeom>
-          <a:noFill/>
-        </p:spPr>
-        <p:txBody>
-          <a:bodyPr wrap="square">
-            <a:spAutoFit/>
-          </a:bodyPr>
-          <a:lstStyle/>
-          <a:p>
-            <a:pPr algn="l"/>
-            <a:r>
-              <a:rPr sz="1400" b="1" i="0">
-                <a:solidFill>
-                  <a:srgbClr val="1A3D1A"/>
-                </a:solidFill>
-              </a:rPr>
-              <a:t>Stats</a:t>
-            </a:r>
-          </a:p>
-        </p:txBody>
-      </p:sp>
-      <p:sp>
-        <p:nvSpPr>
-          <p:cNvPr id="14" name="TextBox 13"/>
-          <p:cNvSpPr txBox="1"/>
-          <p:nvPr/>
-        </p:nvSpPr>
-        <p:spPr>
-          <a:xfrm>
-            <a:off x="8549640" y="4297680"/>
-            <a:ext cx="3108960" cy="640080"/>
-          </a:xfrm>
-          <a:prstGeom prst="rect">
-            <a:avLst/>
-          </a:prstGeom>
-          <a:noFill/>
-        </p:spPr>
-        <p:txBody>
-          <a:bodyPr wrap="square">
-            <a:spAutoFit/>
-          </a:bodyPr>
-          <a:lstStyle/>
-          <a:p>
-            <a:pPr algn="l"/>
-            <a:r>
-              <a:rPr sz="1300" b="0" i="0">
-                <a:solidFill>
-                  <a:srgbClr val="1A1A1A"/>
-                </a:solidFill>
-              </a:rPr>
-              <a:t>χ² test on win-count table
-Target: p &lt; 0.05</a:t>
-            </a:r>
-          </a:p>
-        </p:txBody>
-      </p:sp>
-      <p:sp>
-        <p:nvSpPr>
-          <p:cNvPr id="15" name="Rectangle 14"/>
-          <p:cNvSpPr/>
-          <p:nvPr/>
-        </p:nvSpPr>
-        <p:spPr>
-          <a:xfrm>
-            <a:off x="8412480" y="5212080"/>
-            <a:ext cx="3383280" cy="1143000"/>
-          </a:xfrm>
-          <a:prstGeom prst="rect">
-            <a:avLst/>
-          </a:prstGeom>
-          <a:solidFill>
-            <a:srgbClr val="FFFBF0"/>
-          </a:solidFill>
-          <a:ln w="9525">
-            <a:solidFill>
-              <a:srgbClr val="CCCCBB"/>
-            </a:solidFill>
-          </a:ln>
-        </p:spPr>
-        <p:style>
-          <a:lnRef idx="1">
-            <a:schemeClr val="accent1"/>
-          </a:lnRef>
-          <a:fillRef idx="3">
-            <a:schemeClr val="accent1"/>
-          </a:fillRef>
-          <a:effectRef idx="2">
-            <a:schemeClr val="accent1"/>
-          </a:effectRef>
-          <a:fontRef idx="minor">
-            <a:schemeClr val="lt1"/>
-          </a:fontRef>
-        </p:style>
-        <p:txBody>
-          <a:bodyPr rtlCol="0" anchor="ctr"/>
-          <a:lstStyle/>
-          <a:p>
-            <a:pPr algn="ctr"/>
-          </a:p>
-        </p:txBody>
-      </p:sp>
-      <p:sp>
-        <p:nvSpPr>
-          <p:cNvPr id="16" name="TextBox 15"/>
-          <p:cNvSpPr txBox="1"/>
-          <p:nvPr/>
-        </p:nvSpPr>
-        <p:spPr>
-          <a:xfrm>
-            <a:off x="8549640" y="5285232"/>
-            <a:ext cx="3108960" cy="365760"/>
-          </a:xfrm>
-          <a:prstGeom prst="rect">
-            <a:avLst/>
-          </a:prstGeom>
-          <a:noFill/>
-        </p:spPr>
-        <p:txBody>
-          <a:bodyPr wrap="square">
-            <a:spAutoFit/>
-          </a:bodyPr>
-          <a:lstStyle/>
-          <a:p>
-            <a:pPr algn="l"/>
-            <a:r>
-              <a:rPr sz="1400" b="1" i="0">
-                <a:solidFill>
-                  <a:srgbClr val="1A3D1A"/>
-                </a:solidFill>
-              </a:rPr>
-              <a:t>Time</a:t>
-            </a:r>
-          </a:p>
-        </p:txBody>
-      </p:sp>
-      <p:sp>
-        <p:nvSpPr>
-          <p:cNvPr id="17" name="TextBox 16"/>
-          <p:cNvSpPr txBox="1"/>
-          <p:nvPr/>
-        </p:nvSpPr>
-        <p:spPr>
-          <a:xfrm>
-            <a:off x="8549640" y="5623560"/>
-            <a:ext cx="3108960" cy="640080"/>
-          </a:xfrm>
-          <a:prstGeom prst="rect">
-            <a:avLst/>
-          </a:prstGeom>
-          <a:noFill/>
-        </p:spPr>
-        <p:txBody>
-          <a:bodyPr wrap="square">
-            <a:spAutoFit/>
-          </a:bodyPr>
-          <a:lstStyle/>
-          <a:p>
-            <a:pPr algn="l"/>
-            <a:r>
-              <a:rPr sz="1300" b="0" i="0">
-                <a:solidFill>
-                  <a:srgbClr val="1A1A1A"/>
-                </a:solidFill>
-              </a:rPr>
-              <a:t>&lt; 60 seconds for 1,000 games</a:t>
-            </a:r>
-          </a:p>
-        </p:txBody>
-      </p:sp>
+        </p:nvGraphicFramePr>
+        <p:xfrm>
+          <a:off x="365760" y="1188720"/>
+          <a:ext cx="11155680" cy="5120640"/>
+        </p:xfrm>
+        <a:graphic>
+          <a:graphicData uri="http://schemas.openxmlformats.org/drawingml/2006/table">
+            <a:tbl>
+              <a:tblPr firstRow="1" bandRow="1">
+                <a:tableStyleId>{5C22544A-7EE6-4342-B048-85BDC9FD1C3A}</a:tableStyleId>
+              </a:tblPr>
+              <a:tblGrid>
+                <a:gridCol w="2560320"/>
+                <a:gridCol w="4023360"/>
+                <a:gridCol w="4572000"/>
+              </a:tblGrid>
+              <a:tr h="731520">
+                <a:tc>
+                  <a:txBody>
+                    <a:bodyPr/>
+                    <a:lstStyle/>
+                    <a:p>
+                      <a:pPr algn="ctr"/>
+                      <a:r>
+                        <a:rPr b="1" sz="1500">
+                          <a:solidFill>
+                            <a:srgbClr val="FFFBF0"/>
+                          </a:solidFill>
+                        </a:rPr>
+                        <a:t>Full Rule</a:t>
+                      </a:r>
+                    </a:p>
+                  </a:txBody>
+                  <a:tcPr>
+                    <a:solidFill>
+                      <a:srgbClr val="1A3D1A"/>
+                    </a:solidFill>
+                  </a:tcPr>
+                </a:tc>
+                <a:tc>
+                  <a:txBody>
+                    <a:bodyPr/>
+                    <a:lstStyle/>
+                    <a:p>
+                      <a:pPr algn="ctr"/>
+                      <a:r>
+                        <a:rPr b="1" sz="1500">
+                          <a:solidFill>
+                            <a:srgbClr val="FFFBF0"/>
+                          </a:solidFill>
+                        </a:rPr>
+                        <a:t>Simulation Simplification</a:t>
+                      </a:r>
+                    </a:p>
+                  </a:txBody>
+                  <a:tcPr>
+                    <a:solidFill>
+                      <a:srgbClr val="1A3D1A"/>
+                    </a:solidFill>
+                  </a:tcPr>
+                </a:tc>
+                <a:tc>
+                  <a:txBody>
+                    <a:bodyPr/>
+                    <a:lstStyle/>
+                    <a:p>
+                      <a:pPr algn="ctr"/>
+                      <a:r>
+                        <a:rPr b="1" sz="1500">
+                          <a:solidFill>
+                            <a:srgbClr val="FFFBF0"/>
+                          </a:solidFill>
+                        </a:rPr>
+                        <a:t>Impact on Results</a:t>
+                      </a:r>
+                    </a:p>
+                  </a:txBody>
+                  <a:tcPr>
+                    <a:solidFill>
+                      <a:srgbClr val="1A3D1A"/>
+                    </a:solidFill>
+                  </a:tcPr>
+                </a:tc>
+              </a:tr>
+              <a:tr h="731520">
+                <a:tc>
+                  <a:txBody>
+                    <a:bodyPr/>
+                    <a:lstStyle/>
+                    <a:p>
+                      <a:pPr algn="l"/>
+                      <a:r>
+                        <a:rPr sz="1400">
+                          <a:solidFill>
+                            <a:srgbClr val="1A1A1A"/>
+                          </a:solidFill>
+                        </a:rPr>
+                        <a:t>Player-to-player trading</a:t>
+                      </a:r>
+                    </a:p>
+                  </a:txBody>
+                  <a:tcPr>
+                    <a:solidFill>
+                      <a:srgbClr val="FFFBF0"/>
+                    </a:solidFill>
+                  </a:tcPr>
+                </a:tc>
+                <a:tc>
+                  <a:txBody>
+                    <a:bodyPr/>
+                    <a:lstStyle/>
+                    <a:p>
+                      <a:pPr algn="l"/>
+                      <a:r>
+                        <a:rPr sz="1400">
+                          <a:solidFill>
+                            <a:srgbClr val="1A1A1A"/>
+                          </a:solidFill>
+                        </a:rPr>
+                        <a:t>Omitted — bank/port trading only</a:t>
+                      </a:r>
+                    </a:p>
+                  </a:txBody>
+                  <a:tcPr>
+                    <a:solidFill>
+                      <a:srgbClr val="FFFBF0"/>
+                    </a:solidFill>
+                  </a:tcPr>
+                </a:tc>
+                <a:tc>
+                  <a:txBody>
+                    <a:bodyPr/>
+                    <a:lstStyle/>
+                    <a:p>
+                      <a:pPr algn="l"/>
+                      <a:r>
+                        <a:rPr sz="1400">
+                          <a:solidFill>
+                            <a:srgbClr val="1A1A1A"/>
+                          </a:solidFill>
+                        </a:rPr>
+                        <a:t>Low: all strategies affected equally</a:t>
+                      </a:r>
+                    </a:p>
+                  </a:txBody>
+                  <a:tcPr>
+                    <a:solidFill>
+                      <a:srgbClr val="FFFBF0"/>
+                    </a:solidFill>
+                  </a:tcPr>
+                </a:tc>
+              </a:tr>
+              <a:tr h="731520">
+                <a:tc>
+                  <a:txBody>
+                    <a:bodyPr/>
+                    <a:lstStyle/>
+                    <a:p>
+                      <a:pPr algn="l"/>
+                      <a:r>
+                        <a:rPr sz="1400">
+                          <a:solidFill>
+                            <a:srgbClr val="1A1A1A"/>
+                          </a:solidFill>
+                        </a:rPr>
+                        <a:t>Longest Road</a:t>
+                      </a:r>
+                    </a:p>
+                  </a:txBody>
+                  <a:tcPr>
+                    <a:solidFill>
+                      <a:srgbClr val="E8F0E0"/>
+                    </a:solidFill>
+                  </a:tcPr>
+                </a:tc>
+                <a:tc>
+                  <a:txBody>
+                    <a:bodyPr/>
+                    <a:lstStyle/>
+                    <a:p>
+                      <a:pPr algn="l"/>
+                      <a:r>
+                        <a:rPr sz="1400">
+                          <a:solidFill>
+                            <a:srgbClr val="1A1A1A"/>
+                          </a:solidFill>
+                        </a:rPr>
+                        <a:t>Tracked; 2 VP at ≥5 road segments</a:t>
+                      </a:r>
+                    </a:p>
+                  </a:txBody>
+                  <a:tcPr>
+                    <a:solidFill>
+                      <a:srgbClr val="E8F0E0"/>
+                    </a:solidFill>
+                  </a:tcPr>
+                </a:tc>
+                <a:tc>
+                  <a:txBody>
+                    <a:bodyPr/>
+                    <a:lstStyle/>
+                    <a:p>
+                      <a:pPr algn="l"/>
+                      <a:r>
+                        <a:rPr sz="1400">
+                          <a:solidFill>
+                            <a:srgbClr val="1A1A1A"/>
+                          </a:solidFill>
+                        </a:rPr>
+                        <a:t>Faithful to rules</a:t>
+                      </a:r>
+                    </a:p>
+                  </a:txBody>
+                  <a:tcPr>
+                    <a:solidFill>
+                      <a:srgbClr val="E8F0E0"/>
+                    </a:solidFill>
+                  </a:tcPr>
+                </a:tc>
+              </a:tr>
+              <a:tr h="731520">
+                <a:tc>
+                  <a:txBody>
+                    <a:bodyPr/>
+                    <a:lstStyle/>
+                    <a:p>
+                      <a:pPr algn="l"/>
+                      <a:r>
+                        <a:rPr sz="1400">
+                          <a:solidFill>
+                            <a:srgbClr val="1A1A1A"/>
+                          </a:solidFill>
+                        </a:rPr>
+                        <a:t>Largest Army</a:t>
+                      </a:r>
+                    </a:p>
+                  </a:txBody>
+                  <a:tcPr>
+                    <a:solidFill>
+                      <a:srgbClr val="FFFBF0"/>
+                    </a:solidFill>
+                  </a:tcPr>
+                </a:tc>
+                <a:tc>
+                  <a:txBody>
+                    <a:bodyPr/>
+                    <a:lstStyle/>
+                    <a:p>
+                      <a:pPr algn="l"/>
+                      <a:r>
+                        <a:rPr sz="1400">
+                          <a:solidFill>
+                            <a:srgbClr val="1A1A1A"/>
+                          </a:solidFill>
+                        </a:rPr>
+                        <a:t>Tracked; 2 VP at ≥3 knights</a:t>
+                      </a:r>
+                    </a:p>
+                  </a:txBody>
+                  <a:tcPr>
+                    <a:solidFill>
+                      <a:srgbClr val="FFFBF0"/>
+                    </a:solidFill>
+                  </a:tcPr>
+                </a:tc>
+                <a:tc>
+                  <a:txBody>
+                    <a:bodyPr/>
+                    <a:lstStyle/>
+                    <a:p>
+                      <a:pPr algn="l"/>
+                      <a:r>
+                        <a:rPr sz="1400">
+                          <a:solidFill>
+                            <a:srgbClr val="1A1A1A"/>
+                          </a:solidFill>
+                        </a:rPr>
+                        <a:t>Faithful to rules</a:t>
+                      </a:r>
+                    </a:p>
+                  </a:txBody>
+                  <a:tcPr>
+                    <a:solidFill>
+                      <a:srgbClr val="FFFBF0"/>
+                    </a:solidFill>
+                  </a:tcPr>
+                </a:tc>
+              </a:tr>
+              <a:tr h="731520">
+                <a:tc>
+                  <a:txBody>
+                    <a:bodyPr/>
+                    <a:lstStyle/>
+                    <a:p>
+                      <a:pPr algn="l"/>
+                      <a:r>
+                        <a:rPr sz="1400">
+                          <a:solidFill>
+                            <a:srgbClr val="1A1A1A"/>
+                          </a:solidFill>
+                        </a:rPr>
+                        <a:t>Dev card variety</a:t>
+                      </a:r>
+                    </a:p>
+                  </a:txBody>
+                  <a:tcPr>
+                    <a:solidFill>
+                      <a:srgbClr val="E8F0E0"/>
+                    </a:solidFill>
+                  </a:tcPr>
+                </a:tc>
+                <a:tc>
+                  <a:txBody>
+                    <a:bodyPr/>
+                    <a:lstStyle/>
+                    <a:p>
+                      <a:pPr algn="l"/>
+                      <a:r>
+                        <a:rPr sz="1400">
+                          <a:solidFill>
+                            <a:srgbClr val="1A1A1A"/>
+                          </a:solidFill>
+                        </a:rPr>
+                        <a:t>Knights + VP cards; Progress cards stubbed</a:t>
+                      </a:r>
+                    </a:p>
+                  </a:txBody>
+                  <a:tcPr>
+                    <a:solidFill>
+                      <a:srgbClr val="E8F0E0"/>
+                    </a:solidFill>
+                  </a:tcPr>
+                </a:tc>
+                <a:tc>
+                  <a:txBody>
+                    <a:bodyPr/>
+                    <a:lstStyle/>
+                    <a:p>
+                      <a:pPr algn="l"/>
+                      <a:r>
+                        <a:rPr sz="1400">
+                          <a:solidFill>
+                            <a:srgbClr val="1A1A1A"/>
+                          </a:solidFill>
+                        </a:rPr>
+                        <a:t>Minor: removes Road Building / Monopoly edge cases</a:t>
+                      </a:r>
+                    </a:p>
+                  </a:txBody>
+                  <a:tcPr>
+                    <a:solidFill>
+                      <a:srgbClr val="E8F0E0"/>
+                    </a:solidFill>
+                  </a:tcPr>
+                </a:tc>
+              </a:tr>
+              <a:tr h="731520">
+                <a:tc>
+                  <a:txBody>
+                    <a:bodyPr/>
+                    <a:lstStyle/>
+                    <a:p>
+                      <a:pPr algn="l"/>
+                      <a:r>
+                        <a:rPr sz="1400">
+                          <a:solidFill>
+                            <a:srgbClr val="1A1A1A"/>
+                          </a:solidFill>
+                        </a:rPr>
+                        <a:t>Robber targeting</a:t>
+                      </a:r>
+                    </a:p>
+                  </a:txBody>
+                  <a:tcPr>
+                    <a:solidFill>
+                      <a:srgbClr val="FFFBF0"/>
+                    </a:solidFill>
+                  </a:tcPr>
+                </a:tc>
+                <a:tc>
+                  <a:txBody>
+                    <a:bodyPr/>
+                    <a:lstStyle/>
+                    <a:p>
+                      <a:pPr algn="l"/>
+                      <a:r>
+                        <a:rPr sz="1400">
+                          <a:solidFill>
+                            <a:srgbClr val="1A1A1A"/>
+                          </a:solidFill>
+                        </a:rPr>
+                        <a:t>Always targets the leading player (most VP)</a:t>
+                      </a:r>
+                    </a:p>
+                  </a:txBody>
+                  <a:tcPr>
+                    <a:solidFill>
+                      <a:srgbClr val="FFFBF0"/>
+                    </a:solidFill>
+                  </a:tcPr>
+                </a:tc>
+                <a:tc>
+                  <a:txBody>
+                    <a:bodyPr/>
+                    <a:lstStyle/>
+                    <a:p>
+                      <a:pPr algn="l"/>
+                      <a:r>
+                        <a:rPr sz="1400">
+                          <a:solidFill>
+                            <a:srgbClr val="1A1A1A"/>
+                          </a:solidFill>
+                        </a:rPr>
+                        <a:t>Deterministic; slightly penalises front-runners</a:t>
+                      </a:r>
+                    </a:p>
+                  </a:txBody>
+                  <a:tcPr>
+                    <a:solidFill>
+                      <a:srgbClr val="FFFBF0"/>
+                    </a:solidFill>
+                  </a:tcPr>
+                </a:tc>
+              </a:tr>
+              <a:tr h="731520">
+                <a:tc>
+                  <a:txBody>
+                    <a:bodyPr/>
+                    <a:lstStyle/>
+                    <a:p>
+                      <a:pPr algn="l"/>
+                      <a:r>
+                        <a:rPr sz="1400">
+                          <a:solidFill>
+                            <a:srgbClr val="1A1A1A"/>
+                          </a:solidFill>
+                        </a:rPr>
+                        <a:t>Board geometry</a:t>
+                      </a:r>
+                    </a:p>
+                  </a:txBody>
+                  <a:tcPr>
+                    <a:solidFill>
+                      <a:srgbClr val="E8F0E0"/>
+                    </a:solidFill>
+                  </a:tcPr>
+                </a:tc>
+                <a:tc>
+                  <a:txBody>
+                    <a:bodyPr/>
+                    <a:lstStyle/>
+                    <a:p>
+                      <a:pPr algn="l"/>
+                      <a:r>
+                        <a:rPr sz="1400">
+                          <a:solidFill>
+                            <a:srgbClr val="1A1A1A"/>
+                          </a:solidFill>
+                        </a:rPr>
+                        <a:t>Intersection IDs enumerated for simulation; not pixel-perfect</a:t>
+                      </a:r>
+                    </a:p>
+                  </a:txBody>
+                  <a:tcPr>
+                    <a:solidFill>
+                      <a:srgbClr val="E8F0E0"/>
+                    </a:solidFill>
+                  </a:tcPr>
+                </a:tc>
+                <a:tc>
+                  <a:txBody>
+                    <a:bodyPr/>
+                    <a:lstStyle/>
+                    <a:p>
+                      <a:pPr algn="l"/>
+                      <a:r>
+                        <a:rPr sz="1400">
+                          <a:solidFill>
+                            <a:srgbClr val="1A1A1A"/>
+                          </a:solidFill>
+                        </a:rPr>
+                        <a:t>Structural relationships preserved</a:t>
+                      </a:r>
+                    </a:p>
+                  </a:txBody>
+                  <a:tcPr>
+                    <a:solidFill>
+                      <a:srgbClr val="E8F0E0"/>
+                    </a:solidFill>
+                  </a:tcPr>
+                </a:tc>
+              </a:tr>
+            </a:tbl>
+          </a:graphicData>
+        </a:graphic>
+      </p:graphicFrame>
     </p:spTree>
   </p:cSld>
   <p:clrMapOvr>
@@ -4179,7 +4144,7 @@
                   <a:srgbClr val="FFFBF0"/>
                 </a:solidFill>
               </a:rPr>
-              <a:t>Results: Win Rates by Strategy</a:t>
+              <a:t>How to Run the Simulation</a:t>
             </a:r>
           </a:p>
         </p:txBody>
@@ -4192,18 +4157,18 @@
         </p:nvSpPr>
         <p:spPr>
           <a:xfrm>
-            <a:off x="457200" y="1143000"/>
-            <a:ext cx="11247120" cy="5029200"/>
+            <a:off x="365760" y="1188720"/>
+            <a:ext cx="7772400" cy="2926080"/>
           </a:xfrm>
           <a:prstGeom prst="rect">
             <a:avLst/>
           </a:prstGeom>
           <a:solidFill>
-            <a:srgbClr val="E8F2E0"/>
+            <a:srgbClr val="1A3D1A"/>
           </a:solidFill>
-          <a:ln w="25400">
+          <a:ln w="19050">
             <a:solidFill>
-              <a:srgbClr val="2E7D32"/>
+              <a:srgbClr val="8ECF3A"/>
             </a:solidFill>
           </a:ln>
         </p:spPr>
@@ -4237,8 +4202,8 @@
         </p:nvSpPr>
         <p:spPr>
           <a:xfrm>
-            <a:off x="457200" y="3200400"/>
-            <a:ext cx="11247120" cy="731520"/>
+            <a:off x="640080" y="1325880"/>
+            <a:ext cx="7315200" cy="2651760"/>
           </a:xfrm>
           <a:prstGeom prst="rect">
             <a:avLst/>
@@ -4251,28 +4216,79 @@
           </a:bodyPr>
           <a:lstStyle/>
           <a:p>
+            <a:pPr algn="l"/>
+            <a:r>
+              <a:rPr sz="1700" b="0" i="0">
+                <a:solidFill>
+                  <a:srgbClr val="8ECF3A"/>
+                </a:solidFill>
+              </a:rPr>
+              <a:t>source("R/simulation.R")
+results &lt;- run_simulation(
+    n_games = 1000,
+    seed    = 42
+)
+source("R/analysis.R")
+plot_win_rates(results)</a:t>
+            </a:r>
+          </a:p>
+        </p:txBody>
+      </p:sp>
+      <p:sp>
+        <p:nvSpPr>
+          <p:cNvPr id="6" name="Rectangle 5"/>
+          <p:cNvSpPr/>
+          <p:nvPr/>
+        </p:nvSpPr>
+        <p:spPr>
+          <a:xfrm>
+            <a:off x="8412480" y="1234440"/>
+            <a:ext cx="3383280" cy="1143000"/>
+          </a:xfrm>
+          <a:prstGeom prst="rect">
+            <a:avLst/>
+          </a:prstGeom>
+          <a:solidFill>
+            <a:srgbClr val="FFFBF0"/>
+          </a:solidFill>
+          <a:ln w="9525">
+            <a:solidFill>
+              <a:srgbClr val="CCCCBB"/>
+            </a:solidFill>
+          </a:ln>
+        </p:spPr>
+        <p:style>
+          <a:lnRef idx="1">
+            <a:schemeClr val="accent1"/>
+          </a:lnRef>
+          <a:fillRef idx="3">
+            <a:schemeClr val="accent1"/>
+          </a:fillRef>
+          <a:effectRef idx="2">
+            <a:schemeClr val="accent1"/>
+          </a:effectRef>
+          <a:fontRef idx="minor">
+            <a:schemeClr val="lt1"/>
+          </a:fontRef>
+        </p:style>
+        <p:txBody>
+          <a:bodyPr rtlCol="0" anchor="ctr"/>
+          <a:lstStyle/>
+          <a:p>
             <a:pPr algn="ctr"/>
-            <a:r>
-              <a:rPr sz="2200" b="1" i="0">
-                <a:solidFill>
-                  <a:srgbClr val="2E7D32"/>
-                </a:solidFill>
-              </a:rPr>
-              <a:t>[ Bar chart: win rate per strategy with 95% confidence intervals ]</a:t>
-            </a:r>
-          </a:p>
-        </p:txBody>
-      </p:sp>
-      <p:sp>
-        <p:nvSpPr>
-          <p:cNvPr id="6" name="TextBox 5"/>
+          </a:p>
+        </p:txBody>
+      </p:sp>
+      <p:sp>
+        <p:nvSpPr>
+          <p:cNvPr id="7" name="TextBox 6"/>
           <p:cNvSpPr txBox="1"/>
           <p:nvPr/>
         </p:nvSpPr>
         <p:spPr>
           <a:xfrm>
-            <a:off x="457200" y="4023360"/>
-            <a:ext cx="11247120" cy="548640"/>
+            <a:off x="8549640" y="1307592"/>
+            <a:ext cx="3108960" cy="365760"/>
           </a:xfrm>
           <a:prstGeom prst="rect">
             <a:avLst/>
@@ -4285,14 +4301,389 @@
           </a:bodyPr>
           <a:lstStyle/>
           <a:p>
+            <a:pPr algn="l"/>
+            <a:r>
+              <a:rPr sz="1400" b="1" i="0">
+                <a:solidFill>
+                  <a:srgbClr val="1A3D1A"/>
+                </a:solidFill>
+              </a:rPr>
+              <a:t>Output</a:t>
+            </a:r>
+          </a:p>
+        </p:txBody>
+      </p:sp>
+      <p:sp>
+        <p:nvSpPr>
+          <p:cNvPr id="8" name="TextBox 7"/>
+          <p:cNvSpPr txBox="1"/>
+          <p:nvPr/>
+        </p:nvSpPr>
+        <p:spPr>
+          <a:xfrm>
+            <a:off x="8549640" y="1645920"/>
+            <a:ext cx="3108960" cy="640080"/>
+          </a:xfrm>
+          <a:prstGeom prst="rect">
+            <a:avLst/>
+          </a:prstGeom>
+          <a:noFill/>
+        </p:spPr>
+        <p:txBody>
+          <a:bodyPr wrap="square">
+            <a:spAutoFit/>
+          </a:bodyPr>
+          <a:lstStyle/>
+          <a:p>
+            <a:pPr algn="l"/>
+            <a:r>
+              <a:rPr sz="1300" b="0" i="0">
+                <a:solidFill>
+                  <a:srgbClr val="1A1A1A"/>
+                </a:solidFill>
+              </a:rPr>
+              <a:t>results/simulation_results.csv</a:t>
+            </a:r>
+          </a:p>
+        </p:txBody>
+      </p:sp>
+      <p:sp>
+        <p:nvSpPr>
+          <p:cNvPr id="9" name="Rectangle 8"/>
+          <p:cNvSpPr/>
+          <p:nvPr/>
+        </p:nvSpPr>
+        <p:spPr>
+          <a:xfrm>
+            <a:off x="8412480" y="2560320"/>
+            <a:ext cx="3383280" cy="1143000"/>
+          </a:xfrm>
+          <a:prstGeom prst="rect">
+            <a:avLst/>
+          </a:prstGeom>
+          <a:solidFill>
+            <a:srgbClr val="FFFBF0"/>
+          </a:solidFill>
+          <a:ln w="9525">
+            <a:solidFill>
+              <a:srgbClr val="CCCCBB"/>
+            </a:solidFill>
+          </a:ln>
+        </p:spPr>
+        <p:style>
+          <a:lnRef idx="1">
+            <a:schemeClr val="accent1"/>
+          </a:lnRef>
+          <a:fillRef idx="3">
+            <a:schemeClr val="accent1"/>
+          </a:fillRef>
+          <a:effectRef idx="2">
+            <a:schemeClr val="accent1"/>
+          </a:effectRef>
+          <a:fontRef idx="minor">
+            <a:schemeClr val="lt1"/>
+          </a:fontRef>
+        </p:style>
+        <p:txBody>
+          <a:bodyPr rtlCol="0" anchor="ctr"/>
+          <a:lstStyle/>
+          <a:p>
             <a:pPr algn="ctr"/>
-            <a:r>
-              <a:rPr sz="1500" b="0" i="1">
-                <a:solidFill>
-                  <a:srgbClr val="555555"/>
-                </a:solidFill>
-              </a:rPr>
-              <a:t>Source: results/simulation_results.csv  ·  n = 1,000 games  ·  seed = 42</a:t>
+          </a:p>
+        </p:txBody>
+      </p:sp>
+      <p:sp>
+        <p:nvSpPr>
+          <p:cNvPr id="10" name="TextBox 9"/>
+          <p:cNvSpPr txBox="1"/>
+          <p:nvPr/>
+        </p:nvSpPr>
+        <p:spPr>
+          <a:xfrm>
+            <a:off x="8549640" y="2633472"/>
+            <a:ext cx="3108960" cy="365760"/>
+          </a:xfrm>
+          <a:prstGeom prst="rect">
+            <a:avLst/>
+          </a:prstGeom>
+          <a:noFill/>
+        </p:spPr>
+        <p:txBody>
+          <a:bodyPr wrap="square">
+            <a:spAutoFit/>
+          </a:bodyPr>
+          <a:lstStyle/>
+          <a:p>
+            <a:pPr algn="l"/>
+            <a:r>
+              <a:rPr sz="1400" b="1" i="0">
+                <a:solidFill>
+                  <a:srgbClr val="1A3D1A"/>
+                </a:solidFill>
+              </a:rPr>
+              <a:t>Charts</a:t>
+            </a:r>
+          </a:p>
+        </p:txBody>
+      </p:sp>
+      <p:sp>
+        <p:nvSpPr>
+          <p:cNvPr id="11" name="TextBox 10"/>
+          <p:cNvSpPr txBox="1"/>
+          <p:nvPr/>
+        </p:nvSpPr>
+        <p:spPr>
+          <a:xfrm>
+            <a:off x="8549640" y="2971800"/>
+            <a:ext cx="3108960" cy="640080"/>
+          </a:xfrm>
+          <a:prstGeom prst="rect">
+            <a:avLst/>
+          </a:prstGeom>
+          <a:noFill/>
+        </p:spPr>
+        <p:txBody>
+          <a:bodyPr wrap="square">
+            <a:spAutoFit/>
+          </a:bodyPr>
+          <a:lstStyle/>
+          <a:p>
+            <a:pPr algn="l"/>
+            <a:r>
+              <a:rPr sz="1300" b="0" i="0">
+                <a:solidFill>
+                  <a:srgbClr val="1A1A1A"/>
+                </a:solidFill>
+              </a:rPr>
+              <a:t>Win rate bar chart with 95% CIs
+VP distribution violin/boxplot</a:t>
+            </a:r>
+          </a:p>
+        </p:txBody>
+      </p:sp>
+      <p:sp>
+        <p:nvSpPr>
+          <p:cNvPr id="12" name="Rectangle 11"/>
+          <p:cNvSpPr/>
+          <p:nvPr/>
+        </p:nvSpPr>
+        <p:spPr>
+          <a:xfrm>
+            <a:off x="8412480" y="3886200"/>
+            <a:ext cx="3383280" cy="1143000"/>
+          </a:xfrm>
+          <a:prstGeom prst="rect">
+            <a:avLst/>
+          </a:prstGeom>
+          <a:solidFill>
+            <a:srgbClr val="FFFBF0"/>
+          </a:solidFill>
+          <a:ln w="9525">
+            <a:solidFill>
+              <a:srgbClr val="CCCCBB"/>
+            </a:solidFill>
+          </a:ln>
+        </p:spPr>
+        <p:style>
+          <a:lnRef idx="1">
+            <a:schemeClr val="accent1"/>
+          </a:lnRef>
+          <a:fillRef idx="3">
+            <a:schemeClr val="accent1"/>
+          </a:fillRef>
+          <a:effectRef idx="2">
+            <a:schemeClr val="accent1"/>
+          </a:effectRef>
+          <a:fontRef idx="minor">
+            <a:schemeClr val="lt1"/>
+          </a:fontRef>
+        </p:style>
+        <p:txBody>
+          <a:bodyPr rtlCol="0" anchor="ctr"/>
+          <a:lstStyle/>
+          <a:p>
+            <a:pPr algn="ctr"/>
+          </a:p>
+        </p:txBody>
+      </p:sp>
+      <p:sp>
+        <p:nvSpPr>
+          <p:cNvPr id="13" name="TextBox 12"/>
+          <p:cNvSpPr txBox="1"/>
+          <p:nvPr/>
+        </p:nvSpPr>
+        <p:spPr>
+          <a:xfrm>
+            <a:off x="8549640" y="3959352"/>
+            <a:ext cx="3108960" cy="365760"/>
+          </a:xfrm>
+          <a:prstGeom prst="rect">
+            <a:avLst/>
+          </a:prstGeom>
+          <a:noFill/>
+        </p:spPr>
+        <p:txBody>
+          <a:bodyPr wrap="square">
+            <a:spAutoFit/>
+          </a:bodyPr>
+          <a:lstStyle/>
+          <a:p>
+            <a:pPr algn="l"/>
+            <a:r>
+              <a:rPr sz="1400" b="1" i="0">
+                <a:solidFill>
+                  <a:srgbClr val="1A3D1A"/>
+                </a:solidFill>
+              </a:rPr>
+              <a:t>Stats</a:t>
+            </a:r>
+          </a:p>
+        </p:txBody>
+      </p:sp>
+      <p:sp>
+        <p:nvSpPr>
+          <p:cNvPr id="14" name="TextBox 13"/>
+          <p:cNvSpPr txBox="1"/>
+          <p:nvPr/>
+        </p:nvSpPr>
+        <p:spPr>
+          <a:xfrm>
+            <a:off x="8549640" y="4297680"/>
+            <a:ext cx="3108960" cy="640080"/>
+          </a:xfrm>
+          <a:prstGeom prst="rect">
+            <a:avLst/>
+          </a:prstGeom>
+          <a:noFill/>
+        </p:spPr>
+        <p:txBody>
+          <a:bodyPr wrap="square">
+            <a:spAutoFit/>
+          </a:bodyPr>
+          <a:lstStyle/>
+          <a:p>
+            <a:pPr algn="l"/>
+            <a:r>
+              <a:rPr sz="1300" b="0" i="0">
+                <a:solidFill>
+                  <a:srgbClr val="1A1A1A"/>
+                </a:solidFill>
+              </a:rPr>
+              <a:t>χ² test on win-count table
+Target: p &lt; 0.05</a:t>
+            </a:r>
+          </a:p>
+        </p:txBody>
+      </p:sp>
+      <p:sp>
+        <p:nvSpPr>
+          <p:cNvPr id="15" name="Rectangle 14"/>
+          <p:cNvSpPr/>
+          <p:nvPr/>
+        </p:nvSpPr>
+        <p:spPr>
+          <a:xfrm>
+            <a:off x="8412480" y="5212080"/>
+            <a:ext cx="3383280" cy="1143000"/>
+          </a:xfrm>
+          <a:prstGeom prst="rect">
+            <a:avLst/>
+          </a:prstGeom>
+          <a:solidFill>
+            <a:srgbClr val="FFFBF0"/>
+          </a:solidFill>
+          <a:ln w="9525">
+            <a:solidFill>
+              <a:srgbClr val="CCCCBB"/>
+            </a:solidFill>
+          </a:ln>
+        </p:spPr>
+        <p:style>
+          <a:lnRef idx="1">
+            <a:schemeClr val="accent1"/>
+          </a:lnRef>
+          <a:fillRef idx="3">
+            <a:schemeClr val="accent1"/>
+          </a:fillRef>
+          <a:effectRef idx="2">
+            <a:schemeClr val="accent1"/>
+          </a:effectRef>
+          <a:fontRef idx="minor">
+            <a:schemeClr val="lt1"/>
+          </a:fontRef>
+        </p:style>
+        <p:txBody>
+          <a:bodyPr rtlCol="0" anchor="ctr"/>
+          <a:lstStyle/>
+          <a:p>
+            <a:pPr algn="ctr"/>
+          </a:p>
+        </p:txBody>
+      </p:sp>
+      <p:sp>
+        <p:nvSpPr>
+          <p:cNvPr id="16" name="TextBox 15"/>
+          <p:cNvSpPr txBox="1"/>
+          <p:nvPr/>
+        </p:nvSpPr>
+        <p:spPr>
+          <a:xfrm>
+            <a:off x="8549640" y="5285232"/>
+            <a:ext cx="3108960" cy="365760"/>
+          </a:xfrm>
+          <a:prstGeom prst="rect">
+            <a:avLst/>
+          </a:prstGeom>
+          <a:noFill/>
+        </p:spPr>
+        <p:txBody>
+          <a:bodyPr wrap="square">
+            <a:spAutoFit/>
+          </a:bodyPr>
+          <a:lstStyle/>
+          <a:p>
+            <a:pPr algn="l"/>
+            <a:r>
+              <a:rPr sz="1400" b="1" i="0">
+                <a:solidFill>
+                  <a:srgbClr val="1A3D1A"/>
+                </a:solidFill>
+              </a:rPr>
+              <a:t>Time</a:t>
+            </a:r>
+          </a:p>
+        </p:txBody>
+      </p:sp>
+      <p:sp>
+        <p:nvSpPr>
+          <p:cNvPr id="17" name="TextBox 16"/>
+          <p:cNvSpPr txBox="1"/>
+          <p:nvPr/>
+        </p:nvSpPr>
+        <p:spPr>
+          <a:xfrm>
+            <a:off x="8549640" y="5623560"/>
+            <a:ext cx="3108960" cy="640080"/>
+          </a:xfrm>
+          <a:prstGeom prst="rect">
+            <a:avLst/>
+          </a:prstGeom>
+          <a:noFill/>
+        </p:spPr>
+        <p:txBody>
+          <a:bodyPr wrap="square">
+            <a:spAutoFit/>
+          </a:bodyPr>
+          <a:lstStyle/>
+          <a:p>
+            <a:pPr algn="l"/>
+            <a:r>
+              <a:rPr sz="1300" b="0" i="0">
+                <a:solidFill>
+                  <a:srgbClr val="1A1A1A"/>
+                </a:solidFill>
+              </a:rPr>
+              <a:t>&lt; 60 seconds for 1,000 games</a:t>
             </a:r>
           </a:p>
         </p:txBody>
@@ -4395,7 +4786,7 @@
                   <a:srgbClr val="FFFBF0"/>
                 </a:solidFill>
               </a:rPr>
-              <a:t>Results: VP Distribution at Game End</a:t>
+              <a:t>Results: Win Rates by Strategy</a:t>
             </a:r>
           </a:p>
         </p:txBody>
@@ -4474,7 +4865,7 @@
                   <a:srgbClr val="2E7D32"/>
                 </a:solidFill>
               </a:rPr>
-              <a:t>[ Violin / boxplot: final VP per strategy across all games ]</a:t>
+              <a:t>[ Bar chart: win rate per strategy with 95% confidence intervals ]</a:t>
             </a:r>
           </a:p>
         </p:txBody>
@@ -4611,7 +5002,7 @@
                   <a:srgbClr val="FFFBF0"/>
                 </a:solidFill>
               </a:rPr>
-              <a:t>Statistical Analysis</a:t>
+              <a:t>Results: VP Distribution at Game End</a:t>
             </a:r>
           </a:p>
         </p:txBody>
@@ -4690,7 +5081,7 @@
                   <a:srgbClr val="2E7D32"/>
                 </a:solidFill>
               </a:rPr>
-              <a:t>[ χ² test output: observed vs. expected win counts, p-value, conclusion ]</a:t>
+              <a:t>[ Violin / boxplot: final VP per strategy across all games ]</a:t>
             </a:r>
           </a:p>
         </p:txBody>
@@ -4724,7 +5115,7 @@
                   <a:srgbClr val="555555"/>
                 </a:solidFill>
               </a:rPr>
-              <a:t>Success criterion: p &lt; 0.05  ·  null hypothesis: all strategies win equally often</a:t>
+              <a:t>Source: results/simulation_results.csv  ·  n = 1,000 games  ·  seed = 42</a:t>
             </a:r>
           </a:p>
         </p:txBody>
@@ -4770,6 +5161,222 @@
             <a:avLst/>
           </a:prstGeom>
           <a:solidFill>
+            <a:srgbClr val="2E7D32"/>
+          </a:solidFill>
+          <a:ln>
+            <a:noFill/>
+          </a:ln>
+        </p:spPr>
+        <p:style>
+          <a:lnRef idx="1">
+            <a:schemeClr val="accent1"/>
+          </a:lnRef>
+          <a:fillRef idx="3">
+            <a:schemeClr val="accent1"/>
+          </a:fillRef>
+          <a:effectRef idx="2">
+            <a:schemeClr val="accent1"/>
+          </a:effectRef>
+          <a:fontRef idx="minor">
+            <a:schemeClr val="lt1"/>
+          </a:fontRef>
+        </p:style>
+        <p:txBody>
+          <a:bodyPr rtlCol="0" anchor="ctr"/>
+          <a:lstStyle/>
+          <a:p>
+            <a:pPr algn="ctr"/>
+          </a:p>
+        </p:txBody>
+      </p:sp>
+      <p:sp>
+        <p:nvSpPr>
+          <p:cNvPr id="3" name="TextBox 2"/>
+          <p:cNvSpPr txBox="1"/>
+          <p:nvPr/>
+        </p:nvSpPr>
+        <p:spPr>
+          <a:xfrm>
+            <a:off x="365760" y="109728"/>
+            <a:ext cx="11430000" cy="822960"/>
+          </a:xfrm>
+          <a:prstGeom prst="rect">
+            <a:avLst/>
+          </a:prstGeom>
+          <a:noFill/>
+        </p:spPr>
+        <p:txBody>
+          <a:bodyPr wrap="square">
+            <a:spAutoFit/>
+          </a:bodyPr>
+          <a:lstStyle/>
+          <a:p>
+            <a:pPr algn="l"/>
+            <a:r>
+              <a:rPr sz="3200" b="1" i="0">
+                <a:solidFill>
+                  <a:srgbClr val="FFFBF0"/>
+                </a:solidFill>
+              </a:rPr>
+              <a:t>Statistical Analysis</a:t>
+            </a:r>
+          </a:p>
+        </p:txBody>
+      </p:sp>
+      <p:sp>
+        <p:nvSpPr>
+          <p:cNvPr id="4" name="Rectangle 3"/>
+          <p:cNvSpPr/>
+          <p:nvPr/>
+        </p:nvSpPr>
+        <p:spPr>
+          <a:xfrm>
+            <a:off x="457200" y="1143000"/>
+            <a:ext cx="11247120" cy="5029200"/>
+          </a:xfrm>
+          <a:prstGeom prst="rect">
+            <a:avLst/>
+          </a:prstGeom>
+          <a:solidFill>
+            <a:srgbClr val="E8F2E0"/>
+          </a:solidFill>
+          <a:ln w="25400">
+            <a:solidFill>
+              <a:srgbClr val="2E7D32"/>
+            </a:solidFill>
+          </a:ln>
+        </p:spPr>
+        <p:style>
+          <a:lnRef idx="1">
+            <a:schemeClr val="accent1"/>
+          </a:lnRef>
+          <a:fillRef idx="3">
+            <a:schemeClr val="accent1"/>
+          </a:fillRef>
+          <a:effectRef idx="2">
+            <a:schemeClr val="accent1"/>
+          </a:effectRef>
+          <a:fontRef idx="minor">
+            <a:schemeClr val="lt1"/>
+          </a:fontRef>
+        </p:style>
+        <p:txBody>
+          <a:bodyPr rtlCol="0" anchor="ctr"/>
+          <a:lstStyle/>
+          <a:p>
+            <a:pPr algn="ctr"/>
+          </a:p>
+        </p:txBody>
+      </p:sp>
+      <p:sp>
+        <p:nvSpPr>
+          <p:cNvPr id="5" name="TextBox 4"/>
+          <p:cNvSpPr txBox="1"/>
+          <p:nvPr/>
+        </p:nvSpPr>
+        <p:spPr>
+          <a:xfrm>
+            <a:off x="457200" y="3200400"/>
+            <a:ext cx="11247120" cy="731520"/>
+          </a:xfrm>
+          <a:prstGeom prst="rect">
+            <a:avLst/>
+          </a:prstGeom>
+          <a:noFill/>
+        </p:spPr>
+        <p:txBody>
+          <a:bodyPr wrap="square">
+            <a:spAutoFit/>
+          </a:bodyPr>
+          <a:lstStyle/>
+          <a:p>
+            <a:pPr algn="ctr"/>
+            <a:r>
+              <a:rPr sz="2200" b="1" i="0">
+                <a:solidFill>
+                  <a:srgbClr val="2E7D32"/>
+                </a:solidFill>
+              </a:rPr>
+              <a:t>[ χ² test output: observed vs. expected win counts, p-value, conclusion ]</a:t>
+            </a:r>
+          </a:p>
+        </p:txBody>
+      </p:sp>
+      <p:sp>
+        <p:nvSpPr>
+          <p:cNvPr id="6" name="TextBox 5"/>
+          <p:cNvSpPr txBox="1"/>
+          <p:nvPr/>
+        </p:nvSpPr>
+        <p:spPr>
+          <a:xfrm>
+            <a:off x="457200" y="4023360"/>
+            <a:ext cx="11247120" cy="548640"/>
+          </a:xfrm>
+          <a:prstGeom prst="rect">
+            <a:avLst/>
+          </a:prstGeom>
+          <a:noFill/>
+        </p:spPr>
+        <p:txBody>
+          <a:bodyPr wrap="square">
+            <a:spAutoFit/>
+          </a:bodyPr>
+          <a:lstStyle/>
+          <a:p>
+            <a:pPr algn="ctr"/>
+            <a:r>
+              <a:rPr sz="1500" b="0" i="1">
+                <a:solidFill>
+                  <a:srgbClr val="555555"/>
+                </a:solidFill>
+              </a:rPr>
+              <a:t>Success criterion: p &lt; 0.05  ·  null hypothesis: all strategies win equally often</a:t>
+            </a:r>
+          </a:p>
+        </p:txBody>
+      </p:sp>
+    </p:spTree>
+  </p:cSld>
+  <p:clrMapOvr>
+    <a:masterClrMapping/>
+  </p:clrMapOvr>
+</p:sld>
+</file>
+
+<file path=ppt/slides/slide15.xml><?xml version="1.0" encoding="utf-8"?>
+<p:sld xmlns:a="http://schemas.openxmlformats.org/drawingml/2006/main" xmlns:p="http://schemas.openxmlformats.org/presentationml/2006/main" xmlns:r="http://schemas.openxmlformats.org/officeDocument/2006/relationships">
+  <p:cSld>
+    <p:bg>
+      <p:bgPr>
+        <a:solidFill>
+          <a:srgbClr val="F5F5F0"/>
+        </a:solidFill>
+        <a:effectLst/>
+      </p:bgPr>
+    </p:bg>
+    <p:spTree>
+      <p:nvGrpSpPr>
+        <p:cNvPr id="1" name=""/>
+        <p:cNvGrpSpPr/>
+        <p:nvPr/>
+      </p:nvGrpSpPr>
+      <p:grpSpPr/>
+      <p:sp>
+        <p:nvSpPr>
+          <p:cNvPr id="2" name="Rectangle 1"/>
+          <p:cNvSpPr/>
+          <p:nvPr/>
+        </p:nvSpPr>
+        <p:spPr>
+          <a:xfrm>
+            <a:off x="0" y="0"/>
+            <a:ext cx="12188952" cy="1005840"/>
+          </a:xfrm>
+          <a:prstGeom prst="rect">
+            <a:avLst/>
+          </a:prstGeom>
+          <a:solidFill>
             <a:srgbClr val="1A3D1A"/>
           </a:solidFill>
           <a:ln>
@@ -5001,7 +5608,7 @@
 </p:sld>
 </file>
 
-<file path=ppt/slides/slide15.xml><?xml version="1.0" encoding="utf-8"?>
+<file path=ppt/slides/slide16.xml><?xml version="1.0" encoding="utf-8"?>
 <p:sld xmlns:a="http://schemas.openxmlformats.org/drawingml/2006/main" xmlns:p="http://schemas.openxmlformats.org/presentationml/2006/main" xmlns:r="http://schemas.openxmlformats.org/officeDocument/2006/relationships">
   <p:cSld>
     <p:bg>
@@ -8047,200 +8654,35 @@
                   <a:srgbClr val="FFFBF0"/>
                 </a:solidFill>
               </a:rPr>
-              <a:t>Architecture: 6 R Modules</a:t>
-            </a:r>
-          </a:p>
-        </p:txBody>
-      </p:sp>
-      <p:sp>
-        <p:nvSpPr>
-          <p:cNvPr id="4" name="Rectangle 3"/>
-          <p:cNvSpPr/>
+              <a:t>Example Board (seed = 42)</a:t>
+            </a:r>
+          </a:p>
+        </p:txBody>
+      </p:sp>
+      <p:pic>
+        <p:nvPicPr>
+          <p:cNvPr id="4" name="Picture 3" descr="example_board.png"/>
+          <p:cNvPicPr>
+            <a:picLocks noChangeAspect="1"/>
+          </p:cNvPicPr>
           <p:nvPr/>
-        </p:nvSpPr>
-        <p:spPr>
-          <a:xfrm>
-            <a:off x="274320" y="1143000"/>
-            <a:ext cx="11612880" cy="5394960"/>
+        </p:nvPicPr>
+        <p:blipFill>
+          <a:blip r:embed="rId2"/>
+          <a:stretch>
+            <a:fillRect/>
+          </a:stretch>
+        </p:blipFill>
+        <p:spPr>
+          <a:xfrm>
+            <a:off x="3305556" y="1097280"/>
+            <a:ext cx="5577840" cy="5577840"/>
           </a:xfrm>
           <a:prstGeom prst="rect">
             <a:avLst/>
           </a:prstGeom>
-          <a:solidFill>
-            <a:srgbClr val="FFFBF0"/>
-          </a:solidFill>
-          <a:ln w="9525">
-            <a:solidFill>
-              <a:srgbClr val="CCCCBB"/>
-            </a:solidFill>
-          </a:ln>
-        </p:spPr>
-        <p:style>
-          <a:lnRef idx="1">
-            <a:schemeClr val="accent1"/>
-          </a:lnRef>
-          <a:fillRef idx="3">
-            <a:schemeClr val="accent1"/>
-          </a:fillRef>
-          <a:effectRef idx="2">
-            <a:schemeClr val="accent1"/>
-          </a:effectRef>
-          <a:fontRef idx="minor">
-            <a:schemeClr val="lt1"/>
-          </a:fontRef>
-        </p:style>
-        <p:txBody>
-          <a:bodyPr rtlCol="0" anchor="ctr"/>
-          <a:lstStyle/>
-          <a:p>
-            <a:pPr algn="ctr"/>
-          </a:p>
-        </p:txBody>
-      </p:sp>
-      <p:sp>
-        <p:nvSpPr>
-          <p:cNvPr id="5" name="TextBox 4"/>
-          <p:cNvSpPr txBox="1"/>
-          <p:nvPr/>
-        </p:nvSpPr>
-        <p:spPr>
-          <a:xfrm>
-            <a:off x="502920" y="1280160"/>
-            <a:ext cx="11155680" cy="5120640"/>
-          </a:xfrm>
-          <a:prstGeom prst="rect">
-            <a:avLst/>
-          </a:prstGeom>
-          <a:noFill/>
-        </p:spPr>
-        <p:txBody>
-          <a:bodyPr wrap="square">
-            <a:spAutoFit/>
-          </a:bodyPr>
-          <a:lstStyle/>
-          <a:p>
-            <a:pPr/>
-            <a:r>
-              <a:rPr sz="2000" b="1">
-                <a:solidFill>
-                  <a:srgbClr val="1A3D1A"/>
-                </a:solidFill>
-              </a:rPr>
-              <a:t>▸  board.R — Hex graph, board generation, ports</a:t>
-            </a:r>
-          </a:p>
-          <a:p>
-            <a:pPr lvl="1"/>
-            <a:r>
-              <a:rPr sz="1700" b="0">
-                <a:solidFill>
-                  <a:srgbClr val="1A1A1A"/>
-                </a:solidFill>
-              </a:rPr>
-              <a:t>     •  19 hexes · 54 intersections · 72 road edges · axial coordinate layout</a:t>
-            </a:r>
-          </a:p>
-          <a:p>
-            <a:pPr lvl="1"/>
-            <a:r>
-              <a:rPr sz="1700" b="0">
-                <a:solidFill>
-                  <a:srgbClr val="1A1A1A"/>
-                </a:solidFill>
-              </a:rPr>
-              <a:t>     •  generate_board() supports random terrain, tokens, and ports</a:t>
-            </a:r>
-          </a:p>
-          <a:p>
-            <a:pPr/>
-            <a:r>
-              <a:rPr sz="2000" b="1">
-                <a:solidFill>
-                  <a:srgbClr val="1A3D1A"/>
-                </a:solidFill>
-              </a:rPr>
-              <a:t>▸  player.R — Player state and resource management</a:t>
-            </a:r>
-          </a:p>
-          <a:p>
-            <a:pPr lvl="1"/>
-            <a:r>
-              <a:rPr sz="1700" b="0">
-                <a:solidFill>
-                  <a:srgbClr val="1A1A1A"/>
-                </a:solidFill>
-              </a:rPr>
-              <a:t>     •  Resource cards, settlements, cities, roads, dev cards, VP</a:t>
-            </a:r>
-          </a:p>
-          <a:p>
-            <a:pPr lvl="1"/>
-            <a:r>
-              <a:rPr sz="1700" b="0">
-                <a:solidFill>
-                  <a:srgbClr val="1A1A1A"/>
-                </a:solidFill>
-              </a:rPr>
-              <a:t>     •  can_build() / do_build() / do_trade() helpers; 7-card discard rule</a:t>
-            </a:r>
-          </a:p>
-          <a:p>
-            <a:pPr/>
-            <a:r>
-              <a:rPr sz="2000" b="1">
-                <a:solidFill>
-                  <a:srgbClr val="1A3D1A"/>
-                </a:solidFill>
-              </a:rPr>
-              <a:t>▸  strategy.R — Strategy interface + implementations</a:t>
-            </a:r>
-          </a:p>
-          <a:p>
-            <a:pPr lvl="1"/>
-            <a:r>
-              <a:rPr sz="1700" b="0">
-                <a:solidFill>
-                  <a:srgbClr val="1A1A1A"/>
-                </a:solidFill>
-              </a:rPr>
-              <a:t>     •  Each strategy is a named list of functions: choose_initial_placement, choose_road_placement, choose_action</a:t>
-            </a:r>
-          </a:p>
-          <a:p>
-            <a:pPr/>
-            <a:r>
-              <a:rPr sz="2000" b="1">
-                <a:solidFill>
-                  <a:srgbClr val="1A3D1A"/>
-                </a:solidFill>
-              </a:rPr>
-              <a:t>▸  game.R — Single game loop (reverse snake draft → turns → win check)</a:t>
-            </a:r>
-          </a:p>
-          <a:p>
-            <a:pPr/>
-            <a:r>
-              <a:rPr sz="2000" b="1">
-                <a:solidFill>
-                  <a:srgbClr val="1A3D1A"/>
-                </a:solidFill>
-              </a:rPr>
-              <a:t>▸  simulation.R — Monte Carlo runner: run_simulation(n_games, seed)</a:t>
-            </a:r>
-          </a:p>
-          <a:p>
-            <a:pPr/>
-            <a:r>
-              <a:rPr sz="2000" b="1">
-                <a:solidFill>
-                  <a:srgbClr val="1A3D1A"/>
-                </a:solidFill>
-              </a:rPr>
-              <a:t>▸  analysis.R — ggplot2 charts + chi-squared significance test</a:t>
-            </a:r>
-          </a:p>
-        </p:txBody>
-      </p:sp>
+        </p:spPr>
+      </p:pic>
     </p:spTree>
   </p:cSld>
   <p:clrMapOvr>
@@ -8339,7 +8781,7 @@
                   <a:srgbClr val="FFFBF0"/>
                 </a:solidFill>
               </a:rPr>
-              <a:t>Game Loop (game.R)</a:t>
+              <a:t>Architecture: 6 R Modules</a:t>
             </a:r>
           </a:p>
         </p:txBody>
@@ -8418,7 +8860,7 @@
                   <a:srgbClr val="1A3D1A"/>
                 </a:solidFill>
               </a:rPr>
-              <a:t>▸  Initial placement — reverse snake draft</a:t>
+              <a:t>▸  board.R — Hex graph, board generation, ports</a:t>
             </a:r>
           </a:p>
           <a:p>
@@ -8429,7 +8871,7 @@
                   <a:srgbClr val="1A1A1A"/>
                 </a:solidFill>
               </a:rPr>
-              <a:t>     •  P1 → P2 → P3 → P4 → P4 → P3 → P2 → P1</a:t>
+              <a:t>     •  19 hexes · 54 intersections · 72 road edges · axial coordinate layout</a:t>
             </a:r>
           </a:p>
           <a:p>
@@ -8440,7 +8882,7 @@
                   <a:srgbClr val="1A1A1A"/>
                 </a:solidFill>
               </a:rPr>
-              <a:t>     •  Second settlement grants 1 of each adjacent resource to start</a:t>
+              <a:t>     •  generate_board() supports random terrain, tokens, and ports</a:t>
             </a:r>
           </a:p>
           <a:p>
@@ -8451,7 +8893,7 @@
                   <a:srgbClr val="1A3D1A"/>
                 </a:solidFill>
               </a:rPr>
-              <a:t>▸  Each turn: Roll → Robber/Production → Trade → Build</a:t>
+              <a:t>▸  player.R — Player state and resource management</a:t>
             </a:r>
           </a:p>
           <a:p>
@@ -8462,7 +8904,7 @@
                   <a:srgbClr val="1A1A1A"/>
                 </a:solidFill>
               </a:rPr>
-              <a:t>     •  Roll 7: discard rule (&gt;7 cards) + robber targets the leading player</a:t>
+              <a:t>     •  Resource cards, settlements, cities, roads, dev cards, VP</a:t>
             </a:r>
           </a:p>
           <a:p>
@@ -8473,7 +8915,18 @@
                   <a:srgbClr val="1A1A1A"/>
                 </a:solidFill>
               </a:rPr>
-              <a:t>     •  Production: settlements yield 1 resource, cities yield 2</a:t>
+              <a:t>     •  can_build() / do_build() / do_trade() helpers; 7-card discard rule</a:t>
+            </a:r>
+          </a:p>
+          <a:p>
+            <a:pPr/>
+            <a:r>
+              <a:rPr sz="2000" b="1">
+                <a:solidFill>
+                  <a:srgbClr val="1A3D1A"/>
+                </a:solidFill>
+              </a:rPr>
+              <a:t>▸  strategy.R — Strategy interface + implementations</a:t>
             </a:r>
           </a:p>
           <a:p>
@@ -8484,7 +8937,7 @@
                   <a:srgbClr val="1A1A1A"/>
                 </a:solidFill>
               </a:rPr>
-              <a:t>     •  Trade: bank 4:1 or port rates (3:1 general / 2:1 specific)</a:t>
+              <a:t>     •  Each strategy is a named list of functions: choose_initial_placement, choose_road_placement, choose_action</a:t>
             </a:r>
           </a:p>
           <a:p>
@@ -8495,18 +8948,7 @@
                   <a:srgbClr val="1A3D1A"/>
                 </a:solidFill>
               </a:rPr>
-              <a:t>▸  Win condition: first player to reach 10 VP on their turn</a:t>
-            </a:r>
-          </a:p>
-          <a:p>
-            <a:pPr lvl="1"/>
-            <a:r>
-              <a:rPr sz="1700" b="0">
-                <a:solidFill>
-                  <a:srgbClr val="1A1A1A"/>
-                </a:solidFill>
-              </a:rPr>
-              <a:t>     •  Stalemate safeguard: game ends after 200 turns (recorded as NA winner)</a:t>
+              <a:t>▸  game.R — Single game loop (reverse snake draft → turns → win check)</a:t>
             </a:r>
           </a:p>
           <a:p>
@@ -8517,29 +8959,18 @@
                   <a:srgbClr val="1A3D1A"/>
                 </a:solidFill>
               </a:rPr>
-              <a:t>▸  Special VP bonuses tracked each turn</a:t>
-            </a:r>
-          </a:p>
-          <a:p>
-            <a:pPr lvl="1"/>
-            <a:r>
-              <a:rPr sz="1700" b="0">
-                <a:solidFill>
-                  <a:srgbClr val="1A1A1A"/>
-                </a:solidFill>
-              </a:rPr>
-              <a:t>     •  Longest Road (≥ 5 segments) → 2 VP</a:t>
-            </a:r>
-          </a:p>
-          <a:p>
-            <a:pPr lvl="1"/>
-            <a:r>
-              <a:rPr sz="1700" b="0">
-                <a:solidFill>
-                  <a:srgbClr val="1A1A1A"/>
-                </a:solidFill>
-              </a:rPr>
-              <a:t>     •  Largest Army (≥ 3 knights) → 2 VP</a:t>
+              <a:t>▸  simulation.R — Monte Carlo runner: run_simulation(n_games, seed)</a:t>
+            </a:r>
+          </a:p>
+          <a:p>
+            <a:pPr/>
+            <a:r>
+              <a:rPr sz="2000" b="1">
+                <a:solidFill>
+                  <a:srgbClr val="1A3D1A"/>
+                </a:solidFill>
+              </a:rPr>
+              <a:t>▸  analysis.R — ggplot2 charts + chi-squared significance test</a:t>
             </a:r>
           </a:p>
         </p:txBody>
@@ -8642,514 +9073,211 @@
                   <a:srgbClr val="FFFBF0"/>
                 </a:solidFill>
               </a:rPr>
-              <a:t>Simplifications vs. Full Catan Rules</a:t>
-            </a:r>
-          </a:p>
-        </p:txBody>
-      </p:sp>
-      <p:graphicFrame>
-        <p:nvGraphicFramePr>
-          <p:cNvPr id="4" name="Table 3"/>
-          <p:cNvGraphicFramePr>
-            <a:graphicFrameLocks noGrp="1"/>
-          </p:cNvGraphicFramePr>
+              <a:t>Game Loop (game.R)</a:t>
+            </a:r>
+          </a:p>
+        </p:txBody>
+      </p:sp>
+      <p:sp>
+        <p:nvSpPr>
+          <p:cNvPr id="4" name="Rectangle 3"/>
+          <p:cNvSpPr/>
           <p:nvPr/>
-        </p:nvGraphicFramePr>
-        <p:xfrm>
-          <a:off x="365760" y="1188720"/>
-          <a:ext cx="11155680" cy="5120640"/>
-        </p:xfrm>
-        <a:graphic>
-          <a:graphicData uri="http://schemas.openxmlformats.org/drawingml/2006/table">
-            <a:tbl>
-              <a:tblPr firstRow="1" bandRow="1">
-                <a:tableStyleId>{5C22544A-7EE6-4342-B048-85BDC9FD1C3A}</a:tableStyleId>
-              </a:tblPr>
-              <a:tblGrid>
-                <a:gridCol w="2560320"/>
-                <a:gridCol w="4023360"/>
-                <a:gridCol w="4572000"/>
-              </a:tblGrid>
-              <a:tr h="731520">
-                <a:tc>
-                  <a:txBody>
-                    <a:bodyPr/>
-                    <a:lstStyle/>
-                    <a:p>
-                      <a:pPr algn="ctr"/>
-                      <a:r>
-                        <a:rPr b="1" sz="1500">
-                          <a:solidFill>
-                            <a:srgbClr val="FFFBF0"/>
-                          </a:solidFill>
-                        </a:rPr>
-                        <a:t>Full Rule</a:t>
-                      </a:r>
-                    </a:p>
-                  </a:txBody>
-                  <a:tcPr>
-                    <a:solidFill>
-                      <a:srgbClr val="1A3D1A"/>
-                    </a:solidFill>
-                  </a:tcPr>
-                </a:tc>
-                <a:tc>
-                  <a:txBody>
-                    <a:bodyPr/>
-                    <a:lstStyle/>
-                    <a:p>
-                      <a:pPr algn="ctr"/>
-                      <a:r>
-                        <a:rPr b="1" sz="1500">
-                          <a:solidFill>
-                            <a:srgbClr val="FFFBF0"/>
-                          </a:solidFill>
-                        </a:rPr>
-                        <a:t>Simulation Simplification</a:t>
-                      </a:r>
-                    </a:p>
-                  </a:txBody>
-                  <a:tcPr>
-                    <a:solidFill>
-                      <a:srgbClr val="1A3D1A"/>
-                    </a:solidFill>
-                  </a:tcPr>
-                </a:tc>
-                <a:tc>
-                  <a:txBody>
-                    <a:bodyPr/>
-                    <a:lstStyle/>
-                    <a:p>
-                      <a:pPr algn="ctr"/>
-                      <a:r>
-                        <a:rPr b="1" sz="1500">
-                          <a:solidFill>
-                            <a:srgbClr val="FFFBF0"/>
-                          </a:solidFill>
-                        </a:rPr>
-                        <a:t>Impact on Results</a:t>
-                      </a:r>
-                    </a:p>
-                  </a:txBody>
-                  <a:tcPr>
-                    <a:solidFill>
-                      <a:srgbClr val="1A3D1A"/>
-                    </a:solidFill>
-                  </a:tcPr>
-                </a:tc>
-              </a:tr>
-              <a:tr h="731520">
-                <a:tc>
-                  <a:txBody>
-                    <a:bodyPr/>
-                    <a:lstStyle/>
-                    <a:p>
-                      <a:pPr algn="l"/>
-                      <a:r>
-                        <a:rPr sz="1400">
-                          <a:solidFill>
-                            <a:srgbClr val="1A1A1A"/>
-                          </a:solidFill>
-                        </a:rPr>
-                        <a:t>Player-to-player trading</a:t>
-                      </a:r>
-                    </a:p>
-                  </a:txBody>
-                  <a:tcPr>
-                    <a:solidFill>
-                      <a:srgbClr val="FFFBF0"/>
-                    </a:solidFill>
-                  </a:tcPr>
-                </a:tc>
-                <a:tc>
-                  <a:txBody>
-                    <a:bodyPr/>
-                    <a:lstStyle/>
-                    <a:p>
-                      <a:pPr algn="l"/>
-                      <a:r>
-                        <a:rPr sz="1400">
-                          <a:solidFill>
-                            <a:srgbClr val="1A1A1A"/>
-                          </a:solidFill>
-                        </a:rPr>
-                        <a:t>Omitted — bank/port trading only</a:t>
-                      </a:r>
-                    </a:p>
-                  </a:txBody>
-                  <a:tcPr>
-                    <a:solidFill>
-                      <a:srgbClr val="FFFBF0"/>
-                    </a:solidFill>
-                  </a:tcPr>
-                </a:tc>
-                <a:tc>
-                  <a:txBody>
-                    <a:bodyPr/>
-                    <a:lstStyle/>
-                    <a:p>
-                      <a:pPr algn="l"/>
-                      <a:r>
-                        <a:rPr sz="1400">
-                          <a:solidFill>
-                            <a:srgbClr val="1A1A1A"/>
-                          </a:solidFill>
-                        </a:rPr>
-                        <a:t>Low: all strategies affected equally</a:t>
-                      </a:r>
-                    </a:p>
-                  </a:txBody>
-                  <a:tcPr>
-                    <a:solidFill>
-                      <a:srgbClr val="FFFBF0"/>
-                    </a:solidFill>
-                  </a:tcPr>
-                </a:tc>
-              </a:tr>
-              <a:tr h="731520">
-                <a:tc>
-                  <a:txBody>
-                    <a:bodyPr/>
-                    <a:lstStyle/>
-                    <a:p>
-                      <a:pPr algn="l"/>
-                      <a:r>
-                        <a:rPr sz="1400">
-                          <a:solidFill>
-                            <a:srgbClr val="1A1A1A"/>
-                          </a:solidFill>
-                        </a:rPr>
-                        <a:t>Longest Road</a:t>
-                      </a:r>
-                    </a:p>
-                  </a:txBody>
-                  <a:tcPr>
-                    <a:solidFill>
-                      <a:srgbClr val="E8F0E0"/>
-                    </a:solidFill>
-                  </a:tcPr>
-                </a:tc>
-                <a:tc>
-                  <a:txBody>
-                    <a:bodyPr/>
-                    <a:lstStyle/>
-                    <a:p>
-                      <a:pPr algn="l"/>
-                      <a:r>
-                        <a:rPr sz="1400">
-                          <a:solidFill>
-                            <a:srgbClr val="1A1A1A"/>
-                          </a:solidFill>
-                        </a:rPr>
-                        <a:t>Tracked; 2 VP at ≥5 road segments</a:t>
-                      </a:r>
-                    </a:p>
-                  </a:txBody>
-                  <a:tcPr>
-                    <a:solidFill>
-                      <a:srgbClr val="E8F0E0"/>
-                    </a:solidFill>
-                  </a:tcPr>
-                </a:tc>
-                <a:tc>
-                  <a:txBody>
-                    <a:bodyPr/>
-                    <a:lstStyle/>
-                    <a:p>
-                      <a:pPr algn="l"/>
-                      <a:r>
-                        <a:rPr sz="1400">
-                          <a:solidFill>
-                            <a:srgbClr val="1A1A1A"/>
-                          </a:solidFill>
-                        </a:rPr>
-                        <a:t>Faithful to rules</a:t>
-                      </a:r>
-                    </a:p>
-                  </a:txBody>
-                  <a:tcPr>
-                    <a:solidFill>
-                      <a:srgbClr val="E8F0E0"/>
-                    </a:solidFill>
-                  </a:tcPr>
-                </a:tc>
-              </a:tr>
-              <a:tr h="731520">
-                <a:tc>
-                  <a:txBody>
-                    <a:bodyPr/>
-                    <a:lstStyle/>
-                    <a:p>
-                      <a:pPr algn="l"/>
-                      <a:r>
-                        <a:rPr sz="1400">
-                          <a:solidFill>
-                            <a:srgbClr val="1A1A1A"/>
-                          </a:solidFill>
-                        </a:rPr>
-                        <a:t>Largest Army</a:t>
-                      </a:r>
-                    </a:p>
-                  </a:txBody>
-                  <a:tcPr>
-                    <a:solidFill>
-                      <a:srgbClr val="FFFBF0"/>
-                    </a:solidFill>
-                  </a:tcPr>
-                </a:tc>
-                <a:tc>
-                  <a:txBody>
-                    <a:bodyPr/>
-                    <a:lstStyle/>
-                    <a:p>
-                      <a:pPr algn="l"/>
-                      <a:r>
-                        <a:rPr sz="1400">
-                          <a:solidFill>
-                            <a:srgbClr val="1A1A1A"/>
-                          </a:solidFill>
-                        </a:rPr>
-                        <a:t>Tracked; 2 VP at ≥3 knights</a:t>
-                      </a:r>
-                    </a:p>
-                  </a:txBody>
-                  <a:tcPr>
-                    <a:solidFill>
-                      <a:srgbClr val="FFFBF0"/>
-                    </a:solidFill>
-                  </a:tcPr>
-                </a:tc>
-                <a:tc>
-                  <a:txBody>
-                    <a:bodyPr/>
-                    <a:lstStyle/>
-                    <a:p>
-                      <a:pPr algn="l"/>
-                      <a:r>
-                        <a:rPr sz="1400">
-                          <a:solidFill>
-                            <a:srgbClr val="1A1A1A"/>
-                          </a:solidFill>
-                        </a:rPr>
-                        <a:t>Faithful to rules</a:t>
-                      </a:r>
-                    </a:p>
-                  </a:txBody>
-                  <a:tcPr>
-                    <a:solidFill>
-                      <a:srgbClr val="FFFBF0"/>
-                    </a:solidFill>
-                  </a:tcPr>
-                </a:tc>
-              </a:tr>
-              <a:tr h="731520">
-                <a:tc>
-                  <a:txBody>
-                    <a:bodyPr/>
-                    <a:lstStyle/>
-                    <a:p>
-                      <a:pPr algn="l"/>
-                      <a:r>
-                        <a:rPr sz="1400">
-                          <a:solidFill>
-                            <a:srgbClr val="1A1A1A"/>
-                          </a:solidFill>
-                        </a:rPr>
-                        <a:t>Dev card variety</a:t>
-                      </a:r>
-                    </a:p>
-                  </a:txBody>
-                  <a:tcPr>
-                    <a:solidFill>
-                      <a:srgbClr val="E8F0E0"/>
-                    </a:solidFill>
-                  </a:tcPr>
-                </a:tc>
-                <a:tc>
-                  <a:txBody>
-                    <a:bodyPr/>
-                    <a:lstStyle/>
-                    <a:p>
-                      <a:pPr algn="l"/>
-                      <a:r>
-                        <a:rPr sz="1400">
-                          <a:solidFill>
-                            <a:srgbClr val="1A1A1A"/>
-                          </a:solidFill>
-                        </a:rPr>
-                        <a:t>Knights + VP cards; Progress cards stubbed</a:t>
-                      </a:r>
-                    </a:p>
-                  </a:txBody>
-                  <a:tcPr>
-                    <a:solidFill>
-                      <a:srgbClr val="E8F0E0"/>
-                    </a:solidFill>
-                  </a:tcPr>
-                </a:tc>
-                <a:tc>
-                  <a:txBody>
-                    <a:bodyPr/>
-                    <a:lstStyle/>
-                    <a:p>
-                      <a:pPr algn="l"/>
-                      <a:r>
-                        <a:rPr sz="1400">
-                          <a:solidFill>
-                            <a:srgbClr val="1A1A1A"/>
-                          </a:solidFill>
-                        </a:rPr>
-                        <a:t>Minor: removes Road Building / Monopoly edge cases</a:t>
-                      </a:r>
-                    </a:p>
-                  </a:txBody>
-                  <a:tcPr>
-                    <a:solidFill>
-                      <a:srgbClr val="E8F0E0"/>
-                    </a:solidFill>
-                  </a:tcPr>
-                </a:tc>
-              </a:tr>
-              <a:tr h="731520">
-                <a:tc>
-                  <a:txBody>
-                    <a:bodyPr/>
-                    <a:lstStyle/>
-                    <a:p>
-                      <a:pPr algn="l"/>
-                      <a:r>
-                        <a:rPr sz="1400">
-                          <a:solidFill>
-                            <a:srgbClr val="1A1A1A"/>
-                          </a:solidFill>
-                        </a:rPr>
-                        <a:t>Robber targeting</a:t>
-                      </a:r>
-                    </a:p>
-                  </a:txBody>
-                  <a:tcPr>
-                    <a:solidFill>
-                      <a:srgbClr val="FFFBF0"/>
-                    </a:solidFill>
-                  </a:tcPr>
-                </a:tc>
-                <a:tc>
-                  <a:txBody>
-                    <a:bodyPr/>
-                    <a:lstStyle/>
-                    <a:p>
-                      <a:pPr algn="l"/>
-                      <a:r>
-                        <a:rPr sz="1400">
-                          <a:solidFill>
-                            <a:srgbClr val="1A1A1A"/>
-                          </a:solidFill>
-                        </a:rPr>
-                        <a:t>Always targets the leading player (most VP)</a:t>
-                      </a:r>
-                    </a:p>
-                  </a:txBody>
-                  <a:tcPr>
-                    <a:solidFill>
-                      <a:srgbClr val="FFFBF0"/>
-                    </a:solidFill>
-                  </a:tcPr>
-                </a:tc>
-                <a:tc>
-                  <a:txBody>
-                    <a:bodyPr/>
-                    <a:lstStyle/>
-                    <a:p>
-                      <a:pPr algn="l"/>
-                      <a:r>
-                        <a:rPr sz="1400">
-                          <a:solidFill>
-                            <a:srgbClr val="1A1A1A"/>
-                          </a:solidFill>
-                        </a:rPr>
-                        <a:t>Deterministic; slightly penalises front-runners</a:t>
-                      </a:r>
-                    </a:p>
-                  </a:txBody>
-                  <a:tcPr>
-                    <a:solidFill>
-                      <a:srgbClr val="FFFBF0"/>
-                    </a:solidFill>
-                  </a:tcPr>
-                </a:tc>
-              </a:tr>
-              <a:tr h="731520">
-                <a:tc>
-                  <a:txBody>
-                    <a:bodyPr/>
-                    <a:lstStyle/>
-                    <a:p>
-                      <a:pPr algn="l"/>
-                      <a:r>
-                        <a:rPr sz="1400">
-                          <a:solidFill>
-                            <a:srgbClr val="1A1A1A"/>
-                          </a:solidFill>
-                        </a:rPr>
-                        <a:t>Board geometry</a:t>
-                      </a:r>
-                    </a:p>
-                  </a:txBody>
-                  <a:tcPr>
-                    <a:solidFill>
-                      <a:srgbClr val="E8F0E0"/>
-                    </a:solidFill>
-                  </a:tcPr>
-                </a:tc>
-                <a:tc>
-                  <a:txBody>
-                    <a:bodyPr/>
-                    <a:lstStyle/>
-                    <a:p>
-                      <a:pPr algn="l"/>
-                      <a:r>
-                        <a:rPr sz="1400">
-                          <a:solidFill>
-                            <a:srgbClr val="1A1A1A"/>
-                          </a:solidFill>
-                        </a:rPr>
-                        <a:t>Intersection IDs enumerated for simulation; not pixel-perfect</a:t>
-                      </a:r>
-                    </a:p>
-                  </a:txBody>
-                  <a:tcPr>
-                    <a:solidFill>
-                      <a:srgbClr val="E8F0E0"/>
-                    </a:solidFill>
-                  </a:tcPr>
-                </a:tc>
-                <a:tc>
-                  <a:txBody>
-                    <a:bodyPr/>
-                    <a:lstStyle/>
-                    <a:p>
-                      <a:pPr algn="l"/>
-                      <a:r>
-                        <a:rPr sz="1400">
-                          <a:solidFill>
-                            <a:srgbClr val="1A1A1A"/>
-                          </a:solidFill>
-                        </a:rPr>
-                        <a:t>Structural relationships preserved</a:t>
-                      </a:r>
-                    </a:p>
-                  </a:txBody>
-                  <a:tcPr>
-                    <a:solidFill>
-                      <a:srgbClr val="E8F0E0"/>
-                    </a:solidFill>
-                  </a:tcPr>
-                </a:tc>
-              </a:tr>
-            </a:tbl>
-          </a:graphicData>
-        </a:graphic>
-      </p:graphicFrame>
+        </p:nvSpPr>
+        <p:spPr>
+          <a:xfrm>
+            <a:off x="274320" y="1143000"/>
+            <a:ext cx="11612880" cy="5394960"/>
+          </a:xfrm>
+          <a:prstGeom prst="rect">
+            <a:avLst/>
+          </a:prstGeom>
+          <a:solidFill>
+            <a:srgbClr val="FFFBF0"/>
+          </a:solidFill>
+          <a:ln w="9525">
+            <a:solidFill>
+              <a:srgbClr val="CCCCBB"/>
+            </a:solidFill>
+          </a:ln>
+        </p:spPr>
+        <p:style>
+          <a:lnRef idx="1">
+            <a:schemeClr val="accent1"/>
+          </a:lnRef>
+          <a:fillRef idx="3">
+            <a:schemeClr val="accent1"/>
+          </a:fillRef>
+          <a:effectRef idx="2">
+            <a:schemeClr val="accent1"/>
+          </a:effectRef>
+          <a:fontRef idx="minor">
+            <a:schemeClr val="lt1"/>
+          </a:fontRef>
+        </p:style>
+        <p:txBody>
+          <a:bodyPr rtlCol="0" anchor="ctr"/>
+          <a:lstStyle/>
+          <a:p>
+            <a:pPr algn="ctr"/>
+          </a:p>
+        </p:txBody>
+      </p:sp>
+      <p:sp>
+        <p:nvSpPr>
+          <p:cNvPr id="5" name="TextBox 4"/>
+          <p:cNvSpPr txBox="1"/>
+          <p:nvPr/>
+        </p:nvSpPr>
+        <p:spPr>
+          <a:xfrm>
+            <a:off x="502920" y="1280160"/>
+            <a:ext cx="11155680" cy="5120640"/>
+          </a:xfrm>
+          <a:prstGeom prst="rect">
+            <a:avLst/>
+          </a:prstGeom>
+          <a:noFill/>
+        </p:spPr>
+        <p:txBody>
+          <a:bodyPr wrap="square">
+            <a:spAutoFit/>
+          </a:bodyPr>
+          <a:lstStyle/>
+          <a:p>
+            <a:pPr/>
+            <a:r>
+              <a:rPr sz="2000" b="1">
+                <a:solidFill>
+                  <a:srgbClr val="1A3D1A"/>
+                </a:solidFill>
+              </a:rPr>
+              <a:t>▸  Initial placement — reverse snake draft</a:t>
+            </a:r>
+          </a:p>
+          <a:p>
+            <a:pPr lvl="1"/>
+            <a:r>
+              <a:rPr sz="1700" b="0">
+                <a:solidFill>
+                  <a:srgbClr val="1A1A1A"/>
+                </a:solidFill>
+              </a:rPr>
+              <a:t>     •  P1 → P2 → P3 → P4 → P4 → P3 → P2 → P1</a:t>
+            </a:r>
+          </a:p>
+          <a:p>
+            <a:pPr lvl="1"/>
+            <a:r>
+              <a:rPr sz="1700" b="0">
+                <a:solidFill>
+                  <a:srgbClr val="1A1A1A"/>
+                </a:solidFill>
+              </a:rPr>
+              <a:t>     •  Second settlement grants 1 of each adjacent resource to start</a:t>
+            </a:r>
+          </a:p>
+          <a:p>
+            <a:pPr/>
+            <a:r>
+              <a:rPr sz="2000" b="1">
+                <a:solidFill>
+                  <a:srgbClr val="1A3D1A"/>
+                </a:solidFill>
+              </a:rPr>
+              <a:t>▸  Each turn: Roll → Robber/Production → Trade → Build</a:t>
+            </a:r>
+          </a:p>
+          <a:p>
+            <a:pPr lvl="1"/>
+            <a:r>
+              <a:rPr sz="1700" b="0">
+                <a:solidFill>
+                  <a:srgbClr val="1A1A1A"/>
+                </a:solidFill>
+              </a:rPr>
+              <a:t>     •  Roll 7: discard rule (&gt;7 cards) + robber targets the leading player</a:t>
+            </a:r>
+          </a:p>
+          <a:p>
+            <a:pPr lvl="1"/>
+            <a:r>
+              <a:rPr sz="1700" b="0">
+                <a:solidFill>
+                  <a:srgbClr val="1A1A1A"/>
+                </a:solidFill>
+              </a:rPr>
+              <a:t>     •  Production: settlements yield 1 resource, cities yield 2</a:t>
+            </a:r>
+          </a:p>
+          <a:p>
+            <a:pPr lvl="1"/>
+            <a:r>
+              <a:rPr sz="1700" b="0">
+                <a:solidFill>
+                  <a:srgbClr val="1A1A1A"/>
+                </a:solidFill>
+              </a:rPr>
+              <a:t>     •  Trade: bank 4:1 or port rates (3:1 general / 2:1 specific)</a:t>
+            </a:r>
+          </a:p>
+          <a:p>
+            <a:pPr/>
+            <a:r>
+              <a:rPr sz="2000" b="1">
+                <a:solidFill>
+                  <a:srgbClr val="1A3D1A"/>
+                </a:solidFill>
+              </a:rPr>
+              <a:t>▸  Win condition: first player to reach 10 VP on their turn</a:t>
+            </a:r>
+          </a:p>
+          <a:p>
+            <a:pPr lvl="1"/>
+            <a:r>
+              <a:rPr sz="1700" b="0">
+                <a:solidFill>
+                  <a:srgbClr val="1A1A1A"/>
+                </a:solidFill>
+              </a:rPr>
+              <a:t>     •  Stalemate safeguard: game ends after 200 turns (recorded as NA winner)</a:t>
+            </a:r>
+          </a:p>
+          <a:p>
+            <a:pPr/>
+            <a:r>
+              <a:rPr sz="2000" b="1">
+                <a:solidFill>
+                  <a:srgbClr val="1A3D1A"/>
+                </a:solidFill>
+              </a:rPr>
+              <a:t>▸  Special VP bonuses tracked each turn</a:t>
+            </a:r>
+          </a:p>
+          <a:p>
+            <a:pPr lvl="1"/>
+            <a:r>
+              <a:rPr sz="1700" b="0">
+                <a:solidFill>
+                  <a:srgbClr val="1A1A1A"/>
+                </a:solidFill>
+              </a:rPr>
+              <a:t>     •  Longest Road (≥ 5 segments) → 2 VP</a:t>
+            </a:r>
+          </a:p>
+          <a:p>
+            <a:pPr lvl="1"/>
+            <a:r>
+              <a:rPr sz="1700" b="0">
+                <a:solidFill>
+                  <a:srgbClr val="1A1A1A"/>
+                </a:solidFill>
+              </a:rPr>
+              <a:t>     •  Largest Army (≥ 3 knights) → 2 VP</a:t>
+            </a:r>
+          </a:p>
+        </p:txBody>
+      </p:sp>
     </p:spTree>
   </p:cSld>
   <p:clrMapOvr>

--- a/baaad-strategy.pptx
+++ b/baaad-strategy.pptx
@@ -5,24 +5,27 @@
     <p:sldMasterId id="2147483648" r:id="rId1"/>
   </p:sldMasterIdLst>
   <p:sldIdLst>
-    <p:sldId id="256" r:id="rId7"/>
-    <p:sldId id="257" r:id="rId8"/>
-    <p:sldId id="258" r:id="rId9"/>
-    <p:sldId id="259" r:id="rId10"/>
-    <p:sldId id="260" r:id="rId11"/>
-    <p:sldId id="261" r:id="rId12"/>
-    <p:sldId id="262" r:id="rId13"/>
-    <p:sldId id="263" r:id="rId14"/>
-    <p:sldId id="264" r:id="rId15"/>
-    <p:sldId id="265" r:id="rId16"/>
-    <p:sldId id="266" r:id="rId17"/>
-    <p:sldId id="267" r:id="rId18"/>
-    <p:sldId id="268" r:id="rId19"/>
-    <p:sldId id="269" r:id="rId20"/>
-    <p:sldId id="270" r:id="rId21"/>
-    <p:sldId id="271" r:id="rId22"/>
+    <p:sldId id="256" r:id="rId2"/>
+    <p:sldId id="257" r:id="rId3"/>
+    <p:sldId id="260" r:id="rId4"/>
+    <p:sldId id="261" r:id="rId5"/>
+    <p:sldId id="277" r:id="rId6"/>
+    <p:sldId id="258" r:id="rId7"/>
+    <p:sldId id="259" r:id="rId8"/>
+    <p:sldId id="263" r:id="rId9"/>
+    <p:sldId id="264" r:id="rId10"/>
+    <p:sldId id="265" r:id="rId11"/>
+    <p:sldId id="266" r:id="rId12"/>
+    <p:sldId id="273" r:id="rId13"/>
+    <p:sldId id="267" r:id="rId14"/>
+    <p:sldId id="268" r:id="rId15"/>
+    <p:sldId id="275" r:id="rId16"/>
+    <p:sldId id="274" r:id="rId17"/>
+    <p:sldId id="269" r:id="rId18"/>
+    <p:sldId id="270" r:id="rId19"/>
+    <p:sldId id="271" r:id="rId20"/>
   </p:sldIdLst>
-  <p:sldSz cx="12188952" cy="6858000" type="screen4x3"/>
+  <p:sldSz cx="12188825" cy="6858000"/>
   <p:notesSz cx="6858000" cy="9144000"/>
   <p:defaultTextStyle>
     <a:defPPr>
@@ -119,6 +122,22 @@
       </a:defRPr>
     </a:lvl9pPr>
   </p:defaultTextStyle>
+  <p:extLst>
+    <p:ext uri="{EFAFB233-063F-42B5-8137-9DF3F51BA10A}">
+      <p15:sldGuideLst xmlns:p15="http://schemas.microsoft.com/office/powerpoint/2012/main">
+        <p15:guide id="1" orient="horz" pos="2160">
+          <p15:clr>
+            <a:srgbClr val="A4A3A4"/>
+          </p15:clr>
+        </p15:guide>
+        <p15:guide id="2" pos="2880">
+          <p15:clr>
+            <a:srgbClr val="A4A3A4"/>
+          </p15:clr>
+        </p15:guide>
+      </p15:sldGuideLst>
+    </p:ext>
+  </p:extLst>
 </p:presentation>
 </file>
 
@@ -160,10 +179,9 @@
           <a:lstStyle/>
           <a:p>
             <a:r>
-              <a:rPr lang="en-US" smtClean="0"/>
+              <a:rPr lang="en-US"/>
               <a:t>Click to edit Master title style</a:t>
             </a:r>
-            <a:endParaRPr lang="en-US"/>
           </a:p>
         </p:txBody>
       </p:sp>
@@ -279,10 +297,9 @@
           </a:lstStyle>
           <a:p>
             <a:r>
-              <a:rPr lang="en-US" smtClean="0"/>
+              <a:rPr lang="en-US"/>
               <a:t>Click to edit Master subtitle style</a:t>
             </a:r>
-            <a:endParaRPr lang="en-US"/>
           </a:p>
         </p:txBody>
       </p:sp>
@@ -303,7 +320,7 @@
           <a:p>
             <a:fld id="{5BCAD085-E8A6-8845-BD4E-CB4CCA059FC4}" type="datetimeFigureOut">
               <a:rPr lang="en-US" smtClean="0"/>
-              <a:t>1/27/13</a:t>
+              <a:t>3/24/2026</a:t>
             </a:fld>
             <a:endParaRPr lang="en-US"/>
           </a:p>
@@ -397,10 +414,9 @@
           <a:lstStyle/>
           <a:p>
             <a:r>
-              <a:rPr lang="en-US" smtClean="0"/>
+              <a:rPr lang="en-US"/>
               <a:t>Click to edit Master title style</a:t>
             </a:r>
-            <a:endParaRPr lang="en-US"/>
           </a:p>
         </p:txBody>
       </p:sp>
@@ -421,38 +437,37 @@
           <a:p>
             <a:pPr lvl="0"/>
             <a:r>
-              <a:rPr lang="en-US" smtClean="0"/>
+              <a:rPr lang="en-US"/>
               <a:t>Click to edit Master text styles</a:t>
             </a:r>
           </a:p>
           <a:p>
             <a:pPr lvl="1"/>
             <a:r>
-              <a:rPr lang="en-US" smtClean="0"/>
+              <a:rPr lang="en-US"/>
               <a:t>Second level</a:t>
             </a:r>
           </a:p>
           <a:p>
             <a:pPr lvl="2"/>
             <a:r>
-              <a:rPr lang="en-US" smtClean="0"/>
+              <a:rPr lang="en-US"/>
               <a:t>Third level</a:t>
             </a:r>
           </a:p>
           <a:p>
             <a:pPr lvl="3"/>
             <a:r>
-              <a:rPr lang="en-US" smtClean="0"/>
+              <a:rPr lang="en-US"/>
               <a:t>Fourth level</a:t>
             </a:r>
           </a:p>
           <a:p>
             <a:pPr lvl="4"/>
             <a:r>
-              <a:rPr lang="en-US" smtClean="0"/>
+              <a:rPr lang="en-US"/>
               <a:t>Fifth level</a:t>
             </a:r>
-            <a:endParaRPr lang="en-US"/>
           </a:p>
         </p:txBody>
       </p:sp>
@@ -473,7 +488,7 @@
           <a:p>
             <a:fld id="{5BCAD085-E8A6-8845-BD4E-CB4CCA059FC4}" type="datetimeFigureOut">
               <a:rPr lang="en-US" smtClean="0"/>
-              <a:t>1/27/13</a:t>
+              <a:t>3/24/2026</a:t>
             </a:fld>
             <a:endParaRPr lang="en-US"/>
           </a:p>
@@ -572,10 +587,9 @@
           <a:lstStyle/>
           <a:p>
             <a:r>
-              <a:rPr lang="en-US" smtClean="0"/>
+              <a:rPr lang="en-US"/>
               <a:t>Click to edit Master title style</a:t>
             </a:r>
-            <a:endParaRPr lang="en-US"/>
           </a:p>
         </p:txBody>
       </p:sp>
@@ -601,38 +615,37 @@
           <a:p>
             <a:pPr lvl="0"/>
             <a:r>
-              <a:rPr lang="en-US" smtClean="0"/>
+              <a:rPr lang="en-US"/>
               <a:t>Click to edit Master text styles</a:t>
             </a:r>
           </a:p>
           <a:p>
             <a:pPr lvl="1"/>
             <a:r>
-              <a:rPr lang="en-US" smtClean="0"/>
+              <a:rPr lang="en-US"/>
               <a:t>Second level</a:t>
             </a:r>
           </a:p>
           <a:p>
             <a:pPr lvl="2"/>
             <a:r>
-              <a:rPr lang="en-US" smtClean="0"/>
+              <a:rPr lang="en-US"/>
               <a:t>Third level</a:t>
             </a:r>
           </a:p>
           <a:p>
             <a:pPr lvl="3"/>
             <a:r>
-              <a:rPr lang="en-US" smtClean="0"/>
+              <a:rPr lang="en-US"/>
               <a:t>Fourth level</a:t>
             </a:r>
           </a:p>
           <a:p>
             <a:pPr lvl="4"/>
             <a:r>
-              <a:rPr lang="en-US" smtClean="0"/>
+              <a:rPr lang="en-US"/>
               <a:t>Fifth level</a:t>
             </a:r>
-            <a:endParaRPr lang="en-US"/>
           </a:p>
         </p:txBody>
       </p:sp>
@@ -653,7 +666,7 @@
           <a:p>
             <a:fld id="{5BCAD085-E8A6-8845-BD4E-CB4CCA059FC4}" type="datetimeFigureOut">
               <a:rPr lang="en-US" smtClean="0"/>
-              <a:t>1/27/13</a:t>
+              <a:t>3/24/2026</a:t>
             </a:fld>
             <a:endParaRPr lang="en-US"/>
           </a:p>
@@ -747,10 +760,9 @@
           <a:lstStyle/>
           <a:p>
             <a:r>
-              <a:rPr lang="en-US" smtClean="0"/>
+              <a:rPr lang="en-US"/>
               <a:t>Click to edit Master title style</a:t>
             </a:r>
-            <a:endParaRPr lang="en-US"/>
           </a:p>
         </p:txBody>
       </p:sp>
@@ -771,38 +783,37 @@
           <a:p>
             <a:pPr lvl="0"/>
             <a:r>
-              <a:rPr lang="en-US" smtClean="0"/>
+              <a:rPr lang="en-US"/>
               <a:t>Click to edit Master text styles</a:t>
             </a:r>
           </a:p>
           <a:p>
             <a:pPr lvl="1"/>
             <a:r>
-              <a:rPr lang="en-US" smtClean="0"/>
+              <a:rPr lang="en-US"/>
               <a:t>Second level</a:t>
             </a:r>
           </a:p>
           <a:p>
             <a:pPr lvl="2"/>
             <a:r>
-              <a:rPr lang="en-US" smtClean="0"/>
+              <a:rPr lang="en-US"/>
               <a:t>Third level</a:t>
             </a:r>
           </a:p>
           <a:p>
             <a:pPr lvl="3"/>
             <a:r>
-              <a:rPr lang="en-US" smtClean="0"/>
+              <a:rPr lang="en-US"/>
               <a:t>Fourth level</a:t>
             </a:r>
           </a:p>
           <a:p>
             <a:pPr lvl="4"/>
             <a:r>
-              <a:rPr lang="en-US" smtClean="0"/>
+              <a:rPr lang="en-US"/>
               <a:t>Fifth level</a:t>
             </a:r>
-            <a:endParaRPr lang="en-US"/>
           </a:p>
         </p:txBody>
       </p:sp>
@@ -823,7 +834,7 @@
           <a:p>
             <a:fld id="{5BCAD085-E8A6-8845-BD4E-CB4CCA059FC4}" type="datetimeFigureOut">
               <a:rPr lang="en-US" smtClean="0"/>
-              <a:t>1/27/13</a:t>
+              <a:t>3/24/2026</a:t>
             </a:fld>
             <a:endParaRPr lang="en-US"/>
           </a:p>
@@ -926,10 +937,9 @@
           </a:lstStyle>
           <a:p>
             <a:r>
-              <a:rPr lang="en-US" smtClean="0"/>
+              <a:rPr lang="en-US"/>
               <a:t>Click to edit Master title style</a:t>
             </a:r>
-            <a:endParaRPr lang="en-US"/>
           </a:p>
         </p:txBody>
       </p:sp>
@@ -1046,7 +1056,7 @@
           <a:p>
             <a:pPr lvl="0"/>
             <a:r>
-              <a:rPr lang="en-US" smtClean="0"/>
+              <a:rPr lang="en-US"/>
               <a:t>Click to edit Master text styles</a:t>
             </a:r>
           </a:p>
@@ -1069,7 +1079,7 @@
           <a:p>
             <a:fld id="{5BCAD085-E8A6-8845-BD4E-CB4CCA059FC4}" type="datetimeFigureOut">
               <a:rPr lang="en-US" smtClean="0"/>
-              <a:t>1/27/13</a:t>
+              <a:t>3/24/2026</a:t>
             </a:fld>
             <a:endParaRPr lang="en-US"/>
           </a:p>
@@ -1163,10 +1173,9 @@
           <a:lstStyle/>
           <a:p>
             <a:r>
-              <a:rPr lang="en-US" smtClean="0"/>
+              <a:rPr lang="en-US"/>
               <a:t>Click to edit Master title style</a:t>
             </a:r>
-            <a:endParaRPr lang="en-US"/>
           </a:p>
         </p:txBody>
       </p:sp>
@@ -1220,38 +1229,37 @@
           <a:p>
             <a:pPr lvl="0"/>
             <a:r>
-              <a:rPr lang="en-US" smtClean="0"/>
+              <a:rPr lang="en-US"/>
               <a:t>Click to edit Master text styles</a:t>
             </a:r>
           </a:p>
           <a:p>
             <a:pPr lvl="1"/>
             <a:r>
-              <a:rPr lang="en-US" smtClean="0"/>
+              <a:rPr lang="en-US"/>
               <a:t>Second level</a:t>
             </a:r>
           </a:p>
           <a:p>
             <a:pPr lvl="2"/>
             <a:r>
-              <a:rPr lang="en-US" smtClean="0"/>
+              <a:rPr lang="en-US"/>
               <a:t>Third level</a:t>
             </a:r>
           </a:p>
           <a:p>
             <a:pPr lvl="3"/>
             <a:r>
-              <a:rPr lang="en-US" smtClean="0"/>
+              <a:rPr lang="en-US"/>
               <a:t>Fourth level</a:t>
             </a:r>
           </a:p>
           <a:p>
             <a:pPr lvl="4"/>
             <a:r>
-              <a:rPr lang="en-US" smtClean="0"/>
+              <a:rPr lang="en-US"/>
               <a:t>Fifth level</a:t>
             </a:r>
-            <a:endParaRPr lang="en-US"/>
           </a:p>
         </p:txBody>
       </p:sp>
@@ -1305,38 +1313,37 @@
           <a:p>
             <a:pPr lvl="0"/>
             <a:r>
-              <a:rPr lang="en-US" smtClean="0"/>
+              <a:rPr lang="en-US"/>
               <a:t>Click to edit Master text styles</a:t>
             </a:r>
           </a:p>
           <a:p>
             <a:pPr lvl="1"/>
             <a:r>
-              <a:rPr lang="en-US" smtClean="0"/>
+              <a:rPr lang="en-US"/>
               <a:t>Second level</a:t>
             </a:r>
           </a:p>
           <a:p>
             <a:pPr lvl="2"/>
             <a:r>
-              <a:rPr lang="en-US" smtClean="0"/>
+              <a:rPr lang="en-US"/>
               <a:t>Third level</a:t>
             </a:r>
           </a:p>
           <a:p>
             <a:pPr lvl="3"/>
             <a:r>
-              <a:rPr lang="en-US" smtClean="0"/>
+              <a:rPr lang="en-US"/>
               <a:t>Fourth level</a:t>
             </a:r>
           </a:p>
           <a:p>
             <a:pPr lvl="4"/>
             <a:r>
-              <a:rPr lang="en-US" smtClean="0"/>
+              <a:rPr lang="en-US"/>
               <a:t>Fifth level</a:t>
             </a:r>
-            <a:endParaRPr lang="en-US"/>
           </a:p>
         </p:txBody>
       </p:sp>
@@ -1357,7 +1364,7 @@
           <a:p>
             <a:fld id="{5BCAD085-E8A6-8845-BD4E-CB4CCA059FC4}" type="datetimeFigureOut">
               <a:rPr lang="en-US" smtClean="0"/>
-              <a:t>1/27/13</a:t>
+              <a:t>3/24/2026</a:t>
             </a:fld>
             <a:endParaRPr lang="en-US"/>
           </a:p>
@@ -1455,10 +1462,9 @@
           </a:lstStyle>
           <a:p>
             <a:r>
-              <a:rPr lang="en-US" smtClean="0"/>
+              <a:rPr lang="en-US"/>
               <a:t>Click to edit Master title style</a:t>
             </a:r>
-            <a:endParaRPr lang="en-US"/>
           </a:p>
         </p:txBody>
       </p:sp>
@@ -1521,7 +1527,7 @@
           <a:p>
             <a:pPr lvl="0"/>
             <a:r>
-              <a:rPr lang="en-US" smtClean="0"/>
+              <a:rPr lang="en-US"/>
               <a:t>Click to edit Master text styles</a:t>
             </a:r>
           </a:p>
@@ -1577,38 +1583,37 @@
           <a:p>
             <a:pPr lvl="0"/>
             <a:r>
-              <a:rPr lang="en-US" smtClean="0"/>
+              <a:rPr lang="en-US"/>
               <a:t>Click to edit Master text styles</a:t>
             </a:r>
           </a:p>
           <a:p>
             <a:pPr lvl="1"/>
             <a:r>
-              <a:rPr lang="en-US" smtClean="0"/>
+              <a:rPr lang="en-US"/>
               <a:t>Second level</a:t>
             </a:r>
           </a:p>
           <a:p>
             <a:pPr lvl="2"/>
             <a:r>
-              <a:rPr lang="en-US" smtClean="0"/>
+              <a:rPr lang="en-US"/>
               <a:t>Third level</a:t>
             </a:r>
           </a:p>
           <a:p>
             <a:pPr lvl="3"/>
             <a:r>
-              <a:rPr lang="en-US" smtClean="0"/>
+              <a:rPr lang="en-US"/>
               <a:t>Fourth level</a:t>
             </a:r>
           </a:p>
           <a:p>
             <a:pPr lvl="4"/>
             <a:r>
-              <a:rPr lang="en-US" smtClean="0"/>
+              <a:rPr lang="en-US"/>
               <a:t>Fifth level</a:t>
             </a:r>
-            <a:endParaRPr lang="en-US"/>
           </a:p>
         </p:txBody>
       </p:sp>
@@ -1671,7 +1676,7 @@
           <a:p>
             <a:pPr lvl="0"/>
             <a:r>
-              <a:rPr lang="en-US" smtClean="0"/>
+              <a:rPr lang="en-US"/>
               <a:t>Click to edit Master text styles</a:t>
             </a:r>
           </a:p>
@@ -1727,38 +1732,37 @@
           <a:p>
             <a:pPr lvl="0"/>
             <a:r>
-              <a:rPr lang="en-US" smtClean="0"/>
+              <a:rPr lang="en-US"/>
               <a:t>Click to edit Master text styles</a:t>
             </a:r>
           </a:p>
           <a:p>
             <a:pPr lvl="1"/>
             <a:r>
-              <a:rPr lang="en-US" smtClean="0"/>
+              <a:rPr lang="en-US"/>
               <a:t>Second level</a:t>
             </a:r>
           </a:p>
           <a:p>
             <a:pPr lvl="2"/>
             <a:r>
-              <a:rPr lang="en-US" smtClean="0"/>
+              <a:rPr lang="en-US"/>
               <a:t>Third level</a:t>
             </a:r>
           </a:p>
           <a:p>
             <a:pPr lvl="3"/>
             <a:r>
-              <a:rPr lang="en-US" smtClean="0"/>
+              <a:rPr lang="en-US"/>
               <a:t>Fourth level</a:t>
             </a:r>
           </a:p>
           <a:p>
             <a:pPr lvl="4"/>
             <a:r>
-              <a:rPr lang="en-US" smtClean="0"/>
+              <a:rPr lang="en-US"/>
               <a:t>Fifth level</a:t>
             </a:r>
-            <a:endParaRPr lang="en-US"/>
           </a:p>
         </p:txBody>
       </p:sp>
@@ -1779,7 +1783,7 @@
           <a:p>
             <a:fld id="{5BCAD085-E8A6-8845-BD4E-CB4CCA059FC4}" type="datetimeFigureOut">
               <a:rPr lang="en-US" smtClean="0"/>
-              <a:t>1/27/13</a:t>
+              <a:t>3/24/2026</a:t>
             </a:fld>
             <a:endParaRPr lang="en-US"/>
           </a:p>
@@ -1873,10 +1877,9 @@
           <a:lstStyle/>
           <a:p>
             <a:r>
-              <a:rPr lang="en-US" smtClean="0"/>
+              <a:rPr lang="en-US"/>
               <a:t>Click to edit Master title style</a:t>
             </a:r>
-            <a:endParaRPr lang="en-US"/>
           </a:p>
         </p:txBody>
       </p:sp>
@@ -1897,7 +1900,7 @@
           <a:p>
             <a:fld id="{5BCAD085-E8A6-8845-BD4E-CB4CCA059FC4}" type="datetimeFigureOut">
               <a:rPr lang="en-US" smtClean="0"/>
-              <a:t>1/27/13</a:t>
+              <a:t>3/24/2026</a:t>
             </a:fld>
             <a:endParaRPr lang="en-US"/>
           </a:p>
@@ -1992,7 +1995,7 @@
           <a:p>
             <a:fld id="{5BCAD085-E8A6-8845-BD4E-CB4CCA059FC4}" type="datetimeFigureOut">
               <a:rPr lang="en-US" smtClean="0"/>
-              <a:t>1/27/13</a:t>
+              <a:t>3/24/2026</a:t>
             </a:fld>
             <a:endParaRPr lang="en-US"/>
           </a:p>
@@ -2095,10 +2098,9 @@
           </a:lstStyle>
           <a:p>
             <a:r>
-              <a:rPr lang="en-US" smtClean="0"/>
+              <a:rPr lang="en-US"/>
               <a:t>Click to edit Master title style</a:t>
             </a:r>
-            <a:endParaRPr lang="en-US"/>
           </a:p>
         </p:txBody>
       </p:sp>
@@ -2152,38 +2154,37 @@
           <a:p>
             <a:pPr lvl="0"/>
             <a:r>
-              <a:rPr lang="en-US" smtClean="0"/>
+              <a:rPr lang="en-US"/>
               <a:t>Click to edit Master text styles</a:t>
             </a:r>
           </a:p>
           <a:p>
             <a:pPr lvl="1"/>
             <a:r>
-              <a:rPr lang="en-US" smtClean="0"/>
+              <a:rPr lang="en-US"/>
               <a:t>Second level</a:t>
             </a:r>
           </a:p>
           <a:p>
             <a:pPr lvl="2"/>
             <a:r>
-              <a:rPr lang="en-US" smtClean="0"/>
+              <a:rPr lang="en-US"/>
               <a:t>Third level</a:t>
             </a:r>
           </a:p>
           <a:p>
             <a:pPr lvl="3"/>
             <a:r>
-              <a:rPr lang="en-US" smtClean="0"/>
+              <a:rPr lang="en-US"/>
               <a:t>Fourth level</a:t>
             </a:r>
           </a:p>
           <a:p>
             <a:pPr lvl="4"/>
             <a:r>
-              <a:rPr lang="en-US" smtClean="0"/>
+              <a:rPr lang="en-US"/>
               <a:t>Fifth level</a:t>
             </a:r>
-            <a:endParaRPr lang="en-US"/>
           </a:p>
         </p:txBody>
       </p:sp>
@@ -2246,7 +2247,7 @@
           <a:p>
             <a:pPr lvl="0"/>
             <a:r>
-              <a:rPr lang="en-US" smtClean="0"/>
+              <a:rPr lang="en-US"/>
               <a:t>Click to edit Master text styles</a:t>
             </a:r>
           </a:p>
@@ -2269,7 +2270,7 @@
           <a:p>
             <a:fld id="{5BCAD085-E8A6-8845-BD4E-CB4CCA059FC4}" type="datetimeFigureOut">
               <a:rPr lang="en-US" smtClean="0"/>
-              <a:t>1/27/13</a:t>
+              <a:t>3/24/2026</a:t>
             </a:fld>
             <a:endParaRPr lang="en-US"/>
           </a:p>
@@ -2372,10 +2373,9 @@
           </a:lstStyle>
           <a:p>
             <a:r>
-              <a:rPr lang="en-US" smtClean="0"/>
+              <a:rPr lang="en-US"/>
               <a:t>Click to edit Master title style</a:t>
             </a:r>
-            <a:endParaRPr lang="en-US"/>
           </a:p>
         </p:txBody>
       </p:sp>
@@ -2499,7 +2499,7 @@
           <a:p>
             <a:pPr lvl="0"/>
             <a:r>
-              <a:rPr lang="en-US" smtClean="0"/>
+              <a:rPr lang="en-US"/>
               <a:t>Click to edit Master text styles</a:t>
             </a:r>
           </a:p>
@@ -2522,7 +2522,7 @@
           <a:p>
             <a:fld id="{5BCAD085-E8A6-8845-BD4E-CB4CCA059FC4}" type="datetimeFigureOut">
               <a:rPr lang="en-US" smtClean="0"/>
-              <a:t>1/27/13</a:t>
+              <a:t>3/24/2026</a:t>
             </a:fld>
             <a:endParaRPr lang="en-US"/>
           </a:p>
@@ -2631,10 +2631,9 @@
           <a:lstStyle/>
           <a:p>
             <a:r>
-              <a:rPr lang="en-US" smtClean="0"/>
+              <a:rPr lang="en-US"/>
               <a:t>Click to edit Master title style</a:t>
             </a:r>
-            <a:endParaRPr lang="en-US"/>
           </a:p>
         </p:txBody>
       </p:sp>
@@ -2665,38 +2664,37 @@
           <a:p>
             <a:pPr lvl="0"/>
             <a:r>
-              <a:rPr lang="en-US" smtClean="0"/>
+              <a:rPr lang="en-US"/>
               <a:t>Click to edit Master text styles</a:t>
             </a:r>
           </a:p>
           <a:p>
             <a:pPr lvl="1"/>
             <a:r>
-              <a:rPr lang="en-US" smtClean="0"/>
+              <a:rPr lang="en-US"/>
               <a:t>Second level</a:t>
             </a:r>
           </a:p>
           <a:p>
             <a:pPr lvl="2"/>
             <a:r>
-              <a:rPr lang="en-US" smtClean="0"/>
+              <a:rPr lang="en-US"/>
               <a:t>Third level</a:t>
             </a:r>
           </a:p>
           <a:p>
             <a:pPr lvl="3"/>
             <a:r>
-              <a:rPr lang="en-US" smtClean="0"/>
+              <a:rPr lang="en-US"/>
               <a:t>Fourth level</a:t>
             </a:r>
           </a:p>
           <a:p>
             <a:pPr lvl="4"/>
             <a:r>
-              <a:rPr lang="en-US" smtClean="0"/>
+              <a:rPr lang="en-US"/>
               <a:t>Fifth level</a:t>
             </a:r>
-            <a:endParaRPr lang="en-US"/>
           </a:p>
         </p:txBody>
       </p:sp>
@@ -2735,7 +2733,7 @@
           <a:p>
             <a:fld id="{5BCAD085-E8A6-8845-BD4E-CB4CCA059FC4}" type="datetimeFigureOut">
               <a:rPr lang="en-US" smtClean="0"/>
-              <a:t>1/27/13</a:t>
+              <a:t>3/24/2026</a:t>
             </a:fld>
             <a:endParaRPr lang="en-US"/>
           </a:p>
@@ -3094,7 +3092,7 @@
 </file>
 
 <file path=ppt/slides/slide1.xml><?xml version="1.0" encoding="utf-8"?>
-<p:sld xmlns:a="http://schemas.openxmlformats.org/drawingml/2006/main" xmlns:p="http://schemas.openxmlformats.org/presentationml/2006/main" xmlns:r="http://schemas.openxmlformats.org/officeDocument/2006/relationships">
+<p:sld xmlns:a="http://schemas.openxmlformats.org/drawingml/2006/main" xmlns:r="http://schemas.openxmlformats.org/officeDocument/2006/relationships" xmlns:p="http://schemas.openxmlformats.org/presentationml/2006/main">
   <p:cSld>
     <p:bg>
       <p:bgPr>
@@ -3110,7 +3108,14 @@
         <p:cNvGrpSpPr/>
         <p:nvPr/>
       </p:nvGrpSpPr>
-      <p:grpSpPr/>
+      <p:grpSpPr>
+        <a:xfrm>
+          <a:off x="0" y="0"/>
+          <a:ext cx="0" cy="0"/>
+          <a:chOff x="0" y="0"/>
+          <a:chExt cx="0" cy="0"/>
+        </a:xfrm>
+      </p:grpSpPr>
       <p:sp>
         <p:nvSpPr>
           <p:cNvPr id="2" name="Oval 1"/>
@@ -3151,6 +3156,7 @@
           <a:lstStyle/>
           <a:p>
             <a:pPr algn="ctr"/>
+            <a:endParaRPr/>
           </a:p>
         </p:txBody>
       </p:sp>
@@ -3194,6 +3200,7 @@
           <a:lstStyle/>
           <a:p>
             <a:pPr algn="ctr"/>
+            <a:endParaRPr/>
           </a:p>
         </p:txBody>
       </p:sp>
@@ -3237,6 +3244,7 @@
           <a:lstStyle/>
           <a:p>
             <a:pPr algn="ctr"/>
+            <a:endParaRPr/>
           </a:p>
         </p:txBody>
       </p:sp>
@@ -3280,6 +3288,7 @@
           <a:lstStyle/>
           <a:p>
             <a:pPr algn="ctr"/>
+            <a:endParaRPr/>
           </a:p>
         </p:txBody>
       </p:sp>
@@ -3449,7 +3458,7 @@
 </file>
 
 <file path=ppt/slides/slide10.xml><?xml version="1.0" encoding="utf-8"?>
-<p:sld xmlns:a="http://schemas.openxmlformats.org/drawingml/2006/main" xmlns:p="http://schemas.openxmlformats.org/presentationml/2006/main" xmlns:r="http://schemas.openxmlformats.org/officeDocument/2006/relationships">
+<p:sld xmlns:a="http://schemas.openxmlformats.org/drawingml/2006/main" xmlns:r="http://schemas.openxmlformats.org/officeDocument/2006/relationships" xmlns:p="http://schemas.openxmlformats.org/presentationml/2006/main">
   <p:cSld>
     <p:bg>
       <p:bgPr>
@@ -3465,7 +3474,14 @@
         <p:cNvGrpSpPr/>
         <p:nvPr/>
       </p:nvGrpSpPr>
-      <p:grpSpPr/>
+      <p:grpSpPr>
+        <a:xfrm>
+          <a:off x="0" y="0"/>
+          <a:ext cx="0" cy="0"/>
+          <a:chOff x="0" y="0"/>
+          <a:chExt cx="0" cy="0"/>
+        </a:xfrm>
+      </p:grpSpPr>
       <p:sp>
         <p:nvSpPr>
           <p:cNvPr id="2" name="Rectangle 1"/>
@@ -3506,6 +3522,7 @@
           <a:lstStyle/>
           <a:p>
             <a:pPr algn="ctr"/>
+            <a:endParaRPr/>
           </a:p>
         </p:txBody>
       </p:sp>
@@ -3549,11 +3566,17 @@
           <p:cNvGraphicFramePr>
             <a:graphicFrameLocks noGrp="1"/>
           </p:cNvGraphicFramePr>
-          <p:nvPr/>
+          <p:nvPr>
+            <p:extLst>
+              <p:ext uri="{D42A27DB-BD31-4B8C-83A1-F6EECF244321}">
+                <p14:modId xmlns:p14="http://schemas.microsoft.com/office/powerpoint/2010/main" val="597338681"/>
+              </p:ext>
+            </p:extLst>
+          </p:nvPr>
         </p:nvGraphicFramePr>
         <p:xfrm>
           <a:off x="365760" y="1188720"/>
-          <a:ext cx="11155680" cy="5120640"/>
+          <a:ext cx="11155680" cy="5212080"/>
         </p:xfrm>
         <a:graphic>
           <a:graphicData uri="http://schemas.openxmlformats.org/drawingml/2006/table">
@@ -3562,9 +3585,27 @@
                 <a:tableStyleId>{5C22544A-7EE6-4342-B048-85BDC9FD1C3A}</a:tableStyleId>
               </a:tblPr>
               <a:tblGrid>
-                <a:gridCol w="2560320"/>
-                <a:gridCol w="4023360"/>
-                <a:gridCol w="4572000"/>
+                <a:gridCol w="2560320">
+                  <a:extLst>
+                    <a:ext uri="{9D8B030D-6E8A-4147-A177-3AD203B41FA5}">
+                      <a16:colId xmlns:a16="http://schemas.microsoft.com/office/drawing/2014/main" val="20000"/>
+                    </a:ext>
+                  </a:extLst>
+                </a:gridCol>
+                <a:gridCol w="4023360">
+                  <a:extLst>
+                    <a:ext uri="{9D8B030D-6E8A-4147-A177-3AD203B41FA5}">
+                      <a16:colId xmlns:a16="http://schemas.microsoft.com/office/drawing/2014/main" val="20001"/>
+                    </a:ext>
+                  </a:extLst>
+                </a:gridCol>
+                <a:gridCol w="4572000">
+                  <a:extLst>
+                    <a:ext uri="{9D8B030D-6E8A-4147-A177-3AD203B41FA5}">
+                      <a16:colId xmlns:a16="http://schemas.microsoft.com/office/drawing/2014/main" val="20002"/>
+                    </a:ext>
+                  </a:extLst>
+                </a:gridCol>
               </a:tblGrid>
               <a:tr h="731520">
                 <a:tc>
@@ -3574,7 +3615,7 @@
                     <a:p>
                       <a:pPr algn="ctr"/>
                       <a:r>
-                        <a:rPr b="1" sz="1500">
+                        <a:rPr sz="1800" b="1">
                           <a:solidFill>
                             <a:srgbClr val="FFFBF0"/>
                           </a:solidFill>
@@ -3596,7 +3637,7 @@
                     <a:p>
                       <a:pPr algn="ctr"/>
                       <a:r>
-                        <a:rPr b="1" sz="1500">
+                        <a:rPr sz="1800" b="1" dirty="0">
                           <a:solidFill>
                             <a:srgbClr val="FFFBF0"/>
                           </a:solidFill>
@@ -3618,7 +3659,7 @@
                     <a:p>
                       <a:pPr algn="ctr"/>
                       <a:r>
-                        <a:rPr b="1" sz="1500">
+                        <a:rPr sz="1800" b="1">
                           <a:solidFill>
                             <a:srgbClr val="FFFBF0"/>
                           </a:solidFill>
@@ -3633,6 +3674,11 @@
                     </a:solidFill>
                   </a:tcPr>
                 </a:tc>
+                <a:extLst>
+                  <a:ext uri="{0D108BD9-81ED-4DB2-BD59-A6C34878D82A}">
+                    <a16:rowId xmlns:a16="http://schemas.microsoft.com/office/drawing/2014/main" val="10000"/>
+                  </a:ext>
+                </a:extLst>
               </a:tr>
               <a:tr h="731520">
                 <a:tc>
@@ -3642,7 +3688,7 @@
                     <a:p>
                       <a:pPr algn="l"/>
                       <a:r>
-                        <a:rPr sz="1400">
+                        <a:rPr sz="1800">
                           <a:solidFill>
                             <a:srgbClr val="1A1A1A"/>
                           </a:solidFill>
@@ -3664,12 +3710,16 @@
                     <a:p>
                       <a:pPr algn="l"/>
                       <a:r>
-                        <a:rPr sz="1400">
-                          <a:solidFill>
-                            <a:srgbClr val="1A1A1A"/>
-                          </a:solidFill>
-                        </a:rPr>
-                        <a:t>Omitted — bank/port trading only</a:t>
+                        <a:rPr sz="1600" dirty="0"/>
+                        <a:t>Omitted — strategies trade against bank/port only. Simulate-then-commit pattern: </a:t>
+                      </a:r>
+                      <a:r>
+                        <a:rPr sz="1600" dirty="0" err="1"/>
+                        <a:t>trade_toward</a:t>
+                      </a:r>
+                      <a:r>
+                        <a:rPr sz="1600" dirty="0"/>
+                        <a:t>() simulates the full sequence before committing any single trade. Unified goal order: city → settlement → dev card → road.</a:t>
                       </a:r>
                     </a:p>
                   </a:txBody>
@@ -3686,12 +3736,8 @@
                     <a:p>
                       <a:pPr algn="l"/>
                       <a:r>
-                        <a:rPr sz="1400">
-                          <a:solidFill>
-                            <a:srgbClr val="1A1A1A"/>
-                          </a:solidFill>
-                        </a:rPr>
-                        <a:t>Low: all strategies affected equally</a:t>
+                        <a:rPr sz="1600"/>
+                        <a:t>Low: all strategies use the same trading engine; removes negotiation but preserves resource conversion logic</a:t>
                       </a:r>
                     </a:p>
                   </a:txBody>
@@ -3701,6 +3747,11 @@
                     </a:solidFill>
                   </a:tcPr>
                 </a:tc>
+                <a:extLst>
+                  <a:ext uri="{0D108BD9-81ED-4DB2-BD59-A6C34878D82A}">
+                    <a16:rowId xmlns:a16="http://schemas.microsoft.com/office/drawing/2014/main" val="10001"/>
+                  </a:ext>
+                </a:extLst>
               </a:tr>
               <a:tr h="731520">
                 <a:tc>
@@ -3710,7 +3761,7 @@
                     <a:p>
                       <a:pPr algn="l"/>
                       <a:r>
-                        <a:rPr sz="1400">
+                        <a:rPr sz="1800">
                           <a:solidFill>
                             <a:srgbClr val="1A1A1A"/>
                           </a:solidFill>
@@ -3732,7 +3783,7 @@
                     <a:p>
                       <a:pPr algn="l"/>
                       <a:r>
-                        <a:rPr sz="1400">
+                        <a:rPr sz="1800">
                           <a:solidFill>
                             <a:srgbClr val="1A1A1A"/>
                           </a:solidFill>
@@ -3754,7 +3805,7 @@
                     <a:p>
                       <a:pPr algn="l"/>
                       <a:r>
-                        <a:rPr sz="1400">
+                        <a:rPr sz="1800">
                           <a:solidFill>
                             <a:srgbClr val="1A1A1A"/>
                           </a:solidFill>
@@ -3769,6 +3820,11 @@
                     </a:solidFill>
                   </a:tcPr>
                 </a:tc>
+                <a:extLst>
+                  <a:ext uri="{0D108BD9-81ED-4DB2-BD59-A6C34878D82A}">
+                    <a16:rowId xmlns:a16="http://schemas.microsoft.com/office/drawing/2014/main" val="10002"/>
+                  </a:ext>
+                </a:extLst>
               </a:tr>
               <a:tr h="731520">
                 <a:tc>
@@ -3778,7 +3834,7 @@
                     <a:p>
                       <a:pPr algn="l"/>
                       <a:r>
-                        <a:rPr sz="1400">
+                        <a:rPr sz="1800">
                           <a:solidFill>
                             <a:srgbClr val="1A1A1A"/>
                           </a:solidFill>
@@ -3800,7 +3856,7 @@
                     <a:p>
                       <a:pPr algn="l"/>
                       <a:r>
-                        <a:rPr sz="1400">
+                        <a:rPr sz="1800">
                           <a:solidFill>
                             <a:srgbClr val="1A1A1A"/>
                           </a:solidFill>
@@ -3822,7 +3878,7 @@
                     <a:p>
                       <a:pPr algn="l"/>
                       <a:r>
-                        <a:rPr sz="1400">
+                        <a:rPr sz="1800">
                           <a:solidFill>
                             <a:srgbClr val="1A1A1A"/>
                           </a:solidFill>
@@ -3837,6 +3893,11 @@
                     </a:solidFill>
                   </a:tcPr>
                 </a:tc>
+                <a:extLst>
+                  <a:ext uri="{0D108BD9-81ED-4DB2-BD59-A6C34878D82A}">
+                    <a16:rowId xmlns:a16="http://schemas.microsoft.com/office/drawing/2014/main" val="10003"/>
+                  </a:ext>
+                </a:extLst>
               </a:tr>
               <a:tr h="731520">
                 <a:tc>
@@ -3846,75 +3907,7 @@
                     <a:p>
                       <a:pPr algn="l"/>
                       <a:r>
-                        <a:rPr sz="1400">
-                          <a:solidFill>
-                            <a:srgbClr val="1A1A1A"/>
-                          </a:solidFill>
-                        </a:rPr>
-                        <a:t>Dev card variety</a:t>
-                      </a:r>
-                    </a:p>
-                  </a:txBody>
-                  <a:tcPr>
-                    <a:solidFill>
-                      <a:srgbClr val="E8F0E0"/>
-                    </a:solidFill>
-                  </a:tcPr>
-                </a:tc>
-                <a:tc>
-                  <a:txBody>
-                    <a:bodyPr/>
-                    <a:lstStyle/>
-                    <a:p>
-                      <a:pPr algn="l"/>
-                      <a:r>
-                        <a:rPr sz="1400">
-                          <a:solidFill>
-                            <a:srgbClr val="1A1A1A"/>
-                          </a:solidFill>
-                        </a:rPr>
-                        <a:t>Knights + VP cards; Progress cards stubbed</a:t>
-                      </a:r>
-                    </a:p>
-                  </a:txBody>
-                  <a:tcPr>
-                    <a:solidFill>
-                      <a:srgbClr val="E8F0E0"/>
-                    </a:solidFill>
-                  </a:tcPr>
-                </a:tc>
-                <a:tc>
-                  <a:txBody>
-                    <a:bodyPr/>
-                    <a:lstStyle/>
-                    <a:p>
-                      <a:pPr algn="l"/>
-                      <a:r>
-                        <a:rPr sz="1400">
-                          <a:solidFill>
-                            <a:srgbClr val="1A1A1A"/>
-                          </a:solidFill>
-                        </a:rPr>
-                        <a:t>Minor: removes Road Building / Monopoly edge cases</a:t>
-                      </a:r>
-                    </a:p>
-                  </a:txBody>
-                  <a:tcPr>
-                    <a:solidFill>
-                      <a:srgbClr val="E8F0E0"/>
-                    </a:solidFill>
-                  </a:tcPr>
-                </a:tc>
-              </a:tr>
-              <a:tr h="731520">
-                <a:tc>
-                  <a:txBody>
-                    <a:bodyPr/>
-                    <a:lstStyle/>
-                    <a:p>
-                      <a:pPr algn="l"/>
-                      <a:r>
-                        <a:rPr sz="1400">
+                        <a:rPr sz="1800">
                           <a:solidFill>
                             <a:srgbClr val="1A1A1A"/>
                           </a:solidFill>
@@ -3936,7 +3929,7 @@
                     <a:p>
                       <a:pPr algn="l"/>
                       <a:r>
-                        <a:rPr sz="1400">
+                        <a:rPr sz="1800">
                           <a:solidFill>
                             <a:srgbClr val="1A1A1A"/>
                           </a:solidFill>
@@ -3958,12 +3951,28 @@
                     <a:p>
                       <a:pPr algn="l"/>
                       <a:r>
-                        <a:rPr sz="1400">
+                        <a:rPr sz="1800" dirty="0">
                           <a:solidFill>
                             <a:srgbClr val="1A1A1A"/>
                           </a:solidFill>
                         </a:rPr>
-                        <a:t>Deterministic; slightly penalises front-runners</a:t>
+                        <a:t>Deterministic; slightly </a:t>
+                      </a:r>
+                      <a:r>
+                        <a:rPr sz="1800" dirty="0" err="1">
+                          <a:solidFill>
+                            <a:srgbClr val="1A1A1A"/>
+                          </a:solidFill>
+                        </a:rPr>
+                        <a:t>penalises</a:t>
+                      </a:r>
+                      <a:r>
+                        <a:rPr sz="1800" dirty="0">
+                          <a:solidFill>
+                            <a:srgbClr val="1A1A1A"/>
+                          </a:solidFill>
+                        </a:rPr>
+                        <a:t> front-runners</a:t>
                       </a:r>
                     </a:p>
                   </a:txBody>
@@ -3973,6 +3982,11 @@
                     </a:solidFill>
                   </a:tcPr>
                 </a:tc>
+                <a:extLst>
+                  <a:ext uri="{0D108BD9-81ED-4DB2-BD59-A6C34878D82A}">
+                    <a16:rowId xmlns:a16="http://schemas.microsoft.com/office/drawing/2014/main" val="10005"/>
+                  </a:ext>
+                </a:extLst>
               </a:tr>
               <a:tr h="731520">
                 <a:tc>
@@ -3982,7 +3996,7 @@
                     <a:p>
                       <a:pPr algn="l"/>
                       <a:r>
-                        <a:rPr sz="1400">
+                        <a:rPr sz="1800">
                           <a:solidFill>
                             <a:srgbClr val="1A1A1A"/>
                           </a:solidFill>
@@ -4004,7 +4018,7 @@
                     <a:p>
                       <a:pPr algn="l"/>
                       <a:r>
-                        <a:rPr sz="1400">
+                        <a:rPr sz="1800">
                           <a:solidFill>
                             <a:srgbClr val="1A1A1A"/>
                           </a:solidFill>
@@ -4026,7 +4040,7 @@
                     <a:p>
                       <a:pPr algn="l"/>
                       <a:r>
-                        <a:rPr sz="1400">
+                        <a:rPr sz="1800" dirty="0">
                           <a:solidFill>
                             <a:srgbClr val="1A1A1A"/>
                           </a:solidFill>
@@ -4041,6 +4055,11 @@
                     </a:solidFill>
                   </a:tcPr>
                 </a:tc>
+                <a:extLst>
+                  <a:ext uri="{0D108BD9-81ED-4DB2-BD59-A6C34878D82A}">
+                    <a16:rowId xmlns:a16="http://schemas.microsoft.com/office/drawing/2014/main" val="10006"/>
+                  </a:ext>
+                </a:extLst>
               </a:tr>
             </a:tbl>
           </a:graphicData>
@@ -4055,7 +4074,7 @@
 </file>
 
 <file path=ppt/slides/slide11.xml><?xml version="1.0" encoding="utf-8"?>
-<p:sld xmlns:a="http://schemas.openxmlformats.org/drawingml/2006/main" xmlns:p="http://schemas.openxmlformats.org/presentationml/2006/main" xmlns:r="http://schemas.openxmlformats.org/officeDocument/2006/relationships">
+<p:sld xmlns:a="http://schemas.openxmlformats.org/drawingml/2006/main" xmlns:r="http://schemas.openxmlformats.org/officeDocument/2006/relationships" xmlns:p="http://schemas.openxmlformats.org/presentationml/2006/main">
   <p:cSld>
     <p:bg>
       <p:bgPr>
@@ -4071,7 +4090,14 @@
         <p:cNvGrpSpPr/>
         <p:nvPr/>
       </p:nvGrpSpPr>
-      <p:grpSpPr/>
+      <p:grpSpPr>
+        <a:xfrm>
+          <a:off x="0" y="0"/>
+          <a:ext cx="0" cy="0"/>
+          <a:chOff x="0" y="0"/>
+          <a:chExt cx="0" cy="0"/>
+        </a:xfrm>
+      </p:grpSpPr>
       <p:sp>
         <p:nvSpPr>
           <p:cNvPr id="2" name="Rectangle 1"/>
@@ -4112,6 +4138,7 @@
           <a:lstStyle/>
           <a:p>
             <a:pPr algn="ctr"/>
+            <a:endParaRPr/>
           </a:p>
         </p:txBody>
       </p:sp>
@@ -4191,6 +4218,7 @@
           <a:lstStyle/>
           <a:p>
             <a:pPr algn="ctr"/>
+            <a:endParaRPr/>
           </a:p>
         </p:txBody>
       </p:sp>
@@ -4276,6 +4304,7 @@
           <a:lstStyle/>
           <a:p>
             <a:pPr algn="ctr"/>
+            <a:endParaRPr/>
           </a:p>
         </p:txBody>
       </p:sp>
@@ -4389,6 +4418,7 @@
           <a:lstStyle/>
           <a:p>
             <a:pPr algn="ctr"/>
+            <a:endParaRPr/>
           </a:p>
         </p:txBody>
       </p:sp>
@@ -4503,6 +4533,7 @@
           <a:lstStyle/>
           <a:p>
             <a:pPr algn="ctr"/>
+            <a:endParaRPr/>
           </a:p>
         </p:txBody>
       </p:sp>
@@ -4617,6 +4648,7 @@
           <a:lstStyle/>
           <a:p>
             <a:pPr algn="ctr"/>
+            <a:endParaRPr/>
           </a:p>
         </p:txBody>
       </p:sp>
@@ -4697,7 +4729,512 @@
 </file>
 
 <file path=ppt/slides/slide12.xml><?xml version="1.0" encoding="utf-8"?>
-<p:sld xmlns:a="http://schemas.openxmlformats.org/drawingml/2006/main" xmlns:p="http://schemas.openxmlformats.org/presentationml/2006/main" xmlns:r="http://schemas.openxmlformats.org/officeDocument/2006/relationships">
+<p:sld xmlns:a="http://schemas.openxmlformats.org/drawingml/2006/main" xmlns:r="http://schemas.openxmlformats.org/officeDocument/2006/relationships" xmlns:p="http://schemas.openxmlformats.org/presentationml/2006/main">
+  <p:cSld>
+    <p:spTree>
+      <p:nvGrpSpPr>
+        <p:cNvPr id="1" name=""/>
+        <p:cNvGrpSpPr/>
+        <p:nvPr/>
+      </p:nvGrpSpPr>
+      <p:grpSpPr>
+        <a:xfrm>
+          <a:off x="0" y="0"/>
+          <a:ext cx="0" cy="0"/>
+          <a:chOff x="0" y="0"/>
+          <a:chExt cx="0" cy="0"/>
+        </a:xfrm>
+      </p:grpSpPr>
+      <p:sp>
+        <p:nvSpPr>
+          <p:cNvPr id="4" name="Rectangle 3"/>
+          <p:cNvSpPr/>
+          <p:nvPr/>
+        </p:nvSpPr>
+        <p:spPr>
+          <a:xfrm>
+            <a:off x="274320" y="1143000"/>
+            <a:ext cx="11612880" cy="5394960"/>
+          </a:xfrm>
+          <a:prstGeom prst="rect">
+            <a:avLst/>
+          </a:prstGeom>
+          <a:solidFill>
+            <a:srgbClr val="FFFBF0"/>
+          </a:solidFill>
+          <a:ln w="9525">
+            <a:solidFill>
+              <a:srgbClr val="CCCCBB"/>
+            </a:solidFill>
+          </a:ln>
+        </p:spPr>
+        <p:style>
+          <a:lnRef idx="1">
+            <a:schemeClr val="accent1"/>
+          </a:lnRef>
+          <a:fillRef idx="3">
+            <a:schemeClr val="accent1"/>
+          </a:fillRef>
+          <a:effectRef idx="2">
+            <a:schemeClr val="accent1"/>
+          </a:effectRef>
+          <a:fontRef idx="minor">
+            <a:schemeClr val="lt1"/>
+          </a:fontRef>
+        </p:style>
+        <p:txBody>
+          <a:bodyPr rtlCol="0" anchor="ctr"/>
+          <a:lstStyle/>
+          <a:p>
+            <a:pPr algn="ctr"/>
+            <a:endParaRPr/>
+          </a:p>
+        </p:txBody>
+      </p:sp>
+      <p:sp>
+        <p:nvSpPr>
+          <p:cNvPr id="2" name="Rectangle 1"/>
+          <p:cNvSpPr/>
+          <p:nvPr/>
+        </p:nvSpPr>
+        <p:spPr>
+          <a:xfrm>
+            <a:off x="0" y="0"/>
+            <a:ext cx="12188952" cy="1005840"/>
+          </a:xfrm>
+          <a:prstGeom prst="rect">
+            <a:avLst/>
+          </a:prstGeom>
+          <a:solidFill>
+            <a:srgbClr val="2E7D32"/>
+          </a:solidFill>
+          <a:ln>
+            <a:noFill/>
+          </a:ln>
+        </p:spPr>
+        <p:style>
+          <a:lnRef idx="1">
+            <a:schemeClr val="accent1"/>
+          </a:lnRef>
+          <a:fillRef idx="3">
+            <a:schemeClr val="accent1"/>
+          </a:fillRef>
+          <a:effectRef idx="2">
+            <a:schemeClr val="accent1"/>
+          </a:effectRef>
+          <a:fontRef idx="minor">
+            <a:schemeClr val="lt1"/>
+          </a:fontRef>
+        </p:style>
+        <p:txBody>
+          <a:bodyPr rtlCol="0" anchor="ctr"/>
+          <a:lstStyle/>
+          <a:p>
+            <a:pPr algn="ctr"/>
+            <a:endParaRPr/>
+          </a:p>
+        </p:txBody>
+      </p:sp>
+      <p:sp>
+        <p:nvSpPr>
+          <p:cNvPr id="3" name="TextBox 2"/>
+          <p:cNvSpPr txBox="1"/>
+          <p:nvPr/>
+        </p:nvSpPr>
+        <p:spPr>
+          <a:xfrm>
+            <a:off x="365760" y="109728"/>
+            <a:ext cx="11430000" cy="822960"/>
+          </a:xfrm>
+          <a:prstGeom prst="rect">
+            <a:avLst/>
+          </a:prstGeom>
+          <a:noFill/>
+        </p:spPr>
+        <p:txBody>
+          <a:bodyPr wrap="none">
+            <a:spAutoFit/>
+          </a:bodyPr>
+          <a:lstStyle/>
+          <a:p>
+            <a:r>
+              <a:rPr sz="2800" b="1">
+                <a:solidFill>
+                  <a:srgbClr val="FFFFFF"/>
+                </a:solidFill>
+              </a:rPr>
+              <a:t>A Representative Game: ore_grain Wins (Seed 99)</a:t>
+            </a:r>
+          </a:p>
+        </p:txBody>
+      </p:sp>
+      <p:pic>
+        <p:nvPicPr>
+          <p:cNvPr id="5" name="Picture 4" descr="game_seed_99.png"/>
+          <p:cNvPicPr>
+            <a:picLocks noChangeAspect="1"/>
+          </p:cNvPicPr>
+          <p:nvPr/>
+        </p:nvPicPr>
+        <p:blipFill>
+          <a:blip r:embed="rId2"/>
+          <a:stretch>
+            <a:fillRect/>
+          </a:stretch>
+        </p:blipFill>
+        <p:spPr>
+          <a:xfrm>
+            <a:off x="274320" y="1097280"/>
+            <a:ext cx="8666480" cy="5577840"/>
+          </a:xfrm>
+          <a:prstGeom prst="rect">
+            <a:avLst/>
+          </a:prstGeom>
+        </p:spPr>
+      </p:pic>
+      <p:sp>
+        <p:nvSpPr>
+          <p:cNvPr id="6" name="TextBox 5"/>
+          <p:cNvSpPr txBox="1"/>
+          <p:nvPr/>
+        </p:nvSpPr>
+        <p:spPr>
+          <a:xfrm>
+            <a:off x="8940800" y="1188720"/>
+            <a:ext cx="3037840" cy="4524315"/>
+          </a:xfrm>
+          <a:prstGeom prst="rect">
+            <a:avLst/>
+          </a:prstGeom>
+          <a:noFill/>
+        </p:spPr>
+        <p:txBody>
+          <a:bodyPr wrap="square">
+            <a:spAutoFit/>
+          </a:bodyPr>
+          <a:lstStyle/>
+          <a:p>
+            <a:r>
+              <a:rPr sz="1600" b="1" dirty="0">
+                <a:solidFill>
+                  <a:srgbClr val="1A1A1A"/>
+                </a:solidFill>
+              </a:rPr>
+              <a:t>Winner: </a:t>
+            </a:r>
+            <a:r>
+              <a:rPr sz="1600" b="1" dirty="0" err="1">
+                <a:solidFill>
+                  <a:srgbClr val="1A1A1A"/>
+                </a:solidFill>
+              </a:rPr>
+              <a:t>ore_grain</a:t>
+            </a:r>
+            <a:r>
+              <a:rPr sz="1600" b="1" dirty="0">
+                <a:solidFill>
+                  <a:srgbClr val="1A1A1A"/>
+                </a:solidFill>
+              </a:rPr>
+              <a:t> in 60 turns</a:t>
+            </a:r>
+          </a:p>
+          <a:p>
+            <a:r>
+              <a:rPr sz="1400" b="0" dirty="0">
+                <a:solidFill>
+                  <a:srgbClr val="333333"/>
+                </a:solidFill>
+              </a:rPr>
+              <a:t>Fastest </a:t>
+            </a:r>
+            <a:r>
+              <a:rPr sz="1400" b="0" dirty="0" err="1">
+                <a:solidFill>
+                  <a:srgbClr val="333333"/>
+                </a:solidFill>
+              </a:rPr>
+              <a:t>ore_grain</a:t>
+            </a:r>
+            <a:r>
+              <a:rPr sz="1400" b="0" dirty="0">
+                <a:solidFill>
+                  <a:srgbClr val="333333"/>
+                </a:solidFill>
+              </a:rPr>
+              <a:t> win in our 37-seed sample — a board where ore and grain placement aligned well from the start</a:t>
+            </a:r>
+          </a:p>
+          <a:p>
+            <a:endParaRPr sz="1400" b="0" dirty="0">
+              <a:solidFill>
+                <a:srgbClr val="333333"/>
+              </a:solidFill>
+            </a:endParaRPr>
+          </a:p>
+          <a:p>
+            <a:r>
+              <a:rPr sz="1600" b="1" dirty="0" err="1">
+                <a:solidFill>
+                  <a:srgbClr val="1A1A1A"/>
+                </a:solidFill>
+              </a:rPr>
+              <a:t>ore_grain</a:t>
+            </a:r>
+            <a:r>
+              <a:rPr sz="1600" b="1" dirty="0">
+                <a:solidFill>
+                  <a:srgbClr val="1A1A1A"/>
+                </a:solidFill>
+              </a:rPr>
+              <a:t>: 1 settlement, 3 cities</a:t>
+            </a:r>
+          </a:p>
+          <a:p>
+            <a:r>
+              <a:rPr sz="1400" b="0" dirty="0">
+                <a:solidFill>
+                  <a:srgbClr val="333333"/>
+                </a:solidFill>
+              </a:rPr>
+              <a:t>Cities double ore/grain output, funding further cities — the compounding VP loop playing out at full speed</a:t>
+            </a:r>
+          </a:p>
+          <a:p>
+            <a:endParaRPr sz="1400" b="0" dirty="0">
+              <a:solidFill>
+                <a:srgbClr val="333333"/>
+              </a:solidFill>
+            </a:endParaRPr>
+          </a:p>
+          <a:p>
+            <a:r>
+              <a:rPr sz="1600" b="1" dirty="0">
+                <a:solidFill>
+                  <a:srgbClr val="1A1A1A"/>
+                </a:solidFill>
+              </a:rPr>
+              <a:t>sheep: 3 settlements, 0 cities</a:t>
+            </a:r>
+          </a:p>
+          <a:p>
+            <a:r>
+              <a:rPr sz="1400" b="0" dirty="0">
+                <a:solidFill>
+                  <a:srgbClr val="333333"/>
+                </a:solidFill>
+              </a:rPr>
+              <a:t>Accumulated wool but could not convert it to ore/grain; stuck near starting VP with no upgrade path</a:t>
+            </a:r>
+          </a:p>
+          <a:p>
+            <a:endParaRPr sz="1400" b="0" dirty="0">
+              <a:solidFill>
+                <a:srgbClr val="333333"/>
+              </a:solidFill>
+            </a:endParaRPr>
+          </a:p>
+          <a:p>
+            <a:r>
+              <a:rPr sz="1600" b="1" dirty="0">
+                <a:solidFill>
+                  <a:srgbClr val="1A1A1A"/>
+                </a:solidFill>
+              </a:rPr>
+              <a:t>balanced: 4 settlements, 0 cities</a:t>
+            </a:r>
+          </a:p>
+          <a:p>
+            <a:r>
+              <a:rPr sz="1400" b="0" dirty="0">
+                <a:solidFill>
+                  <a:srgbClr val="333333"/>
+                </a:solidFill>
+              </a:rPr>
+              <a:t>Diversified production but on this board couldn't reach city resources before </a:t>
+            </a:r>
+            <a:r>
+              <a:rPr sz="1400" b="0" dirty="0" err="1">
+                <a:solidFill>
+                  <a:srgbClr val="333333"/>
+                </a:solidFill>
+              </a:rPr>
+              <a:t>ore_grain</a:t>
+            </a:r>
+            <a:r>
+              <a:rPr sz="1400" b="0" dirty="0">
+                <a:solidFill>
+                  <a:srgbClr val="333333"/>
+                </a:solidFill>
+              </a:rPr>
+              <a:t> closed out</a:t>
+            </a:r>
+          </a:p>
+          <a:p>
+            <a:endParaRPr sz="1400" b="0" dirty="0">
+              <a:solidFill>
+                <a:srgbClr val="FF0000"/>
+              </a:solidFill>
+            </a:endParaRPr>
+          </a:p>
+        </p:txBody>
+      </p:sp>
+      <p:sp>
+        <p:nvSpPr>
+          <p:cNvPr id="7" name="Rectangle 6">
+            <a:extLst>
+              <a:ext uri="{FF2B5EF4-FFF2-40B4-BE49-F238E27FC236}">
+                <a16:creationId xmlns:a16="http://schemas.microsoft.com/office/drawing/2014/main" id="{ABDBEB14-6892-A24B-7903-07D07FF14223}"/>
+              </a:ext>
+            </a:extLst>
+          </p:cNvPr>
+          <p:cNvSpPr/>
+          <p:nvPr/>
+        </p:nvSpPr>
+        <p:spPr>
+          <a:xfrm>
+            <a:off x="7122160" y="4937760"/>
+            <a:ext cx="4856480" cy="1737360"/>
+          </a:xfrm>
+          <a:prstGeom prst="rect">
+            <a:avLst/>
+          </a:prstGeom>
+          <a:solidFill>
+            <a:schemeClr val="accent2"/>
+          </a:solidFill>
+        </p:spPr>
+        <p:style>
+          <a:lnRef idx="1">
+            <a:schemeClr val="accent1"/>
+          </a:lnRef>
+          <a:fillRef idx="3">
+            <a:schemeClr val="accent1"/>
+          </a:fillRef>
+          <a:effectRef idx="2">
+            <a:schemeClr val="accent1"/>
+          </a:effectRef>
+          <a:fontRef idx="minor">
+            <a:schemeClr val="lt1"/>
+          </a:fontRef>
+        </p:style>
+        <p:txBody>
+          <a:bodyPr rtlCol="0" anchor="ctr"/>
+          <a:lstStyle/>
+          <a:p>
+            <a:r>
+              <a:rPr lang="en-US" sz="2000" b="1">
+                <a:solidFill>
+                  <a:sysClr val="windowText" lastClr="000000"/>
+                </a:solidFill>
+              </a:rPr>
+              <a:t>Key takeaway</a:t>
+            </a:r>
+          </a:p>
+          <a:p>
+            <a:r>
+              <a:rPr lang="en-US">
+                <a:solidFill>
+                  <a:sysClr val="windowText" lastClr="000000"/>
+                </a:solidFill>
+              </a:rPr>
+              <a:t>When ore_grain secures strong ore/grain placement, it wins decisively. Sheep demonstrates the starvation failure mode regardless of board.</a:t>
+            </a:r>
+            <a:endParaRPr lang="en-US" dirty="0">
+              <a:solidFill>
+                <a:sysClr val="windowText" lastClr="000000"/>
+              </a:solidFill>
+            </a:endParaRPr>
+          </a:p>
+        </p:txBody>
+      </p:sp>
+    </p:spTree>
+  </p:cSld>
+  <p:clrMapOvr>
+    <a:masterClrMapping/>
+  </p:clrMapOvr>
+  <p:timing>
+    <p:tnLst>
+      <p:par>
+        <p:cTn id="1" dur="indefinite" restart="never" nodeType="tmRoot">
+          <p:childTnLst>
+            <p:seq concurrent="1" nextAc="seek">
+              <p:cTn id="2" dur="indefinite" nodeType="mainSeq">
+                <p:childTnLst>
+                  <p:par>
+                    <p:cTn id="3" fill="hold">
+                      <p:stCondLst>
+                        <p:cond delay="indefinite"/>
+                      </p:stCondLst>
+                      <p:childTnLst>
+                        <p:par>
+                          <p:cTn id="4" fill="hold">
+                            <p:stCondLst>
+                              <p:cond delay="0"/>
+                            </p:stCondLst>
+                            <p:childTnLst>
+                              <p:par>
+                                <p:cTn id="5" presetID="1" presetClass="entr" presetSubtype="0" fill="hold" grpId="0" nodeType="clickEffect">
+                                  <p:stCondLst>
+                                    <p:cond delay="0"/>
+                                  </p:stCondLst>
+                                  <p:childTnLst>
+                                    <p:set>
+                                      <p:cBhvr>
+                                        <p:cTn id="6" dur="1" fill="hold">
+                                          <p:stCondLst>
+                                            <p:cond delay="0"/>
+                                          </p:stCondLst>
+                                        </p:cTn>
+                                        <p:tgtEl>
+                                          <p:spTgt spid="7"/>
+                                        </p:tgtEl>
+                                        <p:attrNameLst>
+                                          <p:attrName>style.visibility</p:attrName>
+                                        </p:attrNameLst>
+                                      </p:cBhvr>
+                                      <p:to>
+                                        <p:strVal val="visible"/>
+                                      </p:to>
+                                    </p:set>
+                                  </p:childTnLst>
+                                </p:cTn>
+                              </p:par>
+                            </p:childTnLst>
+                          </p:cTn>
+                        </p:par>
+                      </p:childTnLst>
+                    </p:cTn>
+                  </p:par>
+                </p:childTnLst>
+              </p:cTn>
+              <p:prevCondLst>
+                <p:cond evt="onPrev" delay="0">
+                  <p:tgtEl>
+                    <p:sldTgt/>
+                  </p:tgtEl>
+                </p:cond>
+              </p:prevCondLst>
+              <p:nextCondLst>
+                <p:cond evt="onNext" delay="0">
+                  <p:tgtEl>
+                    <p:sldTgt/>
+                  </p:tgtEl>
+                </p:cond>
+              </p:nextCondLst>
+            </p:seq>
+          </p:childTnLst>
+        </p:cTn>
+      </p:par>
+    </p:tnLst>
+    <p:bldLst>
+      <p:bldP spid="7" grpId="0" animBg="1"/>
+    </p:bldLst>
+  </p:timing>
+</p:sld>
+</file>
+
+<file path=ppt/slides/slide13.xml><?xml version="1.0" encoding="utf-8"?>
+<p:sld xmlns:a="http://schemas.openxmlformats.org/drawingml/2006/main" xmlns:r="http://schemas.openxmlformats.org/officeDocument/2006/relationships" xmlns:p="http://schemas.openxmlformats.org/presentationml/2006/main">
   <p:cSld>
     <p:bg>
       <p:bgPr>
@@ -4713,7 +5250,14 @@
         <p:cNvGrpSpPr/>
         <p:nvPr/>
       </p:nvGrpSpPr>
-      <p:grpSpPr/>
+      <p:grpSpPr>
+        <a:xfrm>
+          <a:off x="0" y="0"/>
+          <a:ext cx="0" cy="0"/>
+          <a:chOff x="0" y="0"/>
+          <a:chExt cx="0" cy="0"/>
+        </a:xfrm>
+      </p:grpSpPr>
       <p:sp>
         <p:nvSpPr>
           <p:cNvPr id="2" name="Rectangle 1"/>
@@ -4754,6 +5298,7 @@
           <a:lstStyle/>
           <a:p>
             <a:pPr algn="ctr"/>
+            <a:endParaRPr/>
           </a:p>
         </p:txBody>
       </p:sp>
@@ -4833,77 +5378,34 @@
           <a:lstStyle/>
           <a:p>
             <a:pPr algn="ctr"/>
-          </a:p>
-        </p:txBody>
-      </p:sp>
-      <p:sp>
-        <p:nvSpPr>
-          <p:cNvPr id="5" name="TextBox 4"/>
-          <p:cNvSpPr txBox="1"/>
+            <a:endParaRPr/>
+          </a:p>
+        </p:txBody>
+      </p:sp>
+      <p:pic>
+        <p:nvPicPr>
+          <p:cNvPr id="5" name="Picture 4" descr="image.png"/>
+          <p:cNvPicPr>
+            <a:picLocks noChangeAspect="1"/>
+          </p:cNvPicPr>
           <p:nvPr/>
-        </p:nvSpPr>
-        <p:spPr>
-          <a:xfrm>
-            <a:off x="457200" y="3200400"/>
-            <a:ext cx="11247120" cy="731520"/>
+        </p:nvPicPr>
+        <p:blipFill>
+          <a:blip r:embed="rId2"/>
+          <a:stretch>
+            <a:fillRect/>
+          </a:stretch>
+        </p:blipFill>
+        <p:spPr>
+          <a:xfrm>
+            <a:off x="2326640" y="1143000"/>
+            <a:ext cx="7508240" cy="5029200"/>
           </a:xfrm>
           <a:prstGeom prst="rect">
             <a:avLst/>
           </a:prstGeom>
-          <a:noFill/>
-        </p:spPr>
-        <p:txBody>
-          <a:bodyPr wrap="square">
-            <a:spAutoFit/>
-          </a:bodyPr>
-          <a:lstStyle/>
-          <a:p>
-            <a:pPr algn="ctr"/>
-            <a:r>
-              <a:rPr sz="2200" b="1" i="0">
-                <a:solidFill>
-                  <a:srgbClr val="2E7D32"/>
-                </a:solidFill>
-              </a:rPr>
-              <a:t>[ Bar chart: win rate per strategy with 95% confidence intervals ]</a:t>
-            </a:r>
-          </a:p>
-        </p:txBody>
-      </p:sp>
-      <p:sp>
-        <p:nvSpPr>
-          <p:cNvPr id="6" name="TextBox 5"/>
-          <p:cNvSpPr txBox="1"/>
-          <p:nvPr/>
-        </p:nvSpPr>
-        <p:spPr>
-          <a:xfrm>
-            <a:off x="457200" y="4023360"/>
-            <a:ext cx="11247120" cy="548640"/>
-          </a:xfrm>
-          <a:prstGeom prst="rect">
-            <a:avLst/>
-          </a:prstGeom>
-          <a:noFill/>
-        </p:spPr>
-        <p:txBody>
-          <a:bodyPr wrap="square">
-            <a:spAutoFit/>
-          </a:bodyPr>
-          <a:lstStyle/>
-          <a:p>
-            <a:pPr algn="ctr"/>
-            <a:r>
-              <a:rPr sz="1500" b="0" i="1">
-                <a:solidFill>
-                  <a:srgbClr val="555555"/>
-                </a:solidFill>
-              </a:rPr>
-              <a:t>Source: results/simulation_results.csv  ·  n = 1,000 games  ·  seed = 42</a:t>
-            </a:r>
-          </a:p>
-        </p:txBody>
-      </p:sp>
+        </p:spPr>
+      </p:pic>
     </p:spTree>
   </p:cSld>
   <p:clrMapOvr>
@@ -4912,8 +5414,8 @@
 </p:sld>
 </file>
 
-<file path=ppt/slides/slide13.xml><?xml version="1.0" encoding="utf-8"?>
-<p:sld xmlns:a="http://schemas.openxmlformats.org/drawingml/2006/main" xmlns:p="http://schemas.openxmlformats.org/presentationml/2006/main" xmlns:r="http://schemas.openxmlformats.org/officeDocument/2006/relationships">
+<file path=ppt/slides/slide14.xml><?xml version="1.0" encoding="utf-8"?>
+<p:sld xmlns:a="http://schemas.openxmlformats.org/drawingml/2006/main" xmlns:r="http://schemas.openxmlformats.org/officeDocument/2006/relationships" xmlns:p="http://schemas.openxmlformats.org/presentationml/2006/main">
   <p:cSld>
     <p:bg>
       <p:bgPr>
@@ -4929,7 +5431,14 @@
         <p:cNvGrpSpPr/>
         <p:nvPr/>
       </p:nvGrpSpPr>
-      <p:grpSpPr/>
+      <p:grpSpPr>
+        <a:xfrm>
+          <a:off x="0" y="0"/>
+          <a:ext cx="0" cy="0"/>
+          <a:chOff x="0" y="0"/>
+          <a:chExt cx="0" cy="0"/>
+        </a:xfrm>
+      </p:grpSpPr>
       <p:sp>
         <p:nvSpPr>
           <p:cNvPr id="2" name="Rectangle 1"/>
@@ -4970,6 +5479,7 @@
           <a:lstStyle/>
           <a:p>
             <a:pPr algn="ctr"/>
+            <a:endParaRPr/>
           </a:p>
         </p:txBody>
       </p:sp>
@@ -5049,77 +5559,34 @@
           <a:lstStyle/>
           <a:p>
             <a:pPr algn="ctr"/>
-          </a:p>
-        </p:txBody>
-      </p:sp>
-      <p:sp>
-        <p:nvSpPr>
-          <p:cNvPr id="5" name="TextBox 4"/>
-          <p:cNvSpPr txBox="1"/>
+            <a:endParaRPr/>
+          </a:p>
+        </p:txBody>
+      </p:sp>
+      <p:pic>
+        <p:nvPicPr>
+          <p:cNvPr id="5" name="Picture 4" descr="image.png"/>
+          <p:cNvPicPr>
+            <a:picLocks noChangeAspect="1"/>
+          </p:cNvPicPr>
           <p:nvPr/>
-        </p:nvSpPr>
-        <p:spPr>
-          <a:xfrm>
-            <a:off x="457200" y="3200400"/>
-            <a:ext cx="11247120" cy="731520"/>
+        </p:nvPicPr>
+        <p:blipFill>
+          <a:blip r:embed="rId2"/>
+          <a:stretch>
+            <a:fillRect/>
+          </a:stretch>
+        </p:blipFill>
+        <p:spPr>
+          <a:xfrm>
+            <a:off x="2446972" y="1143000"/>
+            <a:ext cx="7294880" cy="5029200"/>
           </a:xfrm>
           <a:prstGeom prst="rect">
             <a:avLst/>
           </a:prstGeom>
-          <a:noFill/>
-        </p:spPr>
-        <p:txBody>
-          <a:bodyPr wrap="square">
-            <a:spAutoFit/>
-          </a:bodyPr>
-          <a:lstStyle/>
-          <a:p>
-            <a:pPr algn="ctr"/>
-            <a:r>
-              <a:rPr sz="2200" b="1" i="0">
-                <a:solidFill>
-                  <a:srgbClr val="2E7D32"/>
-                </a:solidFill>
-              </a:rPr>
-              <a:t>[ Violin / boxplot: final VP per strategy across all games ]</a:t>
-            </a:r>
-          </a:p>
-        </p:txBody>
-      </p:sp>
-      <p:sp>
-        <p:nvSpPr>
-          <p:cNvPr id="6" name="TextBox 5"/>
-          <p:cNvSpPr txBox="1"/>
-          <p:nvPr/>
-        </p:nvSpPr>
-        <p:spPr>
-          <a:xfrm>
-            <a:off x="457200" y="4023360"/>
-            <a:ext cx="11247120" cy="548640"/>
-          </a:xfrm>
-          <a:prstGeom prst="rect">
-            <a:avLst/>
-          </a:prstGeom>
-          <a:noFill/>
-        </p:spPr>
-        <p:txBody>
-          <a:bodyPr wrap="square">
-            <a:spAutoFit/>
-          </a:bodyPr>
-          <a:lstStyle/>
-          <a:p>
-            <a:pPr algn="ctr"/>
-            <a:r>
-              <a:rPr sz="1500" b="0" i="1">
-                <a:solidFill>
-                  <a:srgbClr val="555555"/>
-                </a:solidFill>
-              </a:rPr>
-              <a:t>Source: results/simulation_results.csv  ·  n = 1,000 games  ·  seed = 42</a:t>
-            </a:r>
-          </a:p>
-        </p:txBody>
-      </p:sp>
+        </p:spPr>
+      </p:pic>
     </p:spTree>
   </p:cSld>
   <p:clrMapOvr>
@@ -5128,8 +5595,352 @@
 </p:sld>
 </file>
 
-<file path=ppt/slides/slide14.xml><?xml version="1.0" encoding="utf-8"?>
-<p:sld xmlns:a="http://schemas.openxmlformats.org/drawingml/2006/main" xmlns:p="http://schemas.openxmlformats.org/presentationml/2006/main" xmlns:r="http://schemas.openxmlformats.org/officeDocument/2006/relationships">
+<file path=ppt/slides/slide15.xml><?xml version="1.0" encoding="utf-8"?>
+<p:sld xmlns:a="http://schemas.openxmlformats.org/drawingml/2006/main" xmlns:r="http://schemas.openxmlformats.org/officeDocument/2006/relationships" xmlns:p="http://schemas.openxmlformats.org/presentationml/2006/main">
+  <p:cSld>
+    <p:spTree>
+      <p:nvGrpSpPr>
+        <p:cNvPr id="1" name=""/>
+        <p:cNvGrpSpPr/>
+        <p:nvPr/>
+      </p:nvGrpSpPr>
+      <p:grpSpPr>
+        <a:xfrm>
+          <a:off x="0" y="0"/>
+          <a:ext cx="0" cy="0"/>
+          <a:chOff x="0" y="0"/>
+          <a:chExt cx="0" cy="0"/>
+        </a:xfrm>
+      </p:grpSpPr>
+      <p:sp>
+        <p:nvSpPr>
+          <p:cNvPr id="2" name="Rectangle 1"/>
+          <p:cNvSpPr/>
+          <p:nvPr/>
+        </p:nvSpPr>
+        <p:spPr>
+          <a:xfrm>
+            <a:off x="0" y="0"/>
+            <a:ext cx="12188952" cy="1005840"/>
+          </a:xfrm>
+          <a:prstGeom prst="rect">
+            <a:avLst/>
+          </a:prstGeom>
+          <a:solidFill>
+            <a:srgbClr val="2E7D32"/>
+          </a:solidFill>
+          <a:ln>
+            <a:noFill/>
+          </a:ln>
+        </p:spPr>
+        <p:style>
+          <a:lnRef idx="1">
+            <a:schemeClr val="accent1"/>
+          </a:lnRef>
+          <a:fillRef idx="3">
+            <a:schemeClr val="accent1"/>
+          </a:fillRef>
+          <a:effectRef idx="2">
+            <a:schemeClr val="accent1"/>
+          </a:effectRef>
+          <a:fontRef idx="minor">
+            <a:schemeClr val="lt1"/>
+          </a:fontRef>
+        </p:style>
+        <p:txBody>
+          <a:bodyPr rtlCol="0" anchor="ctr"/>
+          <a:lstStyle/>
+          <a:p>
+            <a:pPr algn="ctr"/>
+            <a:endParaRPr/>
+          </a:p>
+        </p:txBody>
+      </p:sp>
+      <p:sp>
+        <p:nvSpPr>
+          <p:cNvPr id="4" name="Rectangle 3"/>
+          <p:cNvSpPr/>
+          <p:nvPr/>
+        </p:nvSpPr>
+        <p:spPr>
+          <a:xfrm>
+            <a:off x="274320" y="1143000"/>
+            <a:ext cx="11612880" cy="5394960"/>
+          </a:xfrm>
+          <a:prstGeom prst="rect">
+            <a:avLst/>
+          </a:prstGeom>
+          <a:solidFill>
+            <a:srgbClr val="FFFBF0"/>
+          </a:solidFill>
+          <a:ln w="9525">
+            <a:solidFill>
+              <a:srgbClr val="CCCCBB"/>
+            </a:solidFill>
+          </a:ln>
+        </p:spPr>
+        <p:style>
+          <a:lnRef idx="1">
+            <a:schemeClr val="accent1"/>
+          </a:lnRef>
+          <a:fillRef idx="3">
+            <a:schemeClr val="accent1"/>
+          </a:fillRef>
+          <a:effectRef idx="2">
+            <a:schemeClr val="accent1"/>
+          </a:effectRef>
+          <a:fontRef idx="minor">
+            <a:schemeClr val="lt1"/>
+          </a:fontRef>
+        </p:style>
+        <p:txBody>
+          <a:bodyPr rtlCol="0" anchor="ctr"/>
+          <a:lstStyle/>
+          <a:p>
+            <a:pPr algn="ctr"/>
+            <a:endParaRPr/>
+          </a:p>
+        </p:txBody>
+      </p:sp>
+      <p:sp>
+        <p:nvSpPr>
+          <p:cNvPr id="5" name="TextBox 4"/>
+          <p:cNvSpPr txBox="1"/>
+          <p:nvPr/>
+        </p:nvSpPr>
+        <p:spPr>
+          <a:xfrm>
+            <a:off x="365760" y="109728"/>
+            <a:ext cx="11430000" cy="822960"/>
+          </a:xfrm>
+          <a:prstGeom prst="rect">
+            <a:avLst/>
+          </a:prstGeom>
+          <a:noFill/>
+        </p:spPr>
+        <p:txBody>
+          <a:bodyPr wrap="none">
+            <a:spAutoFit/>
+          </a:bodyPr>
+          <a:lstStyle/>
+          <a:p>
+            <a:r>
+              <a:rPr sz="2800" b="1">
+                <a:solidFill>
+                  <a:srgbClr val="FFFFFF"/>
+                </a:solidFill>
+              </a:rPr>
+              <a:t>Results: VP Breakdown by Strategy</a:t>
+            </a:r>
+          </a:p>
+        </p:txBody>
+      </p:sp>
+      <p:pic>
+        <p:nvPicPr>
+          <p:cNvPr id="6" name="Picture 5" descr="image.png"/>
+          <p:cNvPicPr>
+            <a:picLocks noChangeAspect="1"/>
+          </p:cNvPicPr>
+          <p:nvPr/>
+        </p:nvPicPr>
+        <p:blipFill>
+          <a:blip r:embed="rId2"/>
+          <a:stretch>
+            <a:fillRect/>
+          </a:stretch>
+        </p:blipFill>
+        <p:spPr>
+          <a:xfrm>
+            <a:off x="2133600" y="1325880"/>
+            <a:ext cx="7894320" cy="5029200"/>
+          </a:xfrm>
+          <a:prstGeom prst="rect">
+            <a:avLst/>
+          </a:prstGeom>
+        </p:spPr>
+      </p:pic>
+    </p:spTree>
+  </p:cSld>
+  <p:clrMapOvr>
+    <a:masterClrMapping/>
+  </p:clrMapOvr>
+</p:sld>
+</file>
+
+<file path=ppt/slides/slide16.xml><?xml version="1.0" encoding="utf-8"?>
+<p:sld xmlns:a="http://schemas.openxmlformats.org/drawingml/2006/main" xmlns:r="http://schemas.openxmlformats.org/officeDocument/2006/relationships" xmlns:p="http://schemas.openxmlformats.org/presentationml/2006/main">
+  <p:cSld>
+    <p:spTree>
+      <p:nvGrpSpPr>
+        <p:cNvPr id="1" name=""/>
+        <p:cNvGrpSpPr/>
+        <p:nvPr/>
+      </p:nvGrpSpPr>
+      <p:grpSpPr>
+        <a:xfrm>
+          <a:off x="0" y="0"/>
+          <a:ext cx="0" cy="0"/>
+          <a:chOff x="0" y="0"/>
+          <a:chExt cx="0" cy="0"/>
+        </a:xfrm>
+      </p:grpSpPr>
+      <p:sp>
+        <p:nvSpPr>
+          <p:cNvPr id="2" name="Rectangle 1"/>
+          <p:cNvSpPr/>
+          <p:nvPr/>
+        </p:nvSpPr>
+        <p:spPr>
+          <a:xfrm>
+            <a:off x="0" y="0"/>
+            <a:ext cx="12188952" cy="1005840"/>
+          </a:xfrm>
+          <a:prstGeom prst="rect">
+            <a:avLst/>
+          </a:prstGeom>
+          <a:solidFill>
+            <a:srgbClr val="2E7D32"/>
+          </a:solidFill>
+          <a:ln>
+            <a:noFill/>
+          </a:ln>
+        </p:spPr>
+        <p:style>
+          <a:lnRef idx="1">
+            <a:schemeClr val="accent1"/>
+          </a:lnRef>
+          <a:fillRef idx="3">
+            <a:schemeClr val="accent1"/>
+          </a:fillRef>
+          <a:effectRef idx="2">
+            <a:schemeClr val="accent1"/>
+          </a:effectRef>
+          <a:fontRef idx="minor">
+            <a:schemeClr val="lt1"/>
+          </a:fontRef>
+        </p:style>
+        <p:txBody>
+          <a:bodyPr rtlCol="0" anchor="ctr"/>
+          <a:lstStyle/>
+          <a:p>
+            <a:pPr algn="ctr"/>
+            <a:endParaRPr/>
+          </a:p>
+        </p:txBody>
+      </p:sp>
+      <p:sp>
+        <p:nvSpPr>
+          <p:cNvPr id="4" name="Rectangle 3"/>
+          <p:cNvSpPr/>
+          <p:nvPr/>
+        </p:nvSpPr>
+        <p:spPr>
+          <a:xfrm>
+            <a:off x="274320" y="1143000"/>
+            <a:ext cx="11612880" cy="5394960"/>
+          </a:xfrm>
+          <a:prstGeom prst="rect">
+            <a:avLst/>
+          </a:prstGeom>
+          <a:solidFill>
+            <a:srgbClr val="FFFBF0"/>
+          </a:solidFill>
+          <a:ln w="9525">
+            <a:solidFill>
+              <a:srgbClr val="CCCCBB"/>
+            </a:solidFill>
+          </a:ln>
+        </p:spPr>
+        <p:style>
+          <a:lnRef idx="1">
+            <a:schemeClr val="accent1"/>
+          </a:lnRef>
+          <a:fillRef idx="3">
+            <a:schemeClr val="accent1"/>
+          </a:fillRef>
+          <a:effectRef idx="2">
+            <a:schemeClr val="accent1"/>
+          </a:effectRef>
+          <a:fontRef idx="minor">
+            <a:schemeClr val="lt1"/>
+          </a:fontRef>
+        </p:style>
+        <p:txBody>
+          <a:bodyPr rtlCol="0" anchor="ctr"/>
+          <a:lstStyle/>
+          <a:p>
+            <a:pPr algn="ctr"/>
+            <a:endParaRPr/>
+          </a:p>
+        </p:txBody>
+      </p:sp>
+      <p:sp>
+        <p:nvSpPr>
+          <p:cNvPr id="5" name="TextBox 4"/>
+          <p:cNvSpPr txBox="1"/>
+          <p:nvPr/>
+        </p:nvSpPr>
+        <p:spPr>
+          <a:xfrm>
+            <a:off x="365760" y="109728"/>
+            <a:ext cx="11430000" cy="822960"/>
+          </a:xfrm>
+          <a:prstGeom prst="rect">
+            <a:avLst/>
+          </a:prstGeom>
+          <a:noFill/>
+        </p:spPr>
+        <p:txBody>
+          <a:bodyPr wrap="none">
+            <a:spAutoFit/>
+          </a:bodyPr>
+          <a:lstStyle/>
+          <a:p>
+            <a:r>
+              <a:rPr sz="2800" b="1">
+                <a:solidFill>
+                  <a:srgbClr val="FFFFFF"/>
+                </a:solidFill>
+              </a:rPr>
+              <a:t>Results: Game Length Distribution</a:t>
+            </a:r>
+          </a:p>
+        </p:txBody>
+      </p:sp>
+      <p:pic>
+        <p:nvPicPr>
+          <p:cNvPr id="6" name="Picture 5" descr="image.png"/>
+          <p:cNvPicPr>
+            <a:picLocks noChangeAspect="1"/>
+          </p:cNvPicPr>
+          <p:nvPr/>
+        </p:nvPicPr>
+        <p:blipFill>
+          <a:blip r:embed="rId2"/>
+          <a:stretch>
+            <a:fillRect/>
+          </a:stretch>
+        </p:blipFill>
+        <p:spPr>
+          <a:xfrm>
+            <a:off x="1965960" y="1295400"/>
+            <a:ext cx="8229600" cy="5029200"/>
+          </a:xfrm>
+          <a:prstGeom prst="rect">
+            <a:avLst/>
+          </a:prstGeom>
+        </p:spPr>
+      </p:pic>
+    </p:spTree>
+  </p:cSld>
+  <p:clrMapOvr>
+    <a:masterClrMapping/>
+  </p:clrMapOvr>
+</p:sld>
+</file>
+
+<file path=ppt/slides/slide17.xml><?xml version="1.0" encoding="utf-8"?>
+<p:sld xmlns:a="http://schemas.openxmlformats.org/drawingml/2006/main" xmlns:r="http://schemas.openxmlformats.org/officeDocument/2006/relationships" xmlns:p="http://schemas.openxmlformats.org/presentationml/2006/main">
   <p:cSld>
     <p:bg>
       <p:bgPr>
@@ -5145,7 +5956,14 @@
         <p:cNvGrpSpPr/>
         <p:nvPr/>
       </p:nvGrpSpPr>
-      <p:grpSpPr/>
+      <p:grpSpPr>
+        <a:xfrm>
+          <a:off x="0" y="0"/>
+          <a:ext cx="0" cy="0"/>
+          <a:chOff x="0" y="0"/>
+          <a:chExt cx="0" cy="0"/>
+        </a:xfrm>
+      </p:grpSpPr>
       <p:sp>
         <p:nvSpPr>
           <p:cNvPr id="2" name="Rectangle 1"/>
@@ -5186,6 +6004,7 @@
           <a:lstStyle/>
           <a:p>
             <a:pPr algn="ctr"/>
+            <a:endParaRPr/>
           </a:p>
         </p:txBody>
       </p:sp>
@@ -5265,6 +6084,7 @@
           <a:lstStyle/>
           <a:p>
             <a:pPr algn="ctr"/>
+            <a:endParaRPr/>
           </a:p>
         </p:txBody>
       </p:sp>
@@ -5276,8 +6096,8 @@
         </p:nvSpPr>
         <p:spPr>
           <a:xfrm>
-            <a:off x="457200" y="3200400"/>
-            <a:ext cx="11247120" cy="731520"/>
+            <a:off x="640080" y="1280160"/>
+            <a:ext cx="10881360" cy="4846320"/>
           </a:xfrm>
           <a:prstGeom prst="rect">
             <a:avLst/>
@@ -5290,48 +6110,144 @@
           </a:bodyPr>
           <a:lstStyle/>
           <a:p>
-            <a:pPr algn="ctr"/>
-            <a:r>
-              <a:rPr sz="2200" b="1" i="0">
-                <a:solidFill>
-                  <a:srgbClr val="2E7D32"/>
-                </a:solidFill>
-              </a:rPr>
-              <a:t>[ χ² test output: observed vs. expected win counts, p-value, conclusion ]</a:t>
-            </a:r>
-          </a:p>
-        </p:txBody>
-      </p:sp>
-      <p:sp>
-        <p:nvSpPr>
-          <p:cNvPr id="6" name="TextBox 5"/>
-          <p:cNvSpPr txBox="1"/>
-          <p:nvPr/>
-        </p:nvSpPr>
-        <p:spPr>
-          <a:xfrm>
-            <a:off x="457200" y="4023360"/>
-            <a:ext cx="11247120" cy="548640"/>
-          </a:xfrm>
-          <a:prstGeom prst="rect">
-            <a:avLst/>
-          </a:prstGeom>
-          <a:noFill/>
-        </p:spPr>
-        <p:txBody>
-          <a:bodyPr wrap="square">
-            <a:spAutoFit/>
-          </a:bodyPr>
-          <a:lstStyle/>
-          <a:p>
-            <a:pPr algn="ctr"/>
-            <a:r>
-              <a:rPr sz="1500" b="0" i="1">
-                <a:solidFill>
-                  <a:srgbClr val="555555"/>
-                </a:solidFill>
-              </a:rPr>
-              <a:t>Success criterion: p &lt; 0.05  ·  null hypothesis: all strategies win equally often</a:t>
+            <a:r>
+              <a:rPr sz="2200" b="1">
+                <a:solidFill>
+                  <a:srgbClr val="1A1A1A"/>
+                </a:solidFill>
+              </a:rPr>
+              <a:t>Hypothesis</a:t>
+            </a:r>
+          </a:p>
+          <a:p>
+            <a:r>
+              <a:rPr sz="1400" b="0">
+                <a:solidFill>
+                  <a:srgbClr val="333333"/>
+                </a:solidFill>
+              </a:rPr>
+              <a:t>H₀: all three strategies win equally often  (expected 333 wins each out of 1,000 games)</a:t>
+            </a:r>
+          </a:p>
+          <a:p>
+            <a:r>
+              <a:rPr sz="1400" b="0">
+                <a:solidFill>
+                  <a:srgbClr val="333333"/>
+                </a:solidFill>
+              </a:rPr>
+              <a:t>H₁: win rates differ significantly across strategies</a:t>
+            </a:r>
+          </a:p>
+          <a:p>
+            <a:endParaRPr sz="1400" b="0">
+              <a:solidFill>
+                <a:srgbClr val="333333"/>
+              </a:solidFill>
+            </a:endParaRPr>
+          </a:p>
+          <a:p>
+            <a:r>
+              <a:rPr sz="2200" b="1">
+                <a:solidFill>
+                  <a:srgbClr val="1A1A1A"/>
+                </a:solidFill>
+              </a:rPr>
+              <a:t>Observed Results</a:t>
+            </a:r>
+          </a:p>
+          <a:p>
+            <a:r>
+              <a:rPr sz="1400" b="0">
+                <a:solidFill>
+                  <a:srgbClr val="333333"/>
+                </a:solidFill>
+              </a:rPr>
+              <a:t>ore_grain   491 / 1,000   (49.1%)   95% CI [46.0%, 52.2%]</a:t>
+            </a:r>
+          </a:p>
+          <a:p>
+            <a:r>
+              <a:rPr sz="1400" b="0">
+                <a:solidFill>
+                  <a:srgbClr val="333333"/>
+                </a:solidFill>
+              </a:rPr>
+              <a:t>balanced    390 / 1,000   (39.0%)   95% CI [36.0%, 42.1%]</a:t>
+            </a:r>
+          </a:p>
+          <a:p>
+            <a:r>
+              <a:rPr sz="1400" b="0">
+                <a:solidFill>
+                  <a:srgbClr val="333333"/>
+                </a:solidFill>
+              </a:rPr>
+              <a:t>sheep       119 / 1,000   (11.9%)   95% CI [10.0%, 14.1%]</a:t>
+            </a:r>
+          </a:p>
+          <a:p>
+            <a:endParaRPr sz="1400" b="0">
+              <a:solidFill>
+                <a:srgbClr val="333333"/>
+              </a:solidFill>
+            </a:endParaRPr>
+          </a:p>
+          <a:p>
+            <a:r>
+              <a:rPr sz="2200" b="1">
+                <a:solidFill>
+                  <a:srgbClr val="1A1A1A"/>
+                </a:solidFill>
+              </a:rPr>
+              <a:t>Chi-Squared Test</a:t>
+            </a:r>
+          </a:p>
+          <a:p>
+            <a:r>
+              <a:rPr sz="1400" b="0">
+                <a:solidFill>
+                  <a:srgbClr val="333333"/>
+                </a:solidFill>
+              </a:rPr>
+              <a:t>χ² = 222.03     df = 2     p-value &lt; 1 × 10⁻¹⁰</a:t>
+            </a:r>
+          </a:p>
+          <a:p>
+            <a:endParaRPr sz="1400" b="0">
+              <a:solidFill>
+                <a:srgbClr val="333333"/>
+              </a:solidFill>
+            </a:endParaRPr>
+          </a:p>
+          <a:p>
+            <a:r>
+              <a:rPr sz="1800" b="1">
+                <a:solidFill>
+                  <a:srgbClr val="1A7A1A"/>
+                </a:solidFill>
+              </a:rPr>
+              <a:t>✔  Reject H₀ at p &lt; 0.05  —  win rates differ significantly</a:t>
+            </a:r>
+          </a:p>
+          <a:p>
+            <a:r>
+              <a:rPr sz="1400" b="0">
+                <a:solidFill>
+                  <a:srgbClr val="333333"/>
+                </a:solidFill>
+              </a:rPr>
+              <a:t>Sheep wins significantly less than both balanced and ore_grain</a:t>
+            </a:r>
+          </a:p>
+          <a:p>
+            <a:r>
+              <a:rPr sz="1400" b="0">
+                <a:solidFill>
+                  <a:srgbClr val="333333"/>
+                </a:solidFill>
+              </a:rPr>
+              <a:t>ore_grain outperforms balanced by ~10 percentage points</a:t>
             </a:r>
           </a:p>
         </p:txBody>
@@ -5344,8 +6260,8 @@
 </p:sld>
 </file>
 
-<file path=ppt/slides/slide15.xml><?xml version="1.0" encoding="utf-8"?>
-<p:sld xmlns:a="http://schemas.openxmlformats.org/drawingml/2006/main" xmlns:p="http://schemas.openxmlformats.org/presentationml/2006/main" xmlns:r="http://schemas.openxmlformats.org/officeDocument/2006/relationships">
+<file path=ppt/slides/slide18.xml><?xml version="1.0" encoding="utf-8"?>
+<p:sld xmlns:a="http://schemas.openxmlformats.org/drawingml/2006/main" xmlns:r="http://schemas.openxmlformats.org/officeDocument/2006/relationships" xmlns:p="http://schemas.openxmlformats.org/presentationml/2006/main">
   <p:cSld>
     <p:bg>
       <p:bgPr>
@@ -5361,7 +6277,14 @@
         <p:cNvGrpSpPr/>
         <p:nvPr/>
       </p:nvGrpSpPr>
-      <p:grpSpPr/>
+      <p:grpSpPr>
+        <a:xfrm>
+          <a:off x="0" y="0"/>
+          <a:ext cx="0" cy="0"/>
+          <a:chOff x="0" y="0"/>
+          <a:chExt cx="0" cy="0"/>
+        </a:xfrm>
+      </p:grpSpPr>
       <p:sp>
         <p:nvSpPr>
           <p:cNvPr id="2" name="Rectangle 1"/>
@@ -5402,6 +6325,7 @@
           <a:lstStyle/>
           <a:p>
             <a:pPr algn="ctr"/>
+            <a:endParaRPr/>
           </a:p>
         </p:txBody>
       </p:sp>
@@ -5541,7 +6465,7 @@
                   <a:srgbClr val="1A3D1A"/>
                 </a:solidFill>
               </a:rPr>
-              <a:t>▸  Balanced strategy dominates</a:t>
+              <a:t>▸  Two strategies outperform sheep</a:t>
             </a:r>
           </a:p>
           <a:p>
@@ -5551,7 +6475,8 @@
                   <a:srgbClr val="1A1A1A"/>
                 </a:solidFill>
               </a:rPr>
-              <a:t>     •  Maximise pips, diversity, and ore/grain for cities</a:t>
+              <a:t>     •  Balanced: pip diversity + city focus; consistent on any board
+     •  Ore_grain: ore/grain dominance + city compounding; wins fast when placement aligns</a:t>
             </a:r>
           </a:p>
           <a:p>
@@ -5574,8 +6499,8 @@
         </p:nvSpPr>
         <p:spPr>
           <a:xfrm>
-            <a:off x="9448127" y="3977640"/>
-            <a:ext cx="2375064" cy="411480"/>
+            <a:off x="8818880" y="3977640"/>
+            <a:ext cx="3004311" cy="292388"/>
           </a:xfrm>
           <a:prstGeom prst="rect">
             <a:avLst/>
@@ -5590,12 +6515,28 @@
           <a:p>
             <a:pPr algn="ctr"/>
             <a:r>
-              <a:rPr sz="1300" b="1" i="0">
+              <a:rPr sz="1300" b="1" i="0" dirty="0">
                 <a:solidFill>
                   <a:srgbClr val="2E7D32"/>
                 </a:solidFill>
               </a:rPr>
-              <a:t>github.com/ayoung31/baaad-strategy</a:t>
+              <a:t>github.com/ayoung31/</a:t>
+            </a:r>
+            <a:r>
+              <a:rPr sz="1300" b="1" i="0" dirty="0" err="1">
+                <a:solidFill>
+                  <a:srgbClr val="2E7D32"/>
+                </a:solidFill>
+              </a:rPr>
+              <a:t>baaad</a:t>
+            </a:r>
+            <a:r>
+              <a:rPr sz="1300" b="1" i="0" dirty="0">
+                <a:solidFill>
+                  <a:srgbClr val="2E7D32"/>
+                </a:solidFill>
+              </a:rPr>
+              <a:t>-strategy</a:t>
             </a:r>
           </a:p>
         </p:txBody>
@@ -5608,8 +6549,8 @@
 </p:sld>
 </file>
 
-<file path=ppt/slides/slide16.xml><?xml version="1.0" encoding="utf-8"?>
-<p:sld xmlns:a="http://schemas.openxmlformats.org/drawingml/2006/main" xmlns:p="http://schemas.openxmlformats.org/presentationml/2006/main" xmlns:r="http://schemas.openxmlformats.org/officeDocument/2006/relationships">
+<file path=ppt/slides/slide19.xml><?xml version="1.0" encoding="utf-8"?>
+<p:sld xmlns:a="http://schemas.openxmlformats.org/drawingml/2006/main" xmlns:r="http://schemas.openxmlformats.org/officeDocument/2006/relationships" xmlns:p="http://schemas.openxmlformats.org/presentationml/2006/main">
   <p:cSld>
     <p:bg>
       <p:bgPr>
@@ -5625,7 +6566,14 @@
         <p:cNvGrpSpPr/>
         <p:nvPr/>
       </p:nvGrpSpPr>
-      <p:grpSpPr/>
+      <p:grpSpPr>
+        <a:xfrm>
+          <a:off x="0" y="0"/>
+          <a:ext cx="0" cy="0"/>
+          <a:chOff x="0" y="0"/>
+          <a:chExt cx="0" cy="0"/>
+        </a:xfrm>
+      </p:grpSpPr>
       <p:sp>
         <p:nvSpPr>
           <p:cNvPr id="2" name="Rectangle 1"/>
@@ -5666,6 +6614,7 @@
           <a:lstStyle/>
           <a:p>
             <a:pPr algn="ctr"/>
+            <a:endParaRPr/>
           </a:p>
         </p:txBody>
       </p:sp>
@@ -5745,6 +6694,7 @@
           <a:lstStyle/>
           <a:p>
             <a:pPr algn="ctr"/>
+            <a:endParaRPr/>
           </a:p>
         </p:txBody>
       </p:sp>
@@ -5791,7 +6741,7 @@
         <p:spPr>
           <a:xfrm>
             <a:off x="502920" y="1965960"/>
-            <a:ext cx="5120640" cy="4114800"/>
+            <a:ext cx="5120640" cy="1661993"/>
           </a:xfrm>
           <a:prstGeom prst="rect">
             <a:avLst/>
@@ -5806,12 +6756,44 @@
           <a:p>
             <a:pPr algn="l"/>
             <a:r>
-              <a:rPr sz="1700" b="0" i="0">
+              <a:rPr sz="1700" b="0" i="0" dirty="0">
                 <a:solidFill>
                   <a:srgbClr val="FFFBF0"/>
                 </a:solidFill>
               </a:rPr>
-              <a:t>For countless hours of Catan, heated port disputes, questionable trades, and the kind of chaotic gameplay that makes statistical analysis both necessary and deeply personal.
+              <a:t>For countless hours of </a:t>
+            </a:r>
+            <a:r>
+              <a:rPr lang="en-US" sz="1700" dirty="0">
+                <a:solidFill>
+                  <a:srgbClr val="FFFBF0"/>
+                </a:solidFill>
+              </a:rPr>
+              <a:t>board games</a:t>
+            </a:r>
+            <a:r>
+              <a:rPr sz="1700" b="0" i="0" dirty="0">
+                <a:solidFill>
+                  <a:srgbClr val="FFFBF0"/>
+                </a:solidFill>
+              </a:rPr>
+              <a:t>, heated </a:t>
+            </a:r>
+            <a:r>
+              <a:rPr lang="en-US" sz="1700" dirty="0">
+                <a:solidFill>
+                  <a:srgbClr val="FFFBF0"/>
+                </a:solidFill>
+              </a:rPr>
+              <a:t>rule</a:t>
+            </a:r>
+            <a:r>
+              <a:rPr sz="1700" b="0" i="0" dirty="0">
+                <a:solidFill>
+                  <a:srgbClr val="FFFBF0"/>
+                </a:solidFill>
+              </a:rPr>
+              <a:t> disputes, questionable trades, and the kind of chaotic gameplay that makes statistical analysis both necessary and deeply personal.
 This project exists because of you.</a:t>
             </a:r>
           </a:p>
@@ -5859,6 +6841,7 @@
           <a:lstStyle/>
           <a:p>
             <a:pPr algn="ctr"/>
+            <a:endParaRPr/>
           </a:p>
         </p:txBody>
       </p:sp>
@@ -5972,6 +6955,7 @@
           <a:lstStyle/>
           <a:p>
             <a:pPr algn="ctr"/>
+            <a:endParaRPr/>
           </a:p>
         </p:txBody>
       </p:sp>
@@ -5984,7 +6968,7 @@
 </file>
 
 <file path=ppt/slides/slide2.xml><?xml version="1.0" encoding="utf-8"?>
-<p:sld xmlns:a="http://schemas.openxmlformats.org/drawingml/2006/main" xmlns:p="http://schemas.openxmlformats.org/presentationml/2006/main" xmlns:r="http://schemas.openxmlformats.org/officeDocument/2006/relationships">
+<p:sld xmlns:a="http://schemas.openxmlformats.org/drawingml/2006/main" xmlns:r="http://schemas.openxmlformats.org/officeDocument/2006/relationships" xmlns:p="http://schemas.openxmlformats.org/presentationml/2006/main">
   <p:cSld>
     <p:bg>
       <p:bgPr>
@@ -6000,7 +6984,14 @@
         <p:cNvGrpSpPr/>
         <p:nvPr/>
       </p:nvGrpSpPr>
-      <p:grpSpPr/>
+      <p:grpSpPr>
+        <a:xfrm>
+          <a:off x="0" y="0"/>
+          <a:ext cx="0" cy="0"/>
+          <a:chOff x="0" y="0"/>
+          <a:chExt cx="0" cy="0"/>
+        </a:xfrm>
+      </p:grpSpPr>
       <p:sp>
         <p:nvSpPr>
           <p:cNvPr id="2" name="Rectangle 1"/>
@@ -6041,6 +7032,7 @@
           <a:lstStyle/>
           <a:p>
             <a:pPr algn="ctr"/>
+            <a:endParaRPr/>
           </a:p>
         </p:txBody>
       </p:sp>
@@ -6120,6 +7112,7 @@
           <a:lstStyle/>
           <a:p>
             <a:pPr algn="ctr"/>
+            <a:endParaRPr/>
           </a:p>
         </p:txBody>
       </p:sp>
@@ -6145,7 +7138,6 @@
           </a:bodyPr>
           <a:lstStyle/>
           <a:p>
-            <a:pPr/>
             <a:r>
               <a:rPr sz="2000" b="1">
                 <a:solidFill>
@@ -6178,7 +7170,6 @@
             </a:r>
           </a:p>
           <a:p>
-            <a:pPr/>
             <a:r>
               <a:rPr sz="2000" b="1">
                 <a:solidFill>
@@ -6211,7 +7202,6 @@
             </a:r>
           </a:p>
           <a:p>
-            <a:pPr/>
             <a:r>
               <a:rPr sz="2000" b="1">
                 <a:solidFill>
@@ -6254,7 +7244,7 @@
 </file>
 
 <file path=ppt/slides/slide3.xml><?xml version="1.0" encoding="utf-8"?>
-<p:sld xmlns:a="http://schemas.openxmlformats.org/drawingml/2006/main" xmlns:p="http://schemas.openxmlformats.org/presentationml/2006/main" xmlns:r="http://schemas.openxmlformats.org/officeDocument/2006/relationships">
+<p:sld xmlns:a="http://schemas.openxmlformats.org/drawingml/2006/main" xmlns:r="http://schemas.openxmlformats.org/officeDocument/2006/relationships" xmlns:p="http://schemas.openxmlformats.org/presentationml/2006/main">
   <p:cSld>
     <p:bg>
       <p:bgPr>
@@ -6270,7 +7260,14 @@
         <p:cNvGrpSpPr/>
         <p:nvPr/>
       </p:nvGrpSpPr>
-      <p:grpSpPr/>
+      <p:grpSpPr>
+        <a:xfrm>
+          <a:off x="0" y="0"/>
+          <a:ext cx="0" cy="0"/>
+          <a:chOff x="0" y="0"/>
+          <a:chExt cx="0" cy="0"/>
+        </a:xfrm>
+      </p:grpSpPr>
       <p:sp>
         <p:nvSpPr>
           <p:cNvPr id="2" name="Rectangle 1"/>
@@ -6311,778 +7308,7 @@
           <a:lstStyle/>
           <a:p>
             <a:pPr algn="ctr"/>
-          </a:p>
-        </p:txBody>
-      </p:sp>
-      <p:sp>
-        <p:nvSpPr>
-          <p:cNvPr id="3" name="TextBox 2"/>
-          <p:cNvSpPr txBox="1"/>
-          <p:nvPr/>
-        </p:nvSpPr>
-        <p:spPr>
-          <a:xfrm>
-            <a:off x="365760" y="109728"/>
-            <a:ext cx="11430000" cy="822960"/>
-          </a:xfrm>
-          <a:prstGeom prst="rect">
-            <a:avLst/>
-          </a:prstGeom>
-          <a:noFill/>
-        </p:spPr>
-        <p:txBody>
-          <a:bodyPr wrap="square">
-            <a:spAutoFit/>
-          </a:bodyPr>
-          <a:lstStyle/>
-          <a:p>
-            <a:pPr algn="l"/>
-            <a:r>
-              <a:rPr sz="3200" b="1" i="0">
-                <a:solidFill>
-                  <a:srgbClr val="FFFBF0"/>
-                </a:solidFill>
-              </a:rPr>
-              <a:t>The Three Competing Strategies</a:t>
-            </a:r>
-          </a:p>
-        </p:txBody>
-      </p:sp>
-      <p:graphicFrame>
-        <p:nvGraphicFramePr>
-          <p:cNvPr id="4" name="Table 3"/>
-          <p:cNvGraphicFramePr>
-            <a:graphicFrameLocks noGrp="1"/>
-          </p:cNvGraphicFramePr>
-          <p:nvPr/>
-        </p:nvGraphicFramePr>
-        <p:xfrm>
-          <a:off x="365760" y="1188720"/>
-          <a:ext cx="11155680" cy="5120640"/>
-        </p:xfrm>
-        <a:graphic>
-          <a:graphicData uri="http://schemas.openxmlformats.org/drawingml/2006/table">
-            <a:tbl>
-              <a:tblPr firstRow="1" bandRow="1">
-                <a:tableStyleId>{5C22544A-7EE6-4342-B048-85BDC9FD1C3A}</a:tableStyleId>
-              </a:tblPr>
-              <a:tblGrid>
-                <a:gridCol w="2011680"/>
-                <a:gridCol w="3017520"/>
-                <a:gridCol w="3017520"/>
-                <a:gridCol w="3108960"/>
-              </a:tblGrid>
-              <a:tr h="1280160">
-                <a:tc>
-                  <a:txBody>
-                    <a:bodyPr/>
-                    <a:lstStyle/>
-                    <a:p>
-                      <a:pPr algn="ctr"/>
-                      <a:r>
-                        <a:rPr b="1" sz="1500">
-                          <a:solidFill>
-                            <a:srgbClr val="FFFBF0"/>
-                          </a:solidFill>
-                        </a:rPr>
-                        <a:t>Strategy</a:t>
-                      </a:r>
-                    </a:p>
-                  </a:txBody>
-                  <a:tcPr>
-                    <a:solidFill>
-                      <a:srgbClr val="1A3D1A"/>
-                    </a:solidFill>
-                  </a:tcPr>
-                </a:tc>
-                <a:tc>
-                  <a:txBody>
-                    <a:bodyPr/>
-                    <a:lstStyle/>
-                    <a:p>
-                      <a:pPr algn="ctr"/>
-                      <a:r>
-                        <a:rPr b="1" sz="1500">
-                          <a:solidFill>
-                            <a:srgbClr val="FFFBF0"/>
-                          </a:solidFill>
-                        </a:rPr>
-                        <a:t>Initial Placement</a:t>
-                      </a:r>
-                    </a:p>
-                  </a:txBody>
-                  <a:tcPr>
-                    <a:solidFill>
-                      <a:srgbClr val="1A3D1A"/>
-                    </a:solidFill>
-                  </a:tcPr>
-                </a:tc>
-                <a:tc>
-                  <a:txBody>
-                    <a:bodyPr/>
-                    <a:lstStyle/>
-                    <a:p>
-                      <a:pPr algn="ctr"/>
-                      <a:r>
-                        <a:rPr b="1" sz="1500">
-                          <a:solidFill>
-                            <a:srgbClr val="FFFBF0"/>
-                          </a:solidFill>
-                        </a:rPr>
-                        <a:t>Road Priority</a:t>
-                      </a:r>
-                    </a:p>
-                  </a:txBody>
-                  <a:tcPr>
-                    <a:solidFill>
-                      <a:srgbClr val="1A3D1A"/>
-                    </a:solidFill>
-                  </a:tcPr>
-                </a:tc>
-                <a:tc>
-                  <a:txBody>
-                    <a:bodyPr/>
-                    <a:lstStyle/>
-                    <a:p>
-                      <a:pPr algn="ctr"/>
-                      <a:r>
-                        <a:rPr b="1" sz="1500">
-                          <a:solidFill>
-                            <a:srgbClr val="FFFBF0"/>
-                          </a:solidFill>
-                        </a:rPr>
-                        <a:t>Build Priority</a:t>
-                      </a:r>
-                    </a:p>
-                  </a:txBody>
-                  <a:tcPr>
-                    <a:solidFill>
-                      <a:srgbClr val="1A3D1A"/>
-                    </a:solidFill>
-                  </a:tcPr>
-                </a:tc>
-              </a:tr>
-              <a:tr h="1280160">
-                <a:tc>
-                  <a:txBody>
-                    <a:bodyPr/>
-                    <a:lstStyle/>
-                    <a:p>
-                      <a:pPr algn="l"/>
-                      <a:r>
-                        <a:rPr sz="1400">
-                          <a:solidFill>
-                            <a:srgbClr val="1A1A1A"/>
-                          </a:solidFill>
-                        </a:rPr>
-                        <a:t>balanced_strategy</a:t>
-                      </a:r>
-                    </a:p>
-                  </a:txBody>
-                  <a:tcPr>
-                    <a:solidFill>
-                      <a:srgbClr val="FFFBF0"/>
-                    </a:solidFill>
-                  </a:tcPr>
-                </a:tc>
-                <a:tc>
-                  <a:txBody>
-                    <a:bodyPr/>
-                    <a:lstStyle/>
-                    <a:p>
-                      <a:pPr algn="l"/>
-                      <a:r>
-                        <a:rPr sz="1400">
-                          <a:solidFill>
-                            <a:srgbClr val="1A1A1A"/>
-                          </a:solidFill>
-                        </a:rPr>
-                        <a:t>Maximise pip count + resource diversity</a:t>
-                      </a:r>
-                    </a:p>
-                  </a:txBody>
-                  <a:tcPr>
-                    <a:solidFill>
-                      <a:srgbClr val="FFFBF0"/>
-                    </a:solidFill>
-                  </a:tcPr>
-                </a:tc>
-                <a:tc>
-                  <a:txBody>
-                    <a:bodyPr/>
-                    <a:lstStyle/>
-                    <a:p>
-                      <a:pPr algn="l"/>
-                      <a:r>
-                        <a:rPr sz="1400">
-                          <a:solidFill>
-                            <a:srgbClr val="1A1A1A"/>
-                          </a:solidFill>
-                        </a:rPr>
-                        <a:t>Expand toward best open spots</a:t>
-                      </a:r>
-                    </a:p>
-                  </a:txBody>
-                  <a:tcPr>
-                    <a:solidFill>
-                      <a:srgbClr val="FFFBF0"/>
-                    </a:solidFill>
-                  </a:tcPr>
-                </a:tc>
-                <a:tc>
-                  <a:txBody>
-                    <a:bodyPr/>
-                    <a:lstStyle/>
-                    <a:p>
-                      <a:pPr algn="l"/>
-                      <a:r>
-                        <a:rPr sz="1400">
-                          <a:solidFill>
-                            <a:srgbClr val="1A1A1A"/>
-                          </a:solidFill>
-                        </a:rPr>
-                        <a:t>Ore + Grain for cities; use best port</a:t>
-                      </a:r>
-                    </a:p>
-                  </a:txBody>
-                  <a:tcPr>
-                    <a:solidFill>
-                      <a:srgbClr val="FFFBF0"/>
-                    </a:solidFill>
-                  </a:tcPr>
-                </a:tc>
-              </a:tr>
-              <a:tr h="1280160">
-                <a:tc>
-                  <a:txBody>
-                    <a:bodyPr/>
-                    <a:lstStyle/>
-                    <a:p>
-                      <a:pPr algn="l"/>
-                      <a:r>
-                        <a:rPr sz="1400">
-                          <a:solidFill>
-                            <a:srgbClr val="1A1A1A"/>
-                          </a:solidFill>
-                        </a:rPr>
-                        <a:t>sheep_strategy</a:t>
-                      </a:r>
-                    </a:p>
-                  </a:txBody>
-                  <a:tcPr>
-                    <a:solidFill>
-                      <a:srgbClr val="E8F0E0"/>
-                    </a:solidFill>
-                  </a:tcPr>
-                </a:tc>
-                <a:tc>
-                  <a:txBody>
-                    <a:bodyPr/>
-                    <a:lstStyle/>
-                    <a:p>
-                      <a:pPr algn="l"/>
-                      <a:r>
-                        <a:rPr sz="1400">
-                          <a:solidFill>
-                            <a:srgbClr val="1A1A1A"/>
-                          </a:solidFill>
-                        </a:rPr>
-                        <a:t>Score intersections by adjacent wool pips</a:t>
-                      </a:r>
-                    </a:p>
-                  </a:txBody>
-                  <a:tcPr>
-                    <a:solidFill>
-                      <a:srgbClr val="E8F0E0"/>
-                    </a:solidFill>
-                  </a:tcPr>
-                </a:tc>
-                <a:tc>
-                  <a:txBody>
-                    <a:bodyPr/>
-                    <a:lstStyle/>
-                    <a:p>
-                      <a:pPr algn="l"/>
-                      <a:r>
-                        <a:rPr sz="1400">
-                          <a:solidFill>
-                            <a:srgbClr val="1A1A1A"/>
-                          </a:solidFill>
-                        </a:rPr>
-                        <a:t>Route roads to the 2:1 Wool port</a:t>
-                      </a:r>
-                    </a:p>
-                  </a:txBody>
-                  <a:tcPr>
-                    <a:solidFill>
-                      <a:srgbClr val="E8F0E0"/>
-                    </a:solidFill>
-                  </a:tcPr>
-                </a:tc>
-                <a:tc>
-                  <a:txBody>
-                    <a:bodyPr/>
-                    <a:lstStyle/>
-                    <a:p>
-                      <a:pPr algn="l"/>
-                      <a:r>
-                        <a:rPr sz="1400">
-                          <a:solidFill>
-                            <a:srgbClr val="1A1A1A"/>
-                          </a:solidFill>
-                        </a:rPr>
-                        <a:t>Surplus wool → dev cards</a:t>
-                      </a:r>
-                    </a:p>
-                  </a:txBody>
-                  <a:tcPr>
-                    <a:solidFill>
-                      <a:srgbClr val="E8F0E0"/>
-                    </a:solidFill>
-                  </a:tcPr>
-                </a:tc>
-              </a:tr>
-              <a:tr h="1280160">
-                <a:tc>
-                  <a:txBody>
-                    <a:bodyPr/>
-                    <a:lstStyle/>
-                    <a:p>
-                      <a:pPr algn="l"/>
-                      <a:r>
-                        <a:rPr sz="1400">
-                          <a:solidFill>
-                            <a:srgbClr val="1A1A1A"/>
-                          </a:solidFill>
-                        </a:rPr>
-                        <a:t>ore_grain_strategy</a:t>
-                      </a:r>
-                    </a:p>
-                  </a:txBody>
-                  <a:tcPr>
-                    <a:solidFill>
-                      <a:srgbClr val="FFFBF0"/>
-                    </a:solidFill>
-                  </a:tcPr>
-                </a:tc>
-                <a:tc>
-                  <a:txBody>
-                    <a:bodyPr/>
-                    <a:lstStyle/>
-                    <a:p>
-                      <a:pPr algn="l"/>
-                      <a:r>
-                        <a:rPr sz="1400">
-                          <a:solidFill>
-                            <a:srgbClr val="1A1A1A"/>
-                          </a:solidFill>
-                        </a:rPr>
-                        <a:t>Prioritise ore and grain hexes</a:t>
-                      </a:r>
-                    </a:p>
-                  </a:txBody>
-                  <a:tcPr>
-                    <a:solidFill>
-                      <a:srgbClr val="FFFBF0"/>
-                    </a:solidFill>
-                  </a:tcPr>
-                </a:tc>
-                <a:tc>
-                  <a:txBody>
-                    <a:bodyPr/>
-                    <a:lstStyle/>
-                    <a:p>
-                      <a:pPr algn="l"/>
-                      <a:r>
-                        <a:rPr sz="1400">
-                          <a:solidFill>
-                            <a:srgbClr val="1A1A1A"/>
-                          </a:solidFill>
-                        </a:rPr>
-                        <a:t>Connect to ore/grain hexes</a:t>
-                      </a:r>
-                    </a:p>
-                  </a:txBody>
-                  <a:tcPr>
-                    <a:solidFill>
-                      <a:srgbClr val="FFFBF0"/>
-                    </a:solidFill>
-                  </a:tcPr>
-                </a:tc>
-                <a:tc>
-                  <a:txBody>
-                    <a:bodyPr/>
-                    <a:lstStyle/>
-                    <a:p>
-                      <a:pPr algn="l"/>
-                      <a:r>
-                        <a:rPr sz="1400">
-                          <a:solidFill>
-                            <a:srgbClr val="1A1A1A"/>
-                          </a:solidFill>
-                        </a:rPr>
-                        <a:t>Fast-track city upgrades</a:t>
-                      </a:r>
-                    </a:p>
-                  </a:txBody>
-                  <a:tcPr>
-                    <a:solidFill>
-                      <a:srgbClr val="FFFBF0"/>
-                    </a:solidFill>
-                  </a:tcPr>
-                </a:tc>
-              </a:tr>
-            </a:tbl>
-          </a:graphicData>
-        </a:graphic>
-      </p:graphicFrame>
-    </p:spTree>
-  </p:cSld>
-  <p:clrMapOvr>
-    <a:masterClrMapping/>
-  </p:clrMapOvr>
-</p:sld>
-</file>
-
-<file path=ppt/slides/slide4.xml><?xml version="1.0" encoding="utf-8"?>
-<p:sld xmlns:a="http://schemas.openxmlformats.org/drawingml/2006/main" xmlns:p="http://schemas.openxmlformats.org/presentationml/2006/main" xmlns:r="http://schemas.openxmlformats.org/officeDocument/2006/relationships">
-  <p:cSld>
-    <p:bg>
-      <p:bgPr>
-        <a:solidFill>
-          <a:srgbClr val="F5F5F0"/>
-        </a:solidFill>
-        <a:effectLst/>
-      </p:bgPr>
-    </p:bg>
-    <p:spTree>
-      <p:nvGrpSpPr>
-        <p:cNvPr id="1" name=""/>
-        <p:cNvGrpSpPr/>
-        <p:nvPr/>
-      </p:nvGrpSpPr>
-      <p:grpSpPr/>
-      <p:sp>
-        <p:nvSpPr>
-          <p:cNvPr id="2" name="Rectangle 1"/>
-          <p:cNvSpPr/>
-          <p:nvPr/>
-        </p:nvSpPr>
-        <p:spPr>
-          <a:xfrm>
-            <a:off x="0" y="0"/>
-            <a:ext cx="12188952" cy="1005840"/>
-          </a:xfrm>
-          <a:prstGeom prst="rect">
-            <a:avLst/>
-          </a:prstGeom>
-          <a:solidFill>
-            <a:srgbClr val="BB1111"/>
-          </a:solidFill>
-          <a:ln>
-            <a:noFill/>
-          </a:ln>
-        </p:spPr>
-        <p:style>
-          <a:lnRef idx="1">
-            <a:schemeClr val="accent1"/>
-          </a:lnRef>
-          <a:fillRef idx="3">
-            <a:schemeClr val="accent1"/>
-          </a:fillRef>
-          <a:effectRef idx="2">
-            <a:schemeClr val="accent1"/>
-          </a:effectRef>
-          <a:fontRef idx="minor">
-            <a:schemeClr val="lt1"/>
-          </a:fontRef>
-        </p:style>
-        <p:txBody>
-          <a:bodyPr rtlCol="0" anchor="ctr"/>
-          <a:lstStyle/>
-          <a:p>
-            <a:pPr algn="ctr"/>
-          </a:p>
-        </p:txBody>
-      </p:sp>
-      <p:sp>
-        <p:nvSpPr>
-          <p:cNvPr id="3" name="TextBox 2"/>
-          <p:cNvSpPr txBox="1"/>
-          <p:nvPr/>
-        </p:nvSpPr>
-        <p:spPr>
-          <a:xfrm>
-            <a:off x="365760" y="109728"/>
-            <a:ext cx="11430000" cy="822960"/>
-          </a:xfrm>
-          <a:prstGeom prst="rect">
-            <a:avLst/>
-          </a:prstGeom>
-          <a:noFill/>
-        </p:spPr>
-        <p:txBody>
-          <a:bodyPr wrap="square">
-            <a:spAutoFit/>
-          </a:bodyPr>
-          <a:lstStyle/>
-          <a:p>
-            <a:pPr algn="l"/>
-            <a:r>
-              <a:rPr sz="3200" b="1" i="0">
-                <a:solidFill>
-                  <a:srgbClr val="FFFBF0"/>
-                </a:solidFill>
-              </a:rPr>
-              <a:t>The Hypothesis: Why Sheep Loses</a:t>
-            </a:r>
-          </a:p>
-        </p:txBody>
-      </p:sp>
-      <p:sp>
-        <p:nvSpPr>
-          <p:cNvPr id="4" name="Rectangle 3"/>
-          <p:cNvSpPr/>
-          <p:nvPr/>
-        </p:nvSpPr>
-        <p:spPr>
-          <a:xfrm>
-            <a:off x="274320" y="1143000"/>
-            <a:ext cx="11612880" cy="5394960"/>
-          </a:xfrm>
-          <a:prstGeom prst="rect">
-            <a:avLst/>
-          </a:prstGeom>
-          <a:solidFill>
-            <a:srgbClr val="FFFBF0"/>
-          </a:solidFill>
-          <a:ln w="9525">
-            <a:solidFill>
-              <a:srgbClr val="CCCCBB"/>
-            </a:solidFill>
-          </a:ln>
-        </p:spPr>
-        <p:style>
-          <a:lnRef idx="1">
-            <a:schemeClr val="accent1"/>
-          </a:lnRef>
-          <a:fillRef idx="3">
-            <a:schemeClr val="accent1"/>
-          </a:fillRef>
-          <a:effectRef idx="2">
-            <a:schemeClr val="accent1"/>
-          </a:effectRef>
-          <a:fontRef idx="minor">
-            <a:schemeClr val="lt1"/>
-          </a:fontRef>
-        </p:style>
-        <p:txBody>
-          <a:bodyPr rtlCol="0" anchor="ctr"/>
-          <a:lstStyle/>
-          <a:p>
-            <a:pPr algn="ctr"/>
-          </a:p>
-        </p:txBody>
-      </p:sp>
-      <p:sp>
-        <p:nvSpPr>
-          <p:cNvPr id="5" name="TextBox 4"/>
-          <p:cNvSpPr txBox="1"/>
-          <p:nvPr/>
-        </p:nvSpPr>
-        <p:spPr>
-          <a:xfrm>
-            <a:off x="502920" y="1280160"/>
-            <a:ext cx="11155680" cy="5120640"/>
-          </a:xfrm>
-          <a:prstGeom prst="rect">
-            <a:avLst/>
-          </a:prstGeom>
-          <a:noFill/>
-        </p:spPr>
-        <p:txBody>
-          <a:bodyPr wrap="square">
-            <a:spAutoFit/>
-          </a:bodyPr>
-          <a:lstStyle/>
-          <a:p>
-            <a:pPr/>
-            <a:r>
-              <a:rPr sz="2000" b="1">
-                <a:solidFill>
-                  <a:srgbClr val="1A3D1A"/>
-                </a:solidFill>
-              </a:rPr>
-              <a:t>▸  Wool is structurally the weakest late-game resource</a:t>
-            </a:r>
-          </a:p>
-          <a:p>
-            <a:pPr lvl="1"/>
-            <a:r>
-              <a:rPr sz="1700" b="0">
-                <a:solidFill>
-                  <a:srgbClr val="1A1A1A"/>
-                </a:solidFill>
-              </a:rPr>
-              <a:t>     •  Needed for settlements &amp; dev cards — but NOT cities</a:t>
-            </a:r>
-          </a:p>
-          <a:p>
-            <a:pPr lvl="1"/>
-            <a:r>
-              <a:rPr sz="1700" b="0">
-                <a:solidFill>
-                  <a:srgbClr val="1A1A1A"/>
-                </a:solidFill>
-              </a:rPr>
-              <a:t>     •  Cities (3 Ore + 2 Grain) are the primary VP-scaling mechanism</a:t>
-            </a:r>
-          </a:p>
-          <a:p>
-            <a:pPr/>
-            <a:r>
-              <a:rPr sz="2000" b="1">
-                <a:solidFill>
-                  <a:srgbClr val="1A3D1A"/>
-                </a:solidFill>
-              </a:rPr>
-              <a:t>▸  Wool is the most abundant resource on the board</a:t>
-            </a:r>
-          </a:p>
-          <a:p>
-            <a:pPr lvl="1"/>
-            <a:r>
-              <a:rPr sz="1700" b="0">
-                <a:solidFill>
-                  <a:srgbClr val="1A1A1A"/>
-                </a:solidFill>
-              </a:rPr>
-              <a:t>     •  4 Pasture hexes vs. only 3 Mountains and 3 Hills</a:t>
-            </a:r>
-          </a:p>
-          <a:p>
-            <a:pPr lvl="1"/>
-            <a:r>
-              <a:rPr sz="1700" b="0">
-                <a:solidFill>
-                  <a:srgbClr val="1A1A1A"/>
-                </a:solidFill>
-              </a:rPr>
-              <a:t>     •  Opponents naturally produce plenty of wool — the 2:1 port is less of an edge than 2:1 Ore or 2:1 Grain</a:t>
-            </a:r>
-          </a:p>
-          <a:p>
-            <a:pPr/>
-            <a:r>
-              <a:rPr sz="2000" b="1">
-                <a:solidFill>
-                  <a:srgbClr val="1A3D1A"/>
-                </a:solidFill>
-              </a:rPr>
-              <a:t>▸  Placement trade-off hurts city-building</a:t>
-            </a:r>
-          </a:p>
-          <a:p>
-            <a:pPr lvl="1"/>
-            <a:r>
-              <a:rPr sz="1700" b="0">
-                <a:solidFill>
-                  <a:srgbClr val="1A1A1A"/>
-                </a:solidFill>
-              </a:rPr>
-              <a:t>     •  Prioritising wool hexes means sacrificing better ore/grain spots</a:t>
-            </a:r>
-          </a:p>
-          <a:p>
-            <a:pPr lvl="1"/>
-            <a:r>
-              <a:rPr sz="1700" b="0">
-                <a:solidFill>
-                  <a:srgbClr val="1A1A1A"/>
-                </a:solidFill>
-              </a:rPr>
-              <a:t>     •  A wool surplus with no matching ore/grain cannot efficiently convert to VP</a:t>
-            </a:r>
-          </a:p>
-          <a:p>
-            <a:pPr/>
-            <a:r>
-              <a:rPr sz="2000" b="1">
-                <a:solidFill>
-                  <a:srgbClr val="1A3D1A"/>
-                </a:solidFill>
-              </a:rPr>
-              <a:t>▸  Success criterion: sheep win rate significantly lower than balanced (p &lt; 0.05)</a:t>
-            </a:r>
-          </a:p>
-        </p:txBody>
-      </p:sp>
-    </p:spTree>
-  </p:cSld>
-  <p:clrMapOvr>
-    <a:masterClrMapping/>
-  </p:clrMapOvr>
-</p:sld>
-</file>
-
-<file path=ppt/slides/slide5.xml><?xml version="1.0" encoding="utf-8"?>
-<p:sld xmlns:a="http://schemas.openxmlformats.org/drawingml/2006/main" xmlns:p="http://schemas.openxmlformats.org/presentationml/2006/main" xmlns:r="http://schemas.openxmlformats.org/officeDocument/2006/relationships">
-  <p:cSld>
-    <p:bg>
-      <p:bgPr>
-        <a:solidFill>
-          <a:srgbClr val="F5F5F0"/>
-        </a:solidFill>
-        <a:effectLst/>
-      </p:bgPr>
-    </p:bg>
-    <p:spTree>
-      <p:nvGrpSpPr>
-        <p:cNvPr id="1" name=""/>
-        <p:cNvGrpSpPr/>
-        <p:nvPr/>
-      </p:nvGrpSpPr>
-      <p:grpSpPr/>
-      <p:sp>
-        <p:nvSpPr>
-          <p:cNvPr id="2" name="Rectangle 1"/>
-          <p:cNvSpPr/>
-          <p:nvPr/>
-        </p:nvSpPr>
-        <p:spPr>
-          <a:xfrm>
-            <a:off x="0" y="0"/>
-            <a:ext cx="12188952" cy="1005840"/>
-          </a:xfrm>
-          <a:prstGeom prst="rect">
-            <a:avLst/>
-          </a:prstGeom>
-          <a:solidFill>
-            <a:srgbClr val="2E7D32"/>
-          </a:solidFill>
-          <a:ln>
-            <a:noFill/>
-          </a:ln>
-        </p:spPr>
-        <p:style>
-          <a:lnRef idx="1">
-            <a:schemeClr val="accent1"/>
-          </a:lnRef>
-          <a:fillRef idx="3">
-            <a:schemeClr val="accent1"/>
-          </a:fillRef>
-          <a:effectRef idx="2">
-            <a:schemeClr val="accent1"/>
-          </a:effectRef>
-          <a:fontRef idx="minor">
-            <a:schemeClr val="lt1"/>
-          </a:fontRef>
-        </p:style>
-        <p:txBody>
-          <a:bodyPr rtlCol="0" anchor="ctr"/>
-          <a:lstStyle/>
-          <a:p>
-            <a:pPr algn="ctr"/>
+            <a:endParaRPr/>
           </a:p>
         </p:txBody>
       </p:sp>
@@ -7139,10 +7365,34 @@
                 <a:tableStyleId>{5C22544A-7EE6-4342-B048-85BDC9FD1C3A}</a:tableStyleId>
               </a:tblPr>
               <a:tblGrid>
-                <a:gridCol w="1554480"/>
-                <a:gridCol w="3108960"/>
-                <a:gridCol w="731520"/>
-                <a:gridCol w="5669280"/>
+                <a:gridCol w="1554480">
+                  <a:extLst>
+                    <a:ext uri="{9D8B030D-6E8A-4147-A177-3AD203B41FA5}">
+                      <a16:colId xmlns:a16="http://schemas.microsoft.com/office/drawing/2014/main" val="20000"/>
+                    </a:ext>
+                  </a:extLst>
+                </a:gridCol>
+                <a:gridCol w="3108960">
+                  <a:extLst>
+                    <a:ext uri="{9D8B030D-6E8A-4147-A177-3AD203B41FA5}">
+                      <a16:colId xmlns:a16="http://schemas.microsoft.com/office/drawing/2014/main" val="20001"/>
+                    </a:ext>
+                  </a:extLst>
+                </a:gridCol>
+                <a:gridCol w="731520">
+                  <a:extLst>
+                    <a:ext uri="{9D8B030D-6E8A-4147-A177-3AD203B41FA5}">
+                      <a16:colId xmlns:a16="http://schemas.microsoft.com/office/drawing/2014/main" val="20002"/>
+                    </a:ext>
+                  </a:extLst>
+                </a:gridCol>
+                <a:gridCol w="5669280">
+                  <a:extLst>
+                    <a:ext uri="{9D8B030D-6E8A-4147-A177-3AD203B41FA5}">
+                      <a16:colId xmlns:a16="http://schemas.microsoft.com/office/drawing/2014/main" val="20003"/>
+                    </a:ext>
+                  </a:extLst>
+                </a:gridCol>
               </a:tblGrid>
               <a:tr h="731520">
                 <a:tc>
@@ -7152,7 +7402,7 @@
                     <a:p>
                       <a:pPr algn="ctr"/>
                       <a:r>
-                        <a:rPr b="1" sz="1500">
+                        <a:rPr sz="1500" b="1">
                           <a:solidFill>
                             <a:srgbClr val="FFFBF0"/>
                           </a:solidFill>
@@ -7174,7 +7424,7 @@
                     <a:p>
                       <a:pPr algn="ctr"/>
                       <a:r>
-                        <a:rPr b="1" sz="1500">
+                        <a:rPr sz="1500" b="1">
                           <a:solidFill>
                             <a:srgbClr val="FFFBF0"/>
                           </a:solidFill>
@@ -7196,7 +7446,7 @@
                     <a:p>
                       <a:pPr algn="ctr"/>
                       <a:r>
-                        <a:rPr b="1" sz="1500">
+                        <a:rPr sz="1500" b="1">
                           <a:solidFill>
                             <a:srgbClr val="FFFBF0"/>
                           </a:solidFill>
@@ -7218,7 +7468,7 @@
                     <a:p>
                       <a:pPr algn="ctr"/>
                       <a:r>
-                        <a:rPr b="1" sz="1500">
+                        <a:rPr sz="1500" b="1">
                           <a:solidFill>
                             <a:srgbClr val="FFFBF0"/>
                           </a:solidFill>
@@ -7233,11 +7483,16 @@
                     </a:solidFill>
                   </a:tcPr>
                 </a:tc>
+                <a:extLst>
+                  <a:ext uri="{0D108BD9-81ED-4DB2-BD59-A6C34878D82A}">
+                    <a16:rowId xmlns:a16="http://schemas.microsoft.com/office/drawing/2014/main" val="10000"/>
+                  </a:ext>
+                </a:extLst>
               </a:tr>
               <a:tr h="731520">
                 <a:tc>
                   <a:txBody>
-                    <a:bodyPr wrap="square"/>
+                    <a:bodyPr/>
                     <a:lstStyle/>
                     <a:p>
                       <a:pPr algn="l"/>
@@ -7259,7 +7514,7 @@
                 </a:tc>
                 <a:tc>
                   <a:txBody>
-                    <a:bodyPr wrap="square"/>
+                    <a:bodyPr/>
                     <a:lstStyle/>
                     <a:p>
                       <a:pPr algn="l"/>
@@ -7305,7 +7560,7 @@
                 </a:tc>
                 <a:tc>
                   <a:txBody>
-                    <a:bodyPr wrap="square"/>
+                    <a:bodyPr/>
                     <a:lstStyle/>
                     <a:p>
                       <a:pPr algn="ctr"/>
@@ -7327,7 +7582,7 @@
                 </a:tc>
                 <a:tc>
                   <a:txBody>
-                    <a:bodyPr wrap="square"/>
+                    <a:bodyPr/>
                     <a:lstStyle/>
                     <a:p>
                       <a:pPr algn="l"/>
@@ -7347,11 +7602,16 @@
                     </a:solidFill>
                   </a:tcPr>
                 </a:tc>
+                <a:extLst>
+                  <a:ext uri="{0D108BD9-81ED-4DB2-BD59-A6C34878D82A}">
+                    <a16:rowId xmlns:a16="http://schemas.microsoft.com/office/drawing/2014/main" val="10001"/>
+                  </a:ext>
+                </a:extLst>
               </a:tr>
               <a:tr h="731520">
                 <a:tc>
                   <a:txBody>
-                    <a:bodyPr wrap="square"/>
+                    <a:bodyPr/>
                     <a:lstStyle/>
                     <a:p>
                       <a:pPr algn="l"/>
@@ -7373,7 +7633,7 @@
                 </a:tc>
                 <a:tc>
                   <a:txBody>
-                    <a:bodyPr wrap="square"/>
+                    <a:bodyPr/>
                     <a:lstStyle/>
                     <a:p>
                       <a:pPr algn="l"/>
@@ -7451,7 +7711,7 @@
                 </a:tc>
                 <a:tc>
                   <a:txBody>
-                    <a:bodyPr wrap="square"/>
+                    <a:bodyPr/>
                     <a:lstStyle/>
                     <a:p>
                       <a:pPr algn="ctr"/>
@@ -7473,7 +7733,7 @@
                 </a:tc>
                 <a:tc>
                   <a:txBody>
-                    <a:bodyPr wrap="square"/>
+                    <a:bodyPr/>
                     <a:lstStyle/>
                     <a:p>
                       <a:pPr algn="l"/>
@@ -7493,11 +7753,16 @@
                     </a:solidFill>
                   </a:tcPr>
                 </a:tc>
+                <a:extLst>
+                  <a:ext uri="{0D108BD9-81ED-4DB2-BD59-A6C34878D82A}">
+                    <a16:rowId xmlns:a16="http://schemas.microsoft.com/office/drawing/2014/main" val="10002"/>
+                  </a:ext>
+                </a:extLst>
               </a:tr>
               <a:tr h="731520">
                 <a:tc>
                   <a:txBody>
-                    <a:bodyPr wrap="square"/>
+                    <a:bodyPr/>
                     <a:lstStyle/>
                     <a:p>
                       <a:pPr algn="l"/>
@@ -7520,7 +7785,7 @@
                 </a:tc>
                 <a:tc>
                   <a:txBody>
-                    <a:bodyPr wrap="square"/>
+                    <a:bodyPr/>
                     <a:lstStyle/>
                     <a:p>
                       <a:pPr algn="l"/>
@@ -7566,7 +7831,7 @@
                 </a:tc>
                 <a:tc>
                   <a:txBody>
-                    <a:bodyPr wrap="square"/>
+                    <a:bodyPr/>
                     <a:lstStyle/>
                     <a:p>
                       <a:pPr algn="ctr"/>
@@ -7588,7 +7853,7 @@
                 </a:tc>
                 <a:tc>
                   <a:txBody>
-                    <a:bodyPr wrap="square"/>
+                    <a:bodyPr/>
                     <a:lstStyle/>
                     <a:p>
                       <a:pPr algn="l"/>
@@ -7608,11 +7873,16 @@
                     </a:solidFill>
                   </a:tcPr>
                 </a:tc>
+                <a:extLst>
+                  <a:ext uri="{0D108BD9-81ED-4DB2-BD59-A6C34878D82A}">
+                    <a16:rowId xmlns:a16="http://schemas.microsoft.com/office/drawing/2014/main" val="10003"/>
+                  </a:ext>
+                </a:extLst>
               </a:tr>
               <a:tr h="731520">
                 <a:tc>
                   <a:txBody>
-                    <a:bodyPr wrap="square"/>
+                    <a:bodyPr/>
                     <a:lstStyle/>
                     <a:p>
                       <a:pPr algn="l"/>
@@ -7634,7 +7904,7 @@
                 </a:tc>
                 <a:tc>
                   <a:txBody>
-                    <a:bodyPr wrap="square"/>
+                    <a:bodyPr/>
                     <a:lstStyle/>
                     <a:p>
                       <a:pPr algn="l"/>
@@ -7696,7 +7966,7 @@
                 </a:tc>
                 <a:tc>
                   <a:txBody>
-                    <a:bodyPr wrap="square"/>
+                    <a:bodyPr/>
                     <a:lstStyle/>
                     <a:p>
                       <a:pPr algn="ctr"/>
@@ -7718,7 +7988,7 @@
                 </a:tc>
                 <a:tc>
                   <a:txBody>
-                    <a:bodyPr wrap="square"/>
+                    <a:bodyPr/>
                     <a:lstStyle/>
                     <a:p>
                       <a:pPr algn="l"/>
@@ -7738,11 +8008,16 @@
                     </a:solidFill>
                   </a:tcPr>
                 </a:tc>
+                <a:extLst>
+                  <a:ext uri="{0D108BD9-81ED-4DB2-BD59-A6C34878D82A}">
+                    <a16:rowId xmlns:a16="http://schemas.microsoft.com/office/drawing/2014/main" val="10004"/>
+                  </a:ext>
+                </a:extLst>
               </a:tr>
               <a:tr h="731520">
                 <a:tc>
                   <a:txBody>
-                    <a:bodyPr wrap="square"/>
+                    <a:bodyPr/>
                     <a:lstStyle/>
                     <a:p>
                       <a:pPr algn="l"/>
@@ -7764,7 +8039,7 @@
                 </a:tc>
                 <a:tc>
                   <a:txBody>
-                    <a:bodyPr wrap="square"/>
+                    <a:bodyPr/>
                     <a:lstStyle/>
                     <a:p>
                       <a:pPr algn="l"/>
@@ -7786,7 +8061,7 @@
                 </a:tc>
                 <a:tc>
                   <a:txBody>
-                    <a:bodyPr wrap="square"/>
+                    <a:bodyPr/>
                     <a:lstStyle/>
                     <a:p>
                       <a:pPr algn="ctr"/>
@@ -7808,7 +8083,7 @@
                 </a:tc>
                 <a:tc>
                   <a:txBody>
-                    <a:bodyPr wrap="square"/>
+                    <a:bodyPr/>
                     <a:lstStyle/>
                     <a:p>
                       <a:pPr algn="l"/>
@@ -7828,11 +8103,16 @@
                     </a:solidFill>
                   </a:tcPr>
                 </a:tc>
+                <a:extLst>
+                  <a:ext uri="{0D108BD9-81ED-4DB2-BD59-A6C34878D82A}">
+                    <a16:rowId xmlns:a16="http://schemas.microsoft.com/office/drawing/2014/main" val="10005"/>
+                  </a:ext>
+                </a:extLst>
               </a:tr>
               <a:tr h="731520">
                 <a:tc>
                   <a:txBody>
-                    <a:bodyPr wrap="square"/>
+                    <a:bodyPr/>
                     <a:lstStyle/>
                     <a:p>
                       <a:pPr algn="l"/>
@@ -7854,7 +8134,7 @@
                 </a:tc>
                 <a:tc>
                   <a:txBody>
-                    <a:bodyPr wrap="square"/>
+                    <a:bodyPr/>
                     <a:lstStyle/>
                     <a:p>
                       <a:pPr algn="l"/>
@@ -7876,7 +8156,7 @@
                 </a:tc>
                 <a:tc>
                   <a:txBody>
-                    <a:bodyPr wrap="square"/>
+                    <a:bodyPr/>
                     <a:lstStyle/>
                     <a:p>
                       <a:pPr algn="ctr"/>
@@ -7898,7 +8178,7 @@
                 </a:tc>
                 <a:tc>
                   <a:txBody>
-                    <a:bodyPr wrap="square"/>
+                    <a:bodyPr/>
                     <a:lstStyle/>
                     <a:p>
                       <a:pPr algn="l"/>
@@ -7918,6 +8198,11 @@
                     </a:solidFill>
                   </a:tcPr>
                 </a:tc>
+                <a:extLst>
+                  <a:ext uri="{0D108BD9-81ED-4DB2-BD59-A6C34878D82A}">
+                    <a16:rowId xmlns:a16="http://schemas.microsoft.com/office/drawing/2014/main" val="10006"/>
+                  </a:ext>
+                </a:extLst>
               </a:tr>
             </a:tbl>
           </a:graphicData>
@@ -7931,8 +8216,8 @@
 </p:sld>
 </file>
 
-<file path=ppt/slides/slide6.xml><?xml version="1.0" encoding="utf-8"?>
-<p:sld xmlns:a="http://schemas.openxmlformats.org/drawingml/2006/main" xmlns:p="http://schemas.openxmlformats.org/presentationml/2006/main" xmlns:r="http://schemas.openxmlformats.org/officeDocument/2006/relationships">
+<file path=ppt/slides/slide4.xml><?xml version="1.0" encoding="utf-8"?>
+<p:sld xmlns:a="http://schemas.openxmlformats.org/drawingml/2006/main" xmlns:r="http://schemas.openxmlformats.org/officeDocument/2006/relationships" xmlns:p="http://schemas.openxmlformats.org/presentationml/2006/main">
   <p:cSld>
     <p:bg>
       <p:bgPr>
@@ -7948,7 +8233,14 @@
         <p:cNvGrpSpPr/>
         <p:nvPr/>
       </p:nvGrpSpPr>
-      <p:grpSpPr/>
+      <p:grpSpPr>
+        <a:xfrm>
+          <a:off x="0" y="0"/>
+          <a:ext cx="0" cy="0"/>
+          <a:chOff x="0" y="0"/>
+          <a:chExt cx="0" cy="0"/>
+        </a:xfrm>
+      </p:grpSpPr>
       <p:sp>
         <p:nvSpPr>
           <p:cNvPr id="2" name="Rectangle 1"/>
@@ -7989,6 +8281,7 @@
           <a:lstStyle/>
           <a:p>
             <a:pPr algn="ctr"/>
+            <a:endParaRPr/>
           </a:p>
         </p:txBody>
       </p:sp>
@@ -8068,6 +8361,7 @@
           <a:lstStyle/>
           <a:p>
             <a:pPr algn="ctr"/>
+            <a:endParaRPr/>
           </a:p>
         </p:txBody>
       </p:sp>
@@ -8111,6 +8405,7 @@
           <a:lstStyle/>
           <a:p>
             <a:pPr algn="ctr"/>
+            <a:endParaRPr/>
           </a:p>
         </p:txBody>
       </p:sp>
@@ -8157,7 +8452,7 @@
         <p:spPr>
           <a:xfrm>
             <a:off x="457200" y="1691640"/>
-            <a:ext cx="5212080" cy="4754880"/>
+            <a:ext cx="5212080" cy="3139321"/>
           </a:xfrm>
           <a:prstGeom prst="rect">
             <a:avLst/>
@@ -8171,7 +8466,7 @@
           <a:lstStyle/>
           <a:p>
             <a:r>
-              <a:rPr sz="1500">
+              <a:rPr dirty="0">
                 <a:solidFill>
                   <a:srgbClr val="1A1A1A"/>
                 </a:solidFill>
@@ -8180,68 +8475,78 @@
             </a:r>
           </a:p>
           <a:p>
-            <a:r>
-              <a:rPr sz="1500">
+            <a:endParaRPr dirty="0">
+              <a:solidFill>
+                <a:srgbClr val="1A1A1A"/>
+              </a:solidFill>
+            </a:endParaRPr>
+          </a:p>
+          <a:p>
+            <a:r>
+              <a:rPr dirty="0">
                 <a:solidFill>
                   <a:srgbClr val="1A1A1A"/>
                 </a:solidFill>
               </a:rPr>
-              <a:t/>
-            </a:r>
-          </a:p>
-          <a:p>
-            <a:r>
-              <a:rPr sz="1500">
+              <a:t>▸  Forest (Lumber)   — 4 hexes</a:t>
+            </a:r>
+          </a:p>
+          <a:p>
+            <a:r>
+              <a:rPr dirty="0">
                 <a:solidFill>
                   <a:srgbClr val="1A1A1A"/>
                 </a:solidFill>
               </a:rPr>
-              <a:t>▸  Forest (Lumber)   — 4 hexes</a:t>
-            </a:r>
-          </a:p>
-          <a:p>
-            <a:r>
-              <a:rPr sz="1500">
+              <a:t>▸  Pasture (Wool)    — 4 hexes</a:t>
+            </a:r>
+          </a:p>
+          <a:p>
+            <a:r>
+              <a:rPr dirty="0">
                 <a:solidFill>
                   <a:srgbClr val="1A1A1A"/>
                 </a:solidFill>
               </a:rPr>
-              <a:t>▸  Pasture (Wool)    — 4 hexes   ← most abundant</a:t>
-            </a:r>
-          </a:p>
-          <a:p>
-            <a:r>
-              <a:rPr sz="1500">
+              <a:t>▸  Fields (Grain)    — 4 hexes</a:t>
+            </a:r>
+          </a:p>
+          <a:p>
+            <a:r>
+              <a:rPr dirty="0">
                 <a:solidFill>
                   <a:srgbClr val="1A1A1A"/>
                 </a:solidFill>
               </a:rPr>
-              <a:t>▸  Fields (Grain)    — 4 hexes</a:t>
-            </a:r>
-          </a:p>
-          <a:p>
-            <a:r>
-              <a:rPr sz="1500">
+              <a:t>▸  Hills (Brick)     — 3 hexes</a:t>
+            </a:r>
+          </a:p>
+          <a:p>
+            <a:r>
+              <a:rPr dirty="0">
                 <a:solidFill>
                   <a:srgbClr val="1A1A1A"/>
                 </a:solidFill>
               </a:rPr>
-              <a:t>▸  Hills (Brick)     — 3 hexes</a:t>
-            </a:r>
-          </a:p>
-          <a:p>
-            <a:r>
-              <a:rPr sz="1500">
+              <a:t>▸  Mountains (Ore)   — 3 hexe</a:t>
+            </a:r>
+            <a:r>
+              <a:rPr lang="en-US" dirty="0">
                 <a:solidFill>
                   <a:srgbClr val="1A1A1A"/>
                 </a:solidFill>
               </a:rPr>
-              <a:t>▸  Mountains (Ore)   — 3 hexes   ← scarcest</a:t>
-            </a:r>
-          </a:p>
-          <a:p>
-            <a:r>
-              <a:rPr sz="1500">
+              <a:t>s</a:t>
+            </a:r>
+            <a:endParaRPr dirty="0">
+              <a:solidFill>
+                <a:srgbClr val="1A1A1A"/>
+              </a:solidFill>
+            </a:endParaRPr>
+          </a:p>
+          <a:p>
+            <a:r>
+              <a:rPr dirty="0">
                 <a:solidFill>
                   <a:srgbClr val="1A1A1A"/>
                 </a:solidFill>
@@ -8250,28 +8555,25 @@
             </a:r>
           </a:p>
           <a:p>
-            <a:r>
-              <a:rPr sz="1500">
+            <a:endParaRPr dirty="0">
+              <a:solidFill>
+                <a:srgbClr val="1A1A1A"/>
+              </a:solidFill>
+            </a:endParaRPr>
+          </a:p>
+          <a:p>
+            <a:r>
+              <a:rPr dirty="0">
                 <a:solidFill>
                   <a:srgbClr val="1A1A1A"/>
                 </a:solidFill>
               </a:rPr>
-              <a:t/>
-            </a:r>
-          </a:p>
-          <a:p>
-            <a:r>
-              <a:rPr sz="1500">
-                <a:solidFill>
-                  <a:srgbClr val="1A1A1A"/>
-                </a:solidFill>
-              </a:rPr>
               <a:t>9 ports around the coast:</a:t>
             </a:r>
           </a:p>
           <a:p>
             <a:r>
-              <a:rPr sz="1500">
+              <a:rPr dirty="0">
                 <a:solidFill>
                   <a:srgbClr val="1A1A1A"/>
                 </a:solidFill>
@@ -8323,6 +8625,7 @@
           <a:lstStyle/>
           <a:p>
             <a:pPr algn="ctr"/>
+            <a:endParaRPr/>
           </a:p>
         </p:txBody>
       </p:sp>
@@ -8366,6 +8669,7 @@
           <a:lstStyle/>
           <a:p>
             <a:pPr algn="ctr"/>
+            <a:endParaRPr/>
           </a:p>
         </p:txBody>
       </p:sp>
@@ -8412,7 +8716,7 @@
         <p:spPr>
           <a:xfrm>
             <a:off x="6263640" y="1691640"/>
-            <a:ext cx="5212080" cy="4754880"/>
+            <a:ext cx="5212080" cy="3693319"/>
           </a:xfrm>
           <a:prstGeom prst="rect">
             <a:avLst/>
@@ -8426,7 +8730,7 @@
           <a:lstStyle/>
           <a:p>
             <a:r>
-              <a:rPr sz="1500">
+              <a:rPr dirty="0">
                 <a:solidFill>
                   <a:srgbClr val="1A1A1A"/>
                 </a:solidFill>
@@ -8436,7 +8740,7 @@
           </a:p>
           <a:p>
             <a:r>
-              <a:rPr sz="1500">
+              <a:rPr dirty="0">
                 <a:solidFill>
                   <a:srgbClr val="1A1A1A"/>
                 </a:solidFill>
@@ -8446,7 +8750,7 @@
           </a:p>
           <a:p>
             <a:r>
-              <a:rPr sz="1500">
+              <a:rPr dirty="0">
                 <a:solidFill>
                   <a:srgbClr val="1A1A1A"/>
                 </a:solidFill>
@@ -8456,7 +8760,7 @@
           </a:p>
           <a:p>
             <a:r>
-              <a:rPr sz="1500">
+              <a:rPr dirty="0">
                 <a:solidFill>
                   <a:srgbClr val="1A1A1A"/>
                 </a:solidFill>
@@ -8466,7 +8770,7 @@
           </a:p>
           <a:p>
             <a:r>
-              <a:rPr sz="1500">
+              <a:rPr dirty="0">
                 <a:solidFill>
                   <a:srgbClr val="1A1A1A"/>
                 </a:solidFill>
@@ -8476,7 +8780,7 @@
           </a:p>
           <a:p>
             <a:r>
-              <a:rPr sz="1500">
+              <a:rPr dirty="0">
                 <a:solidFill>
                   <a:srgbClr val="1A1A1A"/>
                 </a:solidFill>
@@ -8486,7 +8790,7 @@
           </a:p>
           <a:p>
             <a:r>
-              <a:rPr sz="1500">
+              <a:rPr dirty="0">
                 <a:solidFill>
                   <a:srgbClr val="1A1A1A"/>
                 </a:solidFill>
@@ -8496,7 +8800,7 @@
           </a:p>
           <a:p>
             <a:r>
-              <a:rPr sz="1500">
+              <a:rPr dirty="0">
                 <a:solidFill>
                   <a:srgbClr val="1A1A1A"/>
                 </a:solidFill>
@@ -8506,7 +8810,7 @@
           </a:p>
           <a:p>
             <a:r>
-              <a:rPr sz="1500">
+              <a:rPr dirty="0">
                 <a:solidFill>
                   <a:srgbClr val="1A1A1A"/>
                 </a:solidFill>
@@ -8516,7 +8820,7 @@
           </a:p>
           <a:p>
             <a:r>
-              <a:rPr sz="1500">
+              <a:rPr dirty="0">
                 <a:solidFill>
                   <a:srgbClr val="1A1A1A"/>
                 </a:solidFill>
@@ -8526,7 +8830,7 @@
           </a:p>
           <a:p>
             <a:r>
-              <a:rPr sz="1500">
+              <a:rPr dirty="0">
                 <a:solidFill>
                   <a:srgbClr val="1A1A1A"/>
                 </a:solidFill>
@@ -8536,7 +8840,7 @@
           </a:p>
           <a:p>
             <a:r>
-              <a:rPr sz="1500">
+              <a:rPr dirty="0">
                 <a:solidFill>
                   <a:srgbClr val="1A1A1A"/>
                 </a:solidFill>
@@ -8546,7 +8850,7 @@
           </a:p>
           <a:p>
             <a:r>
-              <a:rPr sz="1500">
+              <a:rPr dirty="0">
                 <a:solidFill>
                   <a:srgbClr val="1A1A1A"/>
                 </a:solidFill>
@@ -8564,8 +8868,335 @@
 </p:sld>
 </file>
 
-<file path=ppt/slides/slide7.xml><?xml version="1.0" encoding="utf-8"?>
-<p:sld xmlns:a="http://schemas.openxmlformats.org/drawingml/2006/main" xmlns:p="http://schemas.openxmlformats.org/presentationml/2006/main" xmlns:r="http://schemas.openxmlformats.org/officeDocument/2006/relationships">
+<file path=ppt/slides/slide5.xml><?xml version="1.0" encoding="utf-8"?>
+<p:sld xmlns:a="http://schemas.openxmlformats.org/drawingml/2006/main" xmlns:r="http://schemas.openxmlformats.org/officeDocument/2006/relationships" xmlns:p="http://schemas.openxmlformats.org/presentationml/2006/main">
+  <p:cSld>
+    <p:spTree>
+      <p:nvGrpSpPr>
+        <p:cNvPr id="1" name="">
+          <a:extLst>
+            <a:ext uri="{FF2B5EF4-FFF2-40B4-BE49-F238E27FC236}">
+              <a16:creationId xmlns:a16="http://schemas.microsoft.com/office/drawing/2014/main" id="{F2B2BE59-BAD0-1644-ABC2-CC3EF78C95DF}"/>
+            </a:ext>
+          </a:extLst>
+        </p:cNvPr>
+        <p:cNvGrpSpPr/>
+        <p:nvPr/>
+      </p:nvGrpSpPr>
+      <p:grpSpPr>
+        <a:xfrm>
+          <a:off x="0" y="0"/>
+          <a:ext cx="0" cy="0"/>
+          <a:chOff x="0" y="0"/>
+          <a:chExt cx="0" cy="0"/>
+        </a:xfrm>
+      </p:grpSpPr>
+      <p:sp>
+        <p:nvSpPr>
+          <p:cNvPr id="2" name="Rectangle 1">
+            <a:extLst>
+              <a:ext uri="{FF2B5EF4-FFF2-40B4-BE49-F238E27FC236}">
+                <a16:creationId xmlns:a16="http://schemas.microsoft.com/office/drawing/2014/main" id="{5342F9E5-9F10-24D8-2A40-519427B743AC}"/>
+              </a:ext>
+            </a:extLst>
+          </p:cNvPr>
+          <p:cNvSpPr/>
+          <p:nvPr/>
+        </p:nvSpPr>
+        <p:spPr>
+          <a:xfrm>
+            <a:off x="0" y="0"/>
+            <a:ext cx="12188952" cy="1005840"/>
+          </a:xfrm>
+          <a:prstGeom prst="rect">
+            <a:avLst/>
+          </a:prstGeom>
+          <a:solidFill>
+            <a:srgbClr val="2E7D32"/>
+          </a:solidFill>
+          <a:ln>
+            <a:noFill/>
+          </a:ln>
+        </p:spPr>
+        <p:style>
+          <a:lnRef idx="1">
+            <a:schemeClr val="accent1"/>
+          </a:lnRef>
+          <a:fillRef idx="3">
+            <a:schemeClr val="accent1"/>
+          </a:fillRef>
+          <a:effectRef idx="2">
+            <a:schemeClr val="accent1"/>
+          </a:effectRef>
+          <a:fontRef idx="minor">
+            <a:schemeClr val="lt1"/>
+          </a:fontRef>
+        </p:style>
+        <p:txBody>
+          <a:bodyPr rtlCol="0" anchor="ctr"/>
+          <a:lstStyle/>
+          <a:p>
+            <a:pPr algn="ctr"/>
+            <a:endParaRPr/>
+          </a:p>
+        </p:txBody>
+      </p:sp>
+      <p:sp>
+        <p:nvSpPr>
+          <p:cNvPr id="3" name="TextBox 2">
+            <a:extLst>
+              <a:ext uri="{FF2B5EF4-FFF2-40B4-BE49-F238E27FC236}">
+                <a16:creationId xmlns:a16="http://schemas.microsoft.com/office/drawing/2014/main" id="{06086896-3623-5DF5-C4C5-6BF0A216760B}"/>
+              </a:ext>
+            </a:extLst>
+          </p:cNvPr>
+          <p:cNvSpPr txBox="1"/>
+          <p:nvPr/>
+        </p:nvSpPr>
+        <p:spPr>
+          <a:xfrm>
+            <a:off x="365760" y="109728"/>
+            <a:ext cx="11430000" cy="584775"/>
+          </a:xfrm>
+          <a:prstGeom prst="rect">
+            <a:avLst/>
+          </a:prstGeom>
+          <a:noFill/>
+        </p:spPr>
+        <p:txBody>
+          <a:bodyPr wrap="square">
+            <a:spAutoFit/>
+          </a:bodyPr>
+          <a:lstStyle/>
+          <a:p>
+            <a:pPr algn="l"/>
+            <a:r>
+              <a:rPr lang="en-US" sz="3200" b="1" dirty="0">
+                <a:solidFill>
+                  <a:srgbClr val="FFFBF0"/>
+                </a:solidFill>
+              </a:rPr>
+              <a:t>4</a:t>
+            </a:r>
+            <a:r>
+              <a:rPr lang="en-US" sz="3200" b="1" i="0" dirty="0">
+                <a:solidFill>
+                  <a:srgbClr val="FFFBF0"/>
+                </a:solidFill>
+              </a:rPr>
+              <a:t> Key Strategy Components</a:t>
+            </a:r>
+            <a:endParaRPr sz="3200" b="1" i="0" dirty="0">
+              <a:solidFill>
+                <a:srgbClr val="FFFBF0"/>
+              </a:solidFill>
+            </a:endParaRPr>
+          </a:p>
+        </p:txBody>
+      </p:sp>
+      <p:sp>
+        <p:nvSpPr>
+          <p:cNvPr id="4" name="Rectangle 3">
+            <a:extLst>
+              <a:ext uri="{FF2B5EF4-FFF2-40B4-BE49-F238E27FC236}">
+                <a16:creationId xmlns:a16="http://schemas.microsoft.com/office/drawing/2014/main" id="{88BA50EE-D776-B75A-639B-DD891FAB6AD1}"/>
+              </a:ext>
+            </a:extLst>
+          </p:cNvPr>
+          <p:cNvSpPr/>
+          <p:nvPr/>
+        </p:nvSpPr>
+        <p:spPr>
+          <a:xfrm>
+            <a:off x="274320" y="1143000"/>
+            <a:ext cx="11612880" cy="5394960"/>
+          </a:xfrm>
+          <a:prstGeom prst="rect">
+            <a:avLst/>
+          </a:prstGeom>
+          <a:solidFill>
+            <a:srgbClr val="FFFBF0"/>
+          </a:solidFill>
+          <a:ln w="9525">
+            <a:solidFill>
+              <a:srgbClr val="CCCCBB"/>
+            </a:solidFill>
+          </a:ln>
+        </p:spPr>
+        <p:style>
+          <a:lnRef idx="1">
+            <a:schemeClr val="accent1"/>
+          </a:lnRef>
+          <a:fillRef idx="3">
+            <a:schemeClr val="accent1"/>
+          </a:fillRef>
+          <a:effectRef idx="2">
+            <a:schemeClr val="accent1"/>
+          </a:effectRef>
+          <a:fontRef idx="minor">
+            <a:schemeClr val="lt1"/>
+          </a:fontRef>
+        </p:style>
+        <p:txBody>
+          <a:bodyPr rtlCol="0" anchor="ctr"/>
+          <a:lstStyle/>
+          <a:p>
+            <a:pPr algn="ctr"/>
+            <a:endParaRPr dirty="0"/>
+          </a:p>
+        </p:txBody>
+      </p:sp>
+      <p:sp>
+        <p:nvSpPr>
+          <p:cNvPr id="5" name="TextBox 4">
+            <a:extLst>
+              <a:ext uri="{FF2B5EF4-FFF2-40B4-BE49-F238E27FC236}">
+                <a16:creationId xmlns:a16="http://schemas.microsoft.com/office/drawing/2014/main" id="{084A367A-D0DC-1FA8-3C78-51B4D5CC7AA7}"/>
+              </a:ext>
+            </a:extLst>
+          </p:cNvPr>
+          <p:cNvSpPr txBox="1"/>
+          <p:nvPr/>
+        </p:nvSpPr>
+        <p:spPr>
+          <a:xfrm>
+            <a:off x="502920" y="1280160"/>
+            <a:ext cx="11155680" cy="3108543"/>
+          </a:xfrm>
+          <a:prstGeom prst="rect">
+            <a:avLst/>
+          </a:prstGeom>
+          <a:noFill/>
+        </p:spPr>
+        <p:txBody>
+          <a:bodyPr wrap="square">
+            <a:spAutoFit/>
+          </a:bodyPr>
+          <a:lstStyle/>
+          <a:p>
+            <a:pPr marL="342900" indent="-342900">
+              <a:buFont typeface="Arial" panose="020B0604020202020204" pitchFamily="34" charset="0"/>
+              <a:buChar char="•"/>
+            </a:pPr>
+            <a:r>
+              <a:rPr lang="en-US" sz="2400" b="1" dirty="0">
+                <a:solidFill>
+                  <a:srgbClr val="1A3D1A"/>
+                </a:solidFill>
+              </a:rPr>
+              <a:t>Initial placement</a:t>
+            </a:r>
+          </a:p>
+          <a:p>
+            <a:pPr marL="800100" lvl="1" indent="-342900">
+              <a:buFont typeface="Arial" panose="020B0604020202020204" pitchFamily="34" charset="0"/>
+              <a:buChar char="•"/>
+            </a:pPr>
+            <a:r>
+              <a:rPr lang="en-US" sz="2000" dirty="0"/>
+              <a:t>Where do you put your first settlement?</a:t>
+            </a:r>
+          </a:p>
+          <a:p>
+            <a:pPr marL="342900" indent="-342900">
+              <a:buFont typeface="Arial" panose="020B0604020202020204" pitchFamily="34" charset="0"/>
+              <a:buChar char="•"/>
+            </a:pPr>
+            <a:r>
+              <a:rPr lang="en-US" sz="2400" b="1" dirty="0">
+                <a:solidFill>
+                  <a:srgbClr val="1A3D1A"/>
+                </a:solidFill>
+              </a:rPr>
+              <a:t>Second placement</a:t>
+            </a:r>
+          </a:p>
+          <a:p>
+            <a:pPr marL="800100" lvl="1" indent="-342900">
+              <a:buFont typeface="Arial" panose="020B0604020202020204" pitchFamily="34" charset="0"/>
+              <a:buChar char="•"/>
+            </a:pPr>
+            <a:r>
+              <a:rPr lang="en-US" sz="2000" dirty="0"/>
+              <a:t>Where do you put your second settlement?</a:t>
+            </a:r>
+          </a:p>
+          <a:p>
+            <a:pPr marL="342900" indent="-342900">
+              <a:buFont typeface="Arial" panose="020B0604020202020204" pitchFamily="34" charset="0"/>
+              <a:buChar char="•"/>
+            </a:pPr>
+            <a:r>
+              <a:rPr lang="en-US" sz="2400" b="1" dirty="0">
+                <a:solidFill>
+                  <a:srgbClr val="1A3D1A"/>
+                </a:solidFill>
+              </a:rPr>
+              <a:t>Road Priority</a:t>
+            </a:r>
+          </a:p>
+          <a:p>
+            <a:pPr marL="800100" lvl="1" indent="-342900">
+              <a:buFont typeface="Arial" panose="020B0604020202020204" pitchFamily="34" charset="0"/>
+              <a:buChar char="•"/>
+            </a:pPr>
+            <a:r>
+              <a:rPr lang="en-US" sz="2000" dirty="0"/>
+              <a:t>Which direction should we go towards with roads?</a:t>
+            </a:r>
+          </a:p>
+          <a:p>
+            <a:pPr marL="342900" indent="-342900">
+              <a:buFont typeface="Arial" panose="020B0604020202020204" pitchFamily="34" charset="0"/>
+              <a:buChar char="•"/>
+            </a:pPr>
+            <a:r>
+              <a:rPr lang="en-US" sz="2400" b="1" dirty="0">
+                <a:solidFill>
+                  <a:srgbClr val="1A3D1A"/>
+                </a:solidFill>
+              </a:rPr>
+              <a:t>Build priority</a:t>
+            </a:r>
+          </a:p>
+          <a:p>
+            <a:pPr marL="800100" lvl="1" indent="-342900">
+              <a:buFont typeface="Arial" panose="020B0604020202020204" pitchFamily="34" charset="0"/>
+              <a:buChar char="•"/>
+            </a:pPr>
+            <a:r>
+              <a:rPr lang="en-US" sz="2000" dirty="0"/>
+              <a:t>What should our building priority be?</a:t>
+            </a:r>
+          </a:p>
+          <a:p>
+            <a:pPr marL="800100" lvl="1" indent="-342900">
+              <a:buFont typeface="Arial" panose="020B0604020202020204" pitchFamily="34" charset="0"/>
+              <a:buChar char="•"/>
+            </a:pPr>
+            <a:r>
+              <a:rPr lang="en-US" sz="2000" dirty="0"/>
+              <a:t>Dev cards, cities, settlements, roads</a:t>
+            </a:r>
+            <a:endParaRPr sz="2000" dirty="0"/>
+          </a:p>
+        </p:txBody>
+      </p:sp>
+    </p:spTree>
+    <p:extLst>
+      <p:ext uri="{BB962C8B-B14F-4D97-AF65-F5344CB8AC3E}">
+        <p14:creationId xmlns:p14="http://schemas.microsoft.com/office/powerpoint/2010/main" val="1700970345"/>
+      </p:ext>
+    </p:extLst>
+  </p:cSld>
+  <p:clrMapOvr>
+    <a:masterClrMapping/>
+  </p:clrMapOvr>
+</p:sld>
+</file>
+
+<file path=ppt/slides/slide6.xml><?xml version="1.0" encoding="utf-8"?>
+<p:sld xmlns:a="http://schemas.openxmlformats.org/drawingml/2006/main" xmlns:r="http://schemas.openxmlformats.org/officeDocument/2006/relationships" xmlns:p="http://schemas.openxmlformats.org/presentationml/2006/main">
   <p:cSld>
     <p:bg>
       <p:bgPr>
@@ -8581,7 +9212,14 @@
         <p:cNvGrpSpPr/>
         <p:nvPr/>
       </p:nvGrpSpPr>
-      <p:grpSpPr/>
+      <p:grpSpPr>
+        <a:xfrm>
+          <a:off x="0" y="0"/>
+          <a:ext cx="0" cy="0"/>
+          <a:chOff x="0" y="0"/>
+          <a:chExt cx="0" cy="0"/>
+        </a:xfrm>
+      </p:grpSpPr>
       <p:sp>
         <p:nvSpPr>
           <p:cNvPr id="2" name="Rectangle 1"/>
@@ -8622,6 +9260,7 @@
           <a:lstStyle/>
           <a:p>
             <a:pPr algn="ctr"/>
+            <a:endParaRPr/>
           </a:p>
         </p:txBody>
       </p:sp>
@@ -8649,40 +9288,412 @@
           <a:p>
             <a:pPr algn="l"/>
             <a:r>
-              <a:rPr sz="3200" b="1" i="0">
+              <a:rPr sz="3200" b="1" i="0" dirty="0">
                 <a:solidFill>
                   <a:srgbClr val="FFFBF0"/>
                 </a:solidFill>
               </a:rPr>
-              <a:t>Example Board (seed = 42)</a:t>
-            </a:r>
-          </a:p>
-        </p:txBody>
-      </p:sp>
-      <p:pic>
-        <p:nvPicPr>
-          <p:cNvPr id="4" name="Picture 3" descr="example_board.png"/>
-          <p:cNvPicPr>
-            <a:picLocks noChangeAspect="1"/>
-          </p:cNvPicPr>
+              <a:t>The Three Competing Strategies</a:t>
+            </a:r>
+          </a:p>
+        </p:txBody>
+      </p:sp>
+      <p:graphicFrame>
+        <p:nvGraphicFramePr>
+          <p:cNvPr id="4" name="Table 3"/>
+          <p:cNvGraphicFramePr>
+            <a:graphicFrameLocks noGrp="1"/>
+          </p:cNvGraphicFramePr>
           <p:nvPr/>
-        </p:nvPicPr>
-        <p:blipFill>
-          <a:blip r:embed="rId2"/>
-          <a:stretch>
-            <a:fillRect/>
-          </a:stretch>
-        </p:blipFill>
-        <p:spPr>
-          <a:xfrm>
-            <a:off x="3305556" y="1097280"/>
-            <a:ext cx="5577840" cy="5577840"/>
-          </a:xfrm>
-          <a:prstGeom prst="rect">
-            <a:avLst/>
-          </a:prstGeom>
-        </p:spPr>
-      </p:pic>
+        </p:nvGraphicFramePr>
+        <p:xfrm>
+          <a:off x="365760" y="1188720"/>
+          <a:ext cx="11155680" cy="5303520"/>
+        </p:xfrm>
+        <a:graphic>
+          <a:graphicData uri="http://schemas.openxmlformats.org/drawingml/2006/table">
+            <a:tbl>
+              <a:tblPr firstRow="1" bandRow="1">
+                <a:tableStyleId>{5C22544A-7EE6-4342-B048-85BDC9FD1C3A}</a:tableStyleId>
+              </a:tblPr>
+              <a:tblGrid>
+                <a:gridCol w="2011680">
+                  <a:extLst>
+                    <a:ext uri="{9D8B030D-6E8A-4147-A177-3AD203B41FA5}">
+                      <a16:colId xmlns:a16="http://schemas.microsoft.com/office/drawing/2014/main" val="20000"/>
+                    </a:ext>
+                  </a:extLst>
+                </a:gridCol>
+                <a:gridCol w="3017520">
+                  <a:extLst>
+                    <a:ext uri="{9D8B030D-6E8A-4147-A177-3AD203B41FA5}">
+                      <a16:colId xmlns:a16="http://schemas.microsoft.com/office/drawing/2014/main" val="20001"/>
+                    </a:ext>
+                  </a:extLst>
+                </a:gridCol>
+                <a:gridCol w="3017520">
+                  <a:extLst>
+                    <a:ext uri="{9D8B030D-6E8A-4147-A177-3AD203B41FA5}">
+                      <a16:colId xmlns:a16="http://schemas.microsoft.com/office/drawing/2014/main" val="20002"/>
+                    </a:ext>
+                  </a:extLst>
+                </a:gridCol>
+                <a:gridCol w="3108960">
+                  <a:extLst>
+                    <a:ext uri="{9D8B030D-6E8A-4147-A177-3AD203B41FA5}">
+                      <a16:colId xmlns:a16="http://schemas.microsoft.com/office/drawing/2014/main" val="20003"/>
+                    </a:ext>
+                  </a:extLst>
+                </a:gridCol>
+              </a:tblGrid>
+              <a:tr h="1280160">
+                <a:tc>
+                  <a:txBody>
+                    <a:bodyPr/>
+                    <a:lstStyle/>
+                    <a:p>
+                      <a:pPr algn="ctr"/>
+                      <a:r>
+                        <a:rPr sz="2000" b="1">
+                          <a:solidFill>
+                            <a:srgbClr val="FFFBF0"/>
+                          </a:solidFill>
+                        </a:rPr>
+                        <a:t>Strategy</a:t>
+                      </a:r>
+                    </a:p>
+                  </a:txBody>
+                  <a:tcPr>
+                    <a:solidFill>
+                      <a:srgbClr val="1A3D1A"/>
+                    </a:solidFill>
+                  </a:tcPr>
+                </a:tc>
+                <a:tc>
+                  <a:txBody>
+                    <a:bodyPr/>
+                    <a:lstStyle/>
+                    <a:p>
+                      <a:pPr algn="ctr"/>
+                      <a:r>
+                        <a:rPr sz="2000" b="1">
+                          <a:solidFill>
+                            <a:srgbClr val="FFFBF0"/>
+                          </a:solidFill>
+                        </a:rPr>
+                        <a:t>Initial Placement</a:t>
+                      </a:r>
+                    </a:p>
+                  </a:txBody>
+                  <a:tcPr>
+                    <a:solidFill>
+                      <a:srgbClr val="1A3D1A"/>
+                    </a:solidFill>
+                  </a:tcPr>
+                </a:tc>
+                <a:tc>
+                  <a:txBody>
+                    <a:bodyPr/>
+                    <a:lstStyle/>
+                    <a:p>
+                      <a:pPr algn="ctr"/>
+                      <a:r>
+                        <a:rPr sz="2000" b="1">
+                          <a:solidFill>
+                            <a:srgbClr val="FFFBF0"/>
+                          </a:solidFill>
+                        </a:rPr>
+                        <a:t>Road Priority</a:t>
+                      </a:r>
+                    </a:p>
+                  </a:txBody>
+                  <a:tcPr>
+                    <a:solidFill>
+                      <a:srgbClr val="1A3D1A"/>
+                    </a:solidFill>
+                  </a:tcPr>
+                </a:tc>
+                <a:tc>
+                  <a:txBody>
+                    <a:bodyPr/>
+                    <a:lstStyle/>
+                    <a:p>
+                      <a:pPr algn="ctr"/>
+                      <a:r>
+                        <a:rPr sz="2000" b="1">
+                          <a:solidFill>
+                            <a:srgbClr val="FFFBF0"/>
+                          </a:solidFill>
+                        </a:rPr>
+                        <a:t>Build Priority</a:t>
+                      </a:r>
+                    </a:p>
+                  </a:txBody>
+                  <a:tcPr>
+                    <a:solidFill>
+                      <a:srgbClr val="1A3D1A"/>
+                    </a:solidFill>
+                  </a:tcPr>
+                </a:tc>
+                <a:extLst>
+                  <a:ext uri="{0D108BD9-81ED-4DB2-BD59-A6C34878D82A}">
+                    <a16:rowId xmlns:a16="http://schemas.microsoft.com/office/drawing/2014/main" val="10000"/>
+                  </a:ext>
+                </a:extLst>
+              </a:tr>
+              <a:tr h="1280160">
+                <a:tc>
+                  <a:txBody>
+                    <a:bodyPr/>
+                    <a:lstStyle/>
+                    <a:p>
+                      <a:pPr algn="l"/>
+                      <a:r>
+                        <a:rPr sz="1800" b="1" dirty="0"/>
+                        <a:t>balanced</a:t>
+                      </a:r>
+                    </a:p>
+                  </a:txBody>
+                  <a:tcPr>
+                    <a:solidFill>
+                      <a:srgbClr val="FFFBF0"/>
+                    </a:solidFill>
+                  </a:tcPr>
+                </a:tc>
+                <a:tc>
+                  <a:txBody>
+                    <a:bodyPr/>
+                    <a:lstStyle/>
+                    <a:p>
+                      <a:pPr algn="l"/>
+                      <a:r>
+                        <a:rPr sz="1800" b="0" dirty="0" err="1"/>
+                        <a:t>pip_sum</a:t>
+                      </a:r>
+                      <a:r>
+                        <a:rPr sz="1800" b="0" dirty="0"/>
+                        <a:t> + 1×distinct_resources
+(both picks use same formula; diversity naturally avoids duplication)</a:t>
+                      </a:r>
+                    </a:p>
+                  </a:txBody>
+                  <a:tcPr>
+                    <a:solidFill>
+                      <a:srgbClr val="FFFBF0"/>
+                    </a:solidFill>
+                  </a:tcPr>
+                </a:tc>
+                <a:tc>
+                  <a:txBody>
+                    <a:bodyPr/>
+                    <a:lstStyle/>
+                    <a:p>
+                      <a:pPr algn="l"/>
+                      <a:r>
+                        <a:rPr sz="1800" b="0"/>
+                        <a:t>Routes to highest-diversity open intersection; road built only when it opens a new settlement spot</a:t>
+                      </a:r>
+                    </a:p>
+                  </a:txBody>
+                  <a:tcPr>
+                    <a:solidFill>
+                      <a:srgbClr val="FFFBF0"/>
+                    </a:solidFill>
+                  </a:tcPr>
+                </a:tc>
+                <a:tc>
+                  <a:txBody>
+                    <a:bodyPr/>
+                    <a:lstStyle/>
+                    <a:p>
+                      <a:pPr algn="l"/>
+                      <a:r>
+                        <a:rPr sz="1800" b="0"/>
+                        <a:t>City → Settlement → Dev card → Road
+Flexible; city is top priority throughout</a:t>
+                      </a:r>
+                    </a:p>
+                  </a:txBody>
+                  <a:tcPr>
+                    <a:solidFill>
+                      <a:srgbClr val="FFFBF0"/>
+                    </a:solidFill>
+                  </a:tcPr>
+                </a:tc>
+                <a:extLst>
+                  <a:ext uri="{0D108BD9-81ED-4DB2-BD59-A6C34878D82A}">
+                    <a16:rowId xmlns:a16="http://schemas.microsoft.com/office/drawing/2014/main" val="10001"/>
+                  </a:ext>
+                </a:extLst>
+              </a:tr>
+              <a:tr h="1280160">
+                <a:tc>
+                  <a:txBody>
+                    <a:bodyPr/>
+                    <a:lstStyle/>
+                    <a:p>
+                      <a:pPr algn="l"/>
+                      <a:r>
+                        <a:rPr sz="1800" b="1"/>
+                        <a:t>sheep</a:t>
+                      </a:r>
+                    </a:p>
+                  </a:txBody>
+                  <a:tcPr>
+                    <a:solidFill>
+                      <a:srgbClr val="E8F0E0"/>
+                    </a:solidFill>
+                  </a:tcPr>
+                </a:tc>
+                <a:tc>
+                  <a:txBody>
+                    <a:bodyPr/>
+                    <a:lstStyle/>
+                    <a:p>
+                      <a:pPr algn="l"/>
+                      <a:r>
+                        <a:rPr sz="1800" b="0"/>
+                        <a:t>wool_pips×2 + total_pips×0.5
+2nd pick: infra guard (ensure lumber/brick) + Wool port bonus (+100)</a:t>
+                      </a:r>
+                    </a:p>
+                  </a:txBody>
+                  <a:tcPr>
+                    <a:solidFill>
+                      <a:srgbClr val="E8F0E0"/>
+                    </a:solidFill>
+                  </a:tcPr>
+                </a:tc>
+                <a:tc>
+                  <a:txBody>
+                    <a:bodyPr/>
+                    <a:lstStyle/>
+                    <a:p>
+                      <a:pPr algn="l"/>
+                      <a:r>
+                        <a:rPr sz="1800" b="0"/>
+                        <a:t>Routes to 2:1 Wool port until secured;
+then best remaining wool spot</a:t>
+                      </a:r>
+                    </a:p>
+                  </a:txBody>
+                  <a:tcPr>
+                    <a:solidFill>
+                      <a:srgbClr val="E8F0E0"/>
+                    </a:solidFill>
+                  </a:tcPr>
+                </a:tc>
+                <a:tc>
+                  <a:txBody>
+                    <a:bodyPr/>
+                    <a:lstStyle/>
+                    <a:p>
+                      <a:pPr algn="l"/>
+                      <a:r>
+                        <a:rPr sz="1800" b="0"/>
+                        <a:t>Dev card → Settlement → City → Road
+Bets on Largest Army VP; city deliberately deprioritised</a:t>
+                      </a:r>
+                    </a:p>
+                  </a:txBody>
+                  <a:tcPr>
+                    <a:solidFill>
+                      <a:srgbClr val="E8F0E0"/>
+                    </a:solidFill>
+                  </a:tcPr>
+                </a:tc>
+                <a:extLst>
+                  <a:ext uri="{0D108BD9-81ED-4DB2-BD59-A6C34878D82A}">
+                    <a16:rowId xmlns:a16="http://schemas.microsoft.com/office/drawing/2014/main" val="10002"/>
+                  </a:ext>
+                </a:extLst>
+              </a:tr>
+              <a:tr h="1280160">
+                <a:tc>
+                  <a:txBody>
+                    <a:bodyPr/>
+                    <a:lstStyle/>
+                    <a:p>
+                      <a:pPr algn="l"/>
+                      <a:r>
+                        <a:rPr sz="1800" b="1"/>
+                        <a:t>ore_grain</a:t>
+                      </a:r>
+                    </a:p>
+                  </a:txBody>
+                  <a:tcPr>
+                    <a:solidFill>
+                      <a:srgbClr val="FFFBF0"/>
+                    </a:solidFill>
+                  </a:tcPr>
+                </a:tc>
+                <a:tc>
+                  <a:txBody>
+                    <a:bodyPr/>
+                    <a:lstStyle/>
+                    <a:p>
+                      <a:pPr algn="l"/>
+                      <a:r>
+                        <a:rPr sz="1800" b="0"/>
+                        <a:t>(ore+grain)_pips×2 + total_pips×0.5
+2nd pick: infra guard + Ore/Grain port bonus (+50)</a:t>
+                      </a:r>
+                    </a:p>
+                  </a:txBody>
+                  <a:tcPr>
+                    <a:solidFill>
+                      <a:srgbClr val="FFFBF0"/>
+                    </a:solidFill>
+                  </a:tcPr>
+                </a:tc>
+                <a:tc>
+                  <a:txBody>
+                    <a:bodyPr/>
+                    <a:lstStyle/>
+                    <a:p>
+                      <a:pPr algn="l"/>
+                      <a:r>
+                        <a:rPr sz="1800" b="0"/>
+                        <a:t>Routes to 2:1 Ore or Grain port until secured;
+then best ore+grain spot</a:t>
+                      </a:r>
+                    </a:p>
+                  </a:txBody>
+                  <a:tcPr>
+                    <a:solidFill>
+                      <a:srgbClr val="FFFBF0"/>
+                    </a:solidFill>
+                  </a:tcPr>
+                </a:tc>
+                <a:tc>
+                  <a:txBody>
+                    <a:bodyPr/>
+                    <a:lstStyle/>
+                    <a:p>
+                      <a:pPr algn="l"/>
+                      <a:r>
+                        <a:rPr sz="1800" b="0" dirty="0"/>
+                        <a:t>City → Settlement (capped at 4) → Dev card → Road
+City upgrades are the entire strategy</a:t>
+                      </a:r>
+                    </a:p>
+                  </a:txBody>
+                  <a:tcPr>
+                    <a:solidFill>
+                      <a:srgbClr val="FFFBF0"/>
+                    </a:solidFill>
+                  </a:tcPr>
+                </a:tc>
+                <a:extLst>
+                  <a:ext uri="{0D108BD9-81ED-4DB2-BD59-A6C34878D82A}">
+                    <a16:rowId xmlns:a16="http://schemas.microsoft.com/office/drawing/2014/main" val="10003"/>
+                  </a:ext>
+                </a:extLst>
+              </a:tr>
+            </a:tbl>
+          </a:graphicData>
+        </a:graphic>
+      </p:graphicFrame>
     </p:spTree>
   </p:cSld>
   <p:clrMapOvr>
@@ -8691,8 +9702,8 @@
 </p:sld>
 </file>
 
-<file path=ppt/slides/slide8.xml><?xml version="1.0" encoding="utf-8"?>
-<p:sld xmlns:a="http://schemas.openxmlformats.org/drawingml/2006/main" xmlns:p="http://schemas.openxmlformats.org/presentationml/2006/main" xmlns:r="http://schemas.openxmlformats.org/officeDocument/2006/relationships">
+<file path=ppt/slides/slide7.xml><?xml version="1.0" encoding="utf-8"?>
+<p:sld xmlns:a="http://schemas.openxmlformats.org/drawingml/2006/main" xmlns:r="http://schemas.openxmlformats.org/officeDocument/2006/relationships" xmlns:p="http://schemas.openxmlformats.org/presentationml/2006/main">
   <p:cSld>
     <p:bg>
       <p:bgPr>
@@ -8708,7 +9719,14 @@
         <p:cNvGrpSpPr/>
         <p:nvPr/>
       </p:nvGrpSpPr>
-      <p:grpSpPr/>
+      <p:grpSpPr>
+        <a:xfrm>
+          <a:off x="0" y="0"/>
+          <a:ext cx="0" cy="0"/>
+          <a:chOff x="0" y="0"/>
+          <a:chExt cx="0" cy="0"/>
+        </a:xfrm>
+      </p:grpSpPr>
       <p:sp>
         <p:nvSpPr>
           <p:cNvPr id="2" name="Rectangle 1"/>
@@ -8724,7 +9742,7 @@
             <a:avLst/>
           </a:prstGeom>
           <a:solidFill>
-            <a:srgbClr val="2E7D32"/>
+            <a:srgbClr val="BB1111"/>
           </a:solidFill>
           <a:ln>
             <a:noFill/>
@@ -8749,6 +9767,7 @@
           <a:lstStyle/>
           <a:p>
             <a:pPr algn="ctr"/>
+            <a:endParaRPr/>
           </a:p>
         </p:txBody>
       </p:sp>
@@ -8781,7 +9800,7 @@
                   <a:srgbClr val="FFFBF0"/>
                 </a:solidFill>
               </a:rPr>
-              <a:t>Architecture: 6 R Modules</a:t>
+              <a:t>The Hypothesis: Why Sheep Loses</a:t>
             </a:r>
           </a:p>
         </p:txBody>
@@ -8828,6 +9847,7 @@
           <a:lstStyle/>
           <a:p>
             <a:pPr algn="ctr"/>
+            <a:endParaRPr/>
           </a:p>
         </p:txBody>
       </p:sp>
@@ -8853,14 +9873,13 @@
           </a:bodyPr>
           <a:lstStyle/>
           <a:p>
-            <a:pPr/>
             <a:r>
               <a:rPr sz="2000" b="1">
                 <a:solidFill>
                   <a:srgbClr val="1A3D1A"/>
                 </a:solidFill>
               </a:rPr>
-              <a:t>▸  board.R — Hex graph, board generation, ports</a:t>
+              <a:t>▸  Wool is structurally the weakest late-game resource</a:t>
             </a:r>
           </a:p>
           <a:p>
@@ -8871,7 +9890,7 @@
                   <a:srgbClr val="1A1A1A"/>
                 </a:solidFill>
               </a:rPr>
-              <a:t>     •  19 hexes · 54 intersections · 72 road edges · axial coordinate layout</a:t>
+              <a:t>     •  Needed for settlements &amp; dev cards — but NOT cities</a:t>
             </a:r>
           </a:p>
           <a:p>
@@ -8882,18 +9901,17 @@
                   <a:srgbClr val="1A1A1A"/>
                 </a:solidFill>
               </a:rPr>
-              <a:t>     •  generate_board() supports random terrain, tokens, and ports</a:t>
-            </a:r>
-          </a:p>
-          <a:p>
-            <a:pPr/>
+              <a:t>     •  Cities (3 Ore + 2 Grain) are the primary VP-scaling mechanism</a:t>
+            </a:r>
+          </a:p>
+          <a:p>
             <a:r>
               <a:rPr sz="2000" b="1">
                 <a:solidFill>
                   <a:srgbClr val="1A3D1A"/>
                 </a:solidFill>
               </a:rPr>
-              <a:t>▸  player.R — Player state and resource management</a:t>
+              <a:t>▸  Wool is the most abundant resource on the board</a:t>
             </a:r>
           </a:p>
           <a:p>
@@ -8904,7 +9922,7 @@
                   <a:srgbClr val="1A1A1A"/>
                 </a:solidFill>
               </a:rPr>
-              <a:t>     •  Resource cards, settlements, cities, roads, dev cards, VP</a:t>
+              <a:t>     •  4 Pasture hexes vs. only 3 Mountains and 3 Hills</a:t>
             </a:r>
           </a:p>
           <a:p>
@@ -8915,18 +9933,17 @@
                   <a:srgbClr val="1A1A1A"/>
                 </a:solidFill>
               </a:rPr>
-              <a:t>     •  can_build() / do_build() / do_trade() helpers; 7-card discard rule</a:t>
-            </a:r>
-          </a:p>
-          <a:p>
-            <a:pPr/>
+              <a:t>     •  Opponents naturally produce plenty of wool — the 2:1 port is less of an edge than 2:1 Ore or 2:1 Grain</a:t>
+            </a:r>
+          </a:p>
+          <a:p>
             <a:r>
               <a:rPr sz="2000" b="1">
                 <a:solidFill>
                   <a:srgbClr val="1A3D1A"/>
                 </a:solidFill>
               </a:rPr>
-              <a:t>▸  strategy.R — Strategy interface + implementations</a:t>
+              <a:t>▸  Placement trade-off hurts city-building</a:t>
             </a:r>
           </a:p>
           <a:p>
@@ -8937,40 +9954,28 @@
                   <a:srgbClr val="1A1A1A"/>
                 </a:solidFill>
               </a:rPr>
-              <a:t>     •  Each strategy is a named list of functions: choose_initial_placement, choose_road_placement, choose_action</a:t>
-            </a:r>
-          </a:p>
-          <a:p>
-            <a:pPr/>
+              <a:t>     •  Prioritising wool hexes means sacrificing better ore/grain spots</a:t>
+            </a:r>
+          </a:p>
+          <a:p>
+            <a:pPr lvl="1"/>
+            <a:r>
+              <a:rPr sz="1700" b="0">
+                <a:solidFill>
+                  <a:srgbClr val="1A1A1A"/>
+                </a:solidFill>
+              </a:rPr>
+              <a:t>     •  A wool surplus with no matching ore/grain cannot efficiently convert to VP</a:t>
+            </a:r>
+          </a:p>
+          <a:p>
             <a:r>
               <a:rPr sz="2000" b="1">
                 <a:solidFill>
                   <a:srgbClr val="1A3D1A"/>
                 </a:solidFill>
               </a:rPr>
-              <a:t>▸  game.R — Single game loop (reverse snake draft → turns → win check)</a:t>
-            </a:r>
-          </a:p>
-          <a:p>
-            <a:pPr/>
-            <a:r>
-              <a:rPr sz="2000" b="1">
-                <a:solidFill>
-                  <a:srgbClr val="1A3D1A"/>
-                </a:solidFill>
-              </a:rPr>
-              <a:t>▸  simulation.R — Monte Carlo runner: run_simulation(n_games, seed)</a:t>
-            </a:r>
-          </a:p>
-          <a:p>
-            <a:pPr/>
-            <a:r>
-              <a:rPr sz="2000" b="1">
-                <a:solidFill>
-                  <a:srgbClr val="1A3D1A"/>
-                </a:solidFill>
-              </a:rPr>
-              <a:t>▸  analysis.R — ggplot2 charts + chi-squared significance test</a:t>
+              <a:t>▸  Success criterion: sheep win rate significantly lower than balanced (p &lt; 0.05)</a:t>
             </a:r>
           </a:p>
         </p:txBody>
@@ -8983,8 +9988,8 @@
 </p:sld>
 </file>
 
-<file path=ppt/slides/slide9.xml><?xml version="1.0" encoding="utf-8"?>
-<p:sld xmlns:a="http://schemas.openxmlformats.org/drawingml/2006/main" xmlns:p="http://schemas.openxmlformats.org/presentationml/2006/main" xmlns:r="http://schemas.openxmlformats.org/officeDocument/2006/relationships">
+<file path=ppt/slides/slide8.xml><?xml version="1.0" encoding="utf-8"?>
+<p:sld xmlns:a="http://schemas.openxmlformats.org/drawingml/2006/main" xmlns:r="http://schemas.openxmlformats.org/officeDocument/2006/relationships" xmlns:p="http://schemas.openxmlformats.org/presentationml/2006/main">
   <p:cSld>
     <p:bg>
       <p:bgPr>
@@ -9000,7 +10005,14 @@
         <p:cNvGrpSpPr/>
         <p:nvPr/>
       </p:nvGrpSpPr>
-      <p:grpSpPr/>
+      <p:grpSpPr>
+        <a:xfrm>
+          <a:off x="0" y="0"/>
+          <a:ext cx="0" cy="0"/>
+          <a:chOff x="0" y="0"/>
+          <a:chExt cx="0" cy="0"/>
+        </a:xfrm>
+      </p:grpSpPr>
       <p:sp>
         <p:nvSpPr>
           <p:cNvPr id="2" name="Rectangle 1"/>
@@ -9041,6 +10053,7 @@
           <a:lstStyle/>
           <a:p>
             <a:pPr algn="ctr"/>
+            <a:endParaRPr/>
           </a:p>
         </p:txBody>
       </p:sp>
@@ -9073,7 +10086,7 @@
                   <a:srgbClr val="FFFBF0"/>
                 </a:solidFill>
               </a:rPr>
-              <a:t>Game Loop (game.R)</a:t>
+              <a:t>Architecture: 7 R Modules</a:t>
             </a:r>
           </a:p>
         </p:txBody>
@@ -9120,6 +10133,7 @@
           <a:lstStyle/>
           <a:p>
             <a:pPr algn="ctr"/>
+            <a:endParaRPr/>
           </a:p>
         </p:txBody>
       </p:sp>
@@ -9145,13 +10159,308 @@
           </a:bodyPr>
           <a:lstStyle/>
           <a:p>
-            <a:pPr/>
             <a:r>
               <a:rPr sz="2000" b="1">
                 <a:solidFill>
                   <a:srgbClr val="1A3D1A"/>
                 </a:solidFill>
               </a:rPr>
+              <a:t>▸  board.R — Hex graph, board generation, ports</a:t>
+            </a:r>
+          </a:p>
+          <a:p>
+            <a:pPr lvl="1"/>
+            <a:r>
+              <a:rPr sz="1700" b="0">
+                <a:solidFill>
+                  <a:srgbClr val="1A1A1A"/>
+                </a:solidFill>
+              </a:rPr>
+              <a:t>     •  19 hexes · 54 intersections · 72 road edges · axial coordinate layout</a:t>
+            </a:r>
+          </a:p>
+          <a:p>
+            <a:pPr lvl="1"/>
+            <a:r>
+              <a:rPr sz="1700" b="0">
+                <a:solidFill>
+                  <a:srgbClr val="1A1A1A"/>
+                </a:solidFill>
+              </a:rPr>
+              <a:t>     •  generate_board() supports random terrain, tokens, and ports</a:t>
+            </a:r>
+          </a:p>
+          <a:p>
+            <a:r>
+              <a:rPr sz="2000" b="1">
+                <a:solidFill>
+                  <a:srgbClr val="1A3D1A"/>
+                </a:solidFill>
+              </a:rPr>
+              <a:t>▸  player.R — Player state and resource management</a:t>
+            </a:r>
+          </a:p>
+          <a:p>
+            <a:pPr lvl="1"/>
+            <a:r>
+              <a:rPr sz="1700" b="0">
+                <a:solidFill>
+                  <a:srgbClr val="1A1A1A"/>
+                </a:solidFill>
+              </a:rPr>
+              <a:t>     •  Resource cards, settlements, cities, roads, dev cards, VP</a:t>
+            </a:r>
+          </a:p>
+          <a:p>
+            <a:pPr lvl="1"/>
+            <a:r>
+              <a:rPr sz="1700" b="0">
+                <a:solidFill>
+                  <a:srgbClr val="1A1A1A"/>
+                </a:solidFill>
+              </a:rPr>
+              <a:t>     •  can_build() / do_build() / do_trade() helpers; 7-card discard rule</a:t>
+            </a:r>
+          </a:p>
+          <a:p>
+            <a:r>
+              <a:rPr sz="2000" b="1">
+                <a:solidFill>
+                  <a:srgbClr val="1A3D1A"/>
+                </a:solidFill>
+              </a:rPr>
+              <a:t>▸  strategy.R — Strategy interface + implementations</a:t>
+            </a:r>
+          </a:p>
+          <a:p>
+            <a:pPr lvl="1"/>
+            <a:r>
+              <a:rPr sz="1700" b="0">
+                <a:solidFill>
+                  <a:srgbClr val="1A1A1A"/>
+                </a:solidFill>
+              </a:rPr>
+              <a:t>     •  Each strategy is a named list of functions: choose_initial_placement, choose_second_placement, choose_road_placement, choose_action</a:t>
+            </a:r>
+          </a:p>
+          <a:p>
+            <a:r>
+              <a:rPr sz="2000" b="1">
+                <a:solidFill>
+                  <a:srgbClr val="1A3D1A"/>
+                </a:solidFill>
+              </a:rPr>
+              <a:t>▸  game.R — Single game loop (reverse snake draft → turns → win check)</a:t>
+            </a:r>
+          </a:p>
+          <a:p>
+            <a:r>
+              <a:rPr sz="2000" b="1">
+                <a:solidFill>
+                  <a:srgbClr val="1A3D1A"/>
+                </a:solidFill>
+              </a:rPr>
+              <a:t>▸  simulation.R — Monte Carlo runner: run_simulation(n_games, strategies, seed)</a:t>
+            </a:r>
+          </a:p>
+          <a:p>
+            <a:r>
+              <a:rPr sz="2000" b="1">
+                <a:solidFill>
+                  <a:srgbClr val="1A3D1A"/>
+                </a:solidFill>
+              </a:rPr>
+              <a:t>▸  analysis.R — ggplot2 charts + chi-squared significance test
+▸  visualize_board.R — Board &amp; game-state rendering (plot_board, plot_game_state)</a:t>
+            </a:r>
+          </a:p>
+        </p:txBody>
+      </p:sp>
+    </p:spTree>
+  </p:cSld>
+  <p:clrMapOvr>
+    <a:masterClrMapping/>
+  </p:clrMapOvr>
+</p:sld>
+</file>
+
+<file path=ppt/slides/slide9.xml><?xml version="1.0" encoding="utf-8"?>
+<p:sld xmlns:a="http://schemas.openxmlformats.org/drawingml/2006/main" xmlns:r="http://schemas.openxmlformats.org/officeDocument/2006/relationships" xmlns:p="http://schemas.openxmlformats.org/presentationml/2006/main">
+  <p:cSld>
+    <p:bg>
+      <p:bgPr>
+        <a:solidFill>
+          <a:srgbClr val="F5F5F0"/>
+        </a:solidFill>
+        <a:effectLst/>
+      </p:bgPr>
+    </p:bg>
+    <p:spTree>
+      <p:nvGrpSpPr>
+        <p:cNvPr id="1" name=""/>
+        <p:cNvGrpSpPr/>
+        <p:nvPr/>
+      </p:nvGrpSpPr>
+      <p:grpSpPr>
+        <a:xfrm>
+          <a:off x="0" y="0"/>
+          <a:ext cx="0" cy="0"/>
+          <a:chOff x="0" y="0"/>
+          <a:chExt cx="0" cy="0"/>
+        </a:xfrm>
+      </p:grpSpPr>
+      <p:sp>
+        <p:nvSpPr>
+          <p:cNvPr id="2" name="Rectangle 1"/>
+          <p:cNvSpPr/>
+          <p:nvPr/>
+        </p:nvSpPr>
+        <p:spPr>
+          <a:xfrm>
+            <a:off x="0" y="0"/>
+            <a:ext cx="12188952" cy="1005840"/>
+          </a:xfrm>
+          <a:prstGeom prst="rect">
+            <a:avLst/>
+          </a:prstGeom>
+          <a:solidFill>
+            <a:srgbClr val="2E7D32"/>
+          </a:solidFill>
+          <a:ln>
+            <a:noFill/>
+          </a:ln>
+        </p:spPr>
+        <p:style>
+          <a:lnRef idx="1">
+            <a:schemeClr val="accent1"/>
+          </a:lnRef>
+          <a:fillRef idx="3">
+            <a:schemeClr val="accent1"/>
+          </a:fillRef>
+          <a:effectRef idx="2">
+            <a:schemeClr val="accent1"/>
+          </a:effectRef>
+          <a:fontRef idx="minor">
+            <a:schemeClr val="lt1"/>
+          </a:fontRef>
+        </p:style>
+        <p:txBody>
+          <a:bodyPr rtlCol="0" anchor="ctr"/>
+          <a:lstStyle/>
+          <a:p>
+            <a:pPr algn="ctr"/>
+            <a:endParaRPr/>
+          </a:p>
+        </p:txBody>
+      </p:sp>
+      <p:sp>
+        <p:nvSpPr>
+          <p:cNvPr id="3" name="TextBox 2"/>
+          <p:cNvSpPr txBox="1"/>
+          <p:nvPr/>
+        </p:nvSpPr>
+        <p:spPr>
+          <a:xfrm>
+            <a:off x="365760" y="109728"/>
+            <a:ext cx="11430000" cy="822960"/>
+          </a:xfrm>
+          <a:prstGeom prst="rect">
+            <a:avLst/>
+          </a:prstGeom>
+          <a:noFill/>
+        </p:spPr>
+        <p:txBody>
+          <a:bodyPr wrap="square">
+            <a:spAutoFit/>
+          </a:bodyPr>
+          <a:lstStyle/>
+          <a:p>
+            <a:pPr algn="l"/>
+            <a:r>
+              <a:rPr sz="3200" b="1" i="0">
+                <a:solidFill>
+                  <a:srgbClr val="FFFBF0"/>
+                </a:solidFill>
+              </a:rPr>
+              <a:t>Game Loop (game.R)</a:t>
+            </a:r>
+          </a:p>
+        </p:txBody>
+      </p:sp>
+      <p:sp>
+        <p:nvSpPr>
+          <p:cNvPr id="4" name="Rectangle 3"/>
+          <p:cNvSpPr/>
+          <p:nvPr/>
+        </p:nvSpPr>
+        <p:spPr>
+          <a:xfrm>
+            <a:off x="274320" y="1143000"/>
+            <a:ext cx="11612880" cy="5394960"/>
+          </a:xfrm>
+          <a:prstGeom prst="rect">
+            <a:avLst/>
+          </a:prstGeom>
+          <a:solidFill>
+            <a:srgbClr val="FFFBF0"/>
+          </a:solidFill>
+          <a:ln w="9525">
+            <a:solidFill>
+              <a:srgbClr val="CCCCBB"/>
+            </a:solidFill>
+          </a:ln>
+        </p:spPr>
+        <p:style>
+          <a:lnRef idx="1">
+            <a:schemeClr val="accent1"/>
+          </a:lnRef>
+          <a:fillRef idx="3">
+            <a:schemeClr val="accent1"/>
+          </a:fillRef>
+          <a:effectRef idx="2">
+            <a:schemeClr val="accent1"/>
+          </a:effectRef>
+          <a:fontRef idx="minor">
+            <a:schemeClr val="lt1"/>
+          </a:fontRef>
+        </p:style>
+        <p:txBody>
+          <a:bodyPr rtlCol="0" anchor="ctr"/>
+          <a:lstStyle/>
+          <a:p>
+            <a:pPr algn="ctr"/>
+            <a:endParaRPr/>
+          </a:p>
+        </p:txBody>
+      </p:sp>
+      <p:sp>
+        <p:nvSpPr>
+          <p:cNvPr id="5" name="TextBox 4"/>
+          <p:cNvSpPr txBox="1"/>
+          <p:nvPr/>
+        </p:nvSpPr>
+        <p:spPr>
+          <a:xfrm>
+            <a:off x="502920" y="1280160"/>
+            <a:ext cx="11155680" cy="5120640"/>
+          </a:xfrm>
+          <a:prstGeom prst="rect">
+            <a:avLst/>
+          </a:prstGeom>
+          <a:noFill/>
+        </p:spPr>
+        <p:txBody>
+          <a:bodyPr wrap="square">
+            <a:spAutoFit/>
+          </a:bodyPr>
+          <a:lstStyle/>
+          <a:p>
+            <a:r>
+              <a:rPr sz="2000" b="1">
+                <a:solidFill>
+                  <a:srgbClr val="1A3D1A"/>
+                </a:solidFill>
+              </a:rPr>
               <a:t>▸  Initial placement — reverse snake draft</a:t>
             </a:r>
           </a:p>
@@ -9178,7 +10487,6 @@
             </a:r>
           </a:p>
           <a:p>
-            <a:pPr/>
             <a:r>
               <a:rPr sz="2000" b="1">
                 <a:solidFill>
@@ -9222,7 +10530,6 @@
             </a:r>
           </a:p>
           <a:p>
-            <a:pPr/>
             <a:r>
               <a:rPr sz="2000" b="1">
                 <a:solidFill>
@@ -9240,11 +10547,10 @@
                   <a:srgbClr val="1A1A1A"/>
                 </a:solidFill>
               </a:rPr>
-              <a:t>     •  Stalemate safeguard: game ends after 200 turns (recorded as NA winner)</a:t>
-            </a:r>
-          </a:p>
-          <a:p>
-            <a:pPr/>
+              <a:t>     •  Stalemate safeguard: game ends after 500 turns (recorded as NA winner)</a:t>
+            </a:r>
+          </a:p>
+          <a:p>
             <a:r>
               <a:rPr sz="2000" b="1">
                 <a:solidFill>
